--- a/09_meetings/ICELAND_Sales_Review_2026/ISZE_ICELAND_Sales_Review_FY2027.pptx
+++ b/09_meetings/ICELAND_Sales_Review_2026/ISZE_ICELAND_Sales_Review_FY2027.pptx
@@ -23,6 +23,20 @@
     <p:sldId id="271" r:id="rId22"/>
     <p:sldId id="272" r:id="rId23"/>
     <p:sldId id="273" r:id="rId24"/>
+    <p:sldId id="274" r:id="rId25"/>
+    <p:sldId id="275" r:id="rId26"/>
+    <p:sldId id="276" r:id="rId27"/>
+    <p:sldId id="277" r:id="rId28"/>
+    <p:sldId id="278" r:id="rId29"/>
+    <p:sldId id="279" r:id="rId30"/>
+    <p:sldId id="280" r:id="rId31"/>
+    <p:sldId id="281" r:id="rId32"/>
+    <p:sldId id="282" r:id="rId33"/>
+    <p:sldId id="283" r:id="rId34"/>
+    <p:sldId id="284" r:id="rId35"/>
+    <p:sldId id="285" r:id="rId36"/>
+    <p:sldId id="286" r:id="rId37"/>
+    <p:sldId id="287" r:id="rId38"/>
   </p:sldIdLst>
   <p:sldSz cx="12188952" cy="6858000" type="screen4x3"/>
   <p:notesSz cx="6858000" cy="9144000"/>
@@ -3257,7 +3271,7 @@
                 </a:solidFill>
                 <a:latin typeface="Calibri"/>
               </a:rPr>
-              <a:t>BL ehf.  ·  July 2026</a:t>
+              <a:t>BL ehf.  ·  August 2026</a:t>
             </a:r>
           </a:p>
         </p:txBody>
@@ -3487,7 +3501,7 @@
                 </a:solidFill>
                 <a:latin typeface="Calibri"/>
               </a:rPr>
-              <a:t>Service-parts coverage: brake rotor is the clear gap</a:t>
+              <a:t>Service-parts coverage: fuel filter is the clear gap</a:t>
             </a:r>
           </a:p>
         </p:txBody>
@@ -3718,7 +3732,7 @@
                 </a:solidFill>
                 <a:latin typeface="Calibri"/>
               </a:rPr>
-              <a:t>Brake rotor 3.9% against 13.4% for the rest of the network.</a:t>
+              <a:t>Fuel filter 23.6% against 46.6% for the rest of the network.</a:t>
             </a:r>
           </a:p>
           <a:p>
@@ -3746,7 +3760,7 @@
                 </a:solidFill>
                 <a:latin typeface="Calibri"/>
               </a:rPr>
-              <a:t>Fuel filter 7.9% against 11.8% for the rest of the network.</a:t>
+              <a:t>Brake pad 22.2% against 29.5% for the rest of the network.</a:t>
             </a:r>
           </a:p>
           <a:p>
@@ -4196,7 +4210,7 @@
                 </a:solidFill>
                 <a:latin typeface="Calibri"/>
               </a:rPr>
-              <a:t>Parc 406 in 2025 and 401 in the 2026 working year-end estimate — -1.2%.</a:t>
+              <a:t>Fleet size (calendar year): 406 vehicles in 2025 → 401 working estimate for end-2026 (-1.2%).</a:t>
             </a:r>
           </a:p>
           <a:p>
@@ -4224,7 +4238,7 @@
                 </a:solidFill>
                 <a:latin typeface="Calibri"/>
               </a:rPr>
-              <a:t>The chart shows 2019–2026 only. The 2026 point is a working year-end estimate.</a:t>
+              <a:t>The chart is calendar years 2019–2026 only. 2026 is a working year-end estimate, not a fiscal-year figure.</a:t>
             </a:r>
           </a:p>
           <a:p>
@@ -4252,7 +4266,7 @@
                 </a:solidFill>
                 <a:latin typeface="Calibri"/>
               </a:rPr>
-              <a:t>The FY2027 Sales-to-Dealer target applies this fleet movement, a 5% price adjustment and 1.8% additional growth.</a:t>
+              <a:t>End-2026 mix: LCV / D-Max 401; CV — LD 0; CV — MD 0.</a:t>
             </a:r>
           </a:p>
           <a:p>
@@ -4280,7 +4294,35 @@
                 </a:solidFill>
                 <a:latin typeface="Calibri"/>
               </a:rPr>
-              <a:t>The target therefore starts from a contracting fleet, not an assumed growth story.</a:t>
+              <a:t>The FY2027 Sales-to-Dealer target starts from that fleet change, then applies a 5% price adjustment and 1.8% additional growth.</a:t>
+            </a:r>
+          </a:p>
+          <a:p>
+            <a:pPr>
+              <a:lnSpc>
+                <a:spcPct val="125000"/>
+              </a:lnSpc>
+              <a:spcAft>
+                <a:spcPts val="1000"/>
+              </a:spcAft>
+            </a:pPr>
+            <a:r>
+              <a:rPr sz="1250" b="1">
+                <a:solidFill>
+                  <a:srgbClr val="CC0E1E"/>
+                </a:solidFill>
+                <a:latin typeface="Calibri"/>
+              </a:rPr>
+              <a:t>—  </a:t>
+            </a:r>
+            <a:r>
+              <a:rPr sz="1250">
+                <a:solidFill>
+                  <a:srgbClr val="1A1A1A"/>
+                </a:solidFill>
+                <a:latin typeface="Calibri"/>
+              </a:rPr>
+              <a:t>So the target is built from a slightly smaller fleet — not from an assumed growth story.</a:t>
             </a:r>
           </a:p>
         </p:txBody>
@@ -5758,8 +5800,8 @@
         </p:nvSpPr>
         <p:spPr>
           <a:xfrm>
-            <a:off x="292608" y="5212080"/>
-            <a:ext cx="11612880" cy="822960"/>
+            <a:off x="292608" y="5074920"/>
+            <a:ext cx="11612880" cy="960120"/>
           </a:xfrm>
           <a:prstGeom prst="rect">
             <a:avLst/>
@@ -5796,7 +5838,35 @@
                 </a:solidFill>
                 <a:latin typeface="Calibri"/>
               </a:rPr>
-              <a:t>As in previous cycles we would expect an incentive to sit alongside this adjustment — that approval is still pending on our side. We will confirm as soon as we have it.</a:t>
+              <a:t>As in previous cycles we would expect an incentive to sit alongside this adjustment — that approval is still pending on our side.</a:t>
+            </a:r>
+          </a:p>
+          <a:p>
+            <a:pPr>
+              <a:lnSpc>
+                <a:spcPct val="125000"/>
+              </a:lnSpc>
+              <a:spcAft>
+                <a:spcPts val="1000"/>
+              </a:spcAft>
+            </a:pPr>
+            <a:r>
+              <a:rPr sz="1250" b="1">
+                <a:solidFill>
+                  <a:srgbClr val="CC0E1E"/>
+                </a:solidFill>
+                <a:latin typeface="Calibri"/>
+              </a:rPr>
+              <a:t>—  </a:t>
+            </a:r>
+            <a:r>
+              <a:rPr sz="1250">
+                <a:solidFill>
+                  <a:srgbClr val="1A1A1A"/>
+                </a:solidFill>
+                <a:latin typeface="Calibri"/>
+              </a:rPr>
+              <a:t>Until the incentive is confirmed, treat the FY2027 target as the working bridge (fleet × price × additional growth), not a locked commercial commitment.</a:t>
             </a:r>
           </a:p>
         </p:txBody>
@@ -8714,7 +8784,7 @@
                 </a:solidFill>
                 <a:latin typeface="Calibri"/>
               </a:rPr>
-              <a:t>Confirm FY2027 Sales-to-Dealer target: EUR 206,765 (+5.6% vs FY2026 Sales-to-Dealer).</a:t>
+              <a:t>Align on the FY2027 Sales-to-Dealer bridge (fleet, price, additional growth) — working figure EUR 206,765 (+5.6% vs FY2026 base).</a:t>
             </a:r>
           </a:p>
           <a:p>
@@ -8742,7 +8812,7 @@
                 </a:solidFill>
                 <a:latin typeface="Calibri"/>
               </a:rPr>
-              <a:t>Confirm the incentive alongside the price adjustment once approved on our side.</a:t>
+              <a:t>Confirm the incentive alongside the price adjustment; lock the target once that approval is through.</a:t>
             </a:r>
           </a:p>
           <a:p>
@@ -8770,7 +8840,7 @@
                 </a:solidFill>
                 <a:latin typeface="Calibri"/>
               </a:rPr>
-              <a:t>Transmission parts and Air conditioning: agree which category we tackle first, and what the joint action is.</a:t>
+              <a:t>Transmission parts / Air conditioning: agree which category we tackle first, and what the joint action is.</a:t>
             </a:r>
           </a:p>
           <a:p>
@@ -8959,6 +9029,354 @@
           </a:prstGeom>
         </p:spPr>
       </p:pic>
+    </p:spTree>
+  </p:cSld>
+  <p:clrMapOvr>
+    <a:masterClrMapping/>
+  </p:clrMapOvr>
+</p:sld>
+</file>
+
+<file path=ppt/slides/slide19.xml><?xml version="1.0" encoding="utf-8"?>
+<p:sld xmlns:a="http://schemas.openxmlformats.org/drawingml/2006/main" xmlns:p="http://schemas.openxmlformats.org/presentationml/2006/main" xmlns:r="http://schemas.openxmlformats.org/officeDocument/2006/relationships">
+  <p:cSld>
+    <p:bg>
+      <p:bgPr>
+        <a:solidFill>
+          <a:srgbClr val="FFFFFF"/>
+        </a:solidFill>
+        <a:effectLst/>
+      </p:bgPr>
+    </p:bg>
+    <p:spTree>
+      <p:nvGrpSpPr>
+        <p:cNvPr id="1" name=""/>
+        <p:cNvGrpSpPr/>
+        <p:nvPr/>
+      </p:nvGrpSpPr>
+      <p:grpSpPr/>
+      <p:pic>
+        <p:nvPicPr>
+          <p:cNvPr id="2" name="Picture 1" descr="image.png"/>
+          <p:cNvPicPr>
+            <a:picLocks noChangeAspect="1"/>
+          </p:cNvPicPr>
+          <p:nvPr/>
+        </p:nvPicPr>
+        <p:blipFill>
+          <a:blip r:embed="rId2"/>
+          <a:stretch>
+            <a:fillRect/>
+          </a:stretch>
+        </p:blipFill>
+        <p:spPr>
+          <a:xfrm>
+            <a:off x="256032" y="6263640"/>
+            <a:ext cx="1679787" cy="292608"/>
+          </a:xfrm>
+          <a:prstGeom prst="rect">
+            <a:avLst/>
+          </a:prstGeom>
+        </p:spPr>
+      </p:pic>
+      <p:sp>
+        <p:nvSpPr>
+          <p:cNvPr id="3" name="Rectangle 2"/>
+          <p:cNvSpPr/>
+          <p:nvPr/>
+        </p:nvSpPr>
+        <p:spPr>
+          <a:xfrm>
+            <a:off x="0" y="6766560"/>
+            <a:ext cx="12188952" cy="91440"/>
+          </a:xfrm>
+          <a:prstGeom prst="rect">
+            <a:avLst/>
+          </a:prstGeom>
+          <a:solidFill>
+            <a:srgbClr val="CC0E1E"/>
+          </a:solidFill>
+          <a:ln>
+            <a:noFill/>
+          </a:ln>
+        </p:spPr>
+        <p:style>
+          <a:lnRef idx="1">
+            <a:schemeClr val="accent1"/>
+          </a:lnRef>
+          <a:fillRef idx="3">
+            <a:schemeClr val="accent1"/>
+          </a:fillRef>
+          <a:effectRef idx="2">
+            <a:schemeClr val="accent1"/>
+          </a:effectRef>
+          <a:fontRef idx="minor">
+            <a:schemeClr val="lt1"/>
+          </a:fontRef>
+        </p:style>
+        <p:txBody>
+          <a:bodyPr rtlCol="0" anchor="ctr"/>
+          <a:lstStyle/>
+          <a:p>
+            <a:pPr algn="ctr"/>
+          </a:p>
+        </p:txBody>
+      </p:sp>
+      <p:sp>
+        <p:nvSpPr>
+          <p:cNvPr id="4" name="TextBox 3"/>
+          <p:cNvSpPr txBox="1"/>
+          <p:nvPr/>
+        </p:nvSpPr>
+        <p:spPr>
+          <a:xfrm>
+            <a:off x="292608" y="201168"/>
+            <a:ext cx="11430000" cy="274320"/>
+          </a:xfrm>
+          <a:prstGeom prst="rect">
+            <a:avLst/>
+          </a:prstGeom>
+          <a:noFill/>
+        </p:spPr>
+        <p:txBody>
+          <a:bodyPr wrap="square">
+            <a:spAutoFit/>
+          </a:bodyPr>
+          <a:lstStyle/>
+          <a:p>
+            <a:pPr algn="l"/>
+            <a:r>
+              <a:rPr sz="1100" b="1">
+                <a:solidFill>
+                  <a:srgbClr val="CC0E1E"/>
+                </a:solidFill>
+                <a:latin typeface="Calibri"/>
+              </a:rPr>
+              <a:t>ICELAND · BL EHF.</a:t>
+            </a:r>
+          </a:p>
+        </p:txBody>
+      </p:sp>
+      <p:sp>
+        <p:nvSpPr>
+          <p:cNvPr id="5" name="TextBox 4"/>
+          <p:cNvSpPr txBox="1"/>
+          <p:nvPr/>
+        </p:nvSpPr>
+        <p:spPr>
+          <a:xfrm>
+            <a:off x="292608" y="475488"/>
+            <a:ext cx="11612880" cy="566928"/>
+          </a:xfrm>
+          <a:prstGeom prst="rect">
+            <a:avLst/>
+          </a:prstGeom>
+          <a:noFill/>
+        </p:spPr>
+        <p:txBody>
+          <a:bodyPr wrap="square">
+            <a:spAutoFit/>
+          </a:bodyPr>
+          <a:lstStyle/>
+          <a:p>
+            <a:pPr algn="l"/>
+            <a:r>
+              <a:rPr sz="2500" b="1">
+                <a:solidFill>
+                  <a:srgbClr val="1A1A1A"/>
+                </a:solidFill>
+                <a:latin typeface="Calibri"/>
+              </a:rPr>
+              <a:t>Deep dive — detail behind the Mode A story</a:t>
+            </a:r>
+          </a:p>
+        </p:txBody>
+      </p:sp>
+      <p:sp>
+        <p:nvSpPr>
+          <p:cNvPr id="6" name="Rectangle 5"/>
+          <p:cNvSpPr/>
+          <p:nvPr/>
+        </p:nvSpPr>
+        <p:spPr>
+          <a:xfrm>
+            <a:off x="292608" y="1005840"/>
+            <a:ext cx="11612880" cy="28000"/>
+          </a:xfrm>
+          <a:prstGeom prst="rect">
+            <a:avLst/>
+          </a:prstGeom>
+          <a:solidFill>
+            <a:srgbClr val="CC0E1E"/>
+          </a:solidFill>
+          <a:ln>
+            <a:noFill/>
+          </a:ln>
+        </p:spPr>
+        <p:style>
+          <a:lnRef idx="1">
+            <a:schemeClr val="accent1"/>
+          </a:lnRef>
+          <a:fillRef idx="3">
+            <a:schemeClr val="accent1"/>
+          </a:fillRef>
+          <a:effectRef idx="2">
+            <a:schemeClr val="accent1"/>
+          </a:effectRef>
+          <a:fontRef idx="minor">
+            <a:schemeClr val="lt1"/>
+          </a:fontRef>
+        </p:style>
+        <p:txBody>
+          <a:bodyPr rtlCol="0" anchor="ctr"/>
+          <a:lstStyle/>
+          <a:p>
+            <a:pPr algn="ctr"/>
+          </a:p>
+        </p:txBody>
+      </p:sp>
+      <p:sp>
+        <p:nvSpPr>
+          <p:cNvPr id="7" name="TextBox 6"/>
+          <p:cNvSpPr txBox="1"/>
+          <p:nvPr/>
+        </p:nvSpPr>
+        <p:spPr>
+          <a:xfrm>
+            <a:off x="11594592" y="6473952"/>
+            <a:ext cx="365760" cy="274320"/>
+          </a:xfrm>
+          <a:prstGeom prst="rect">
+            <a:avLst/>
+          </a:prstGeom>
+          <a:noFill/>
+        </p:spPr>
+        <p:txBody>
+          <a:bodyPr wrap="square">
+            <a:spAutoFit/>
+          </a:bodyPr>
+          <a:lstStyle/>
+          <a:p>
+            <a:pPr algn="r"/>
+            <a:r>
+              <a:rPr sz="1000" b="0">
+                <a:solidFill>
+                  <a:srgbClr val="5A5A5A"/>
+                </a:solidFill>
+                <a:latin typeface="Calibri"/>
+              </a:rPr>
+              <a:t>19</a:t>
+            </a:r>
+          </a:p>
+        </p:txBody>
+      </p:sp>
+      <p:sp>
+        <p:nvSpPr>
+          <p:cNvPr id="8" name="TextBox 7"/>
+          <p:cNvSpPr txBox="1"/>
+          <p:nvPr/>
+        </p:nvSpPr>
+        <p:spPr>
+          <a:xfrm>
+            <a:off x="292608" y="1325880"/>
+            <a:ext cx="10972800" cy="4114800"/>
+          </a:xfrm>
+          <a:prstGeom prst="rect">
+            <a:avLst/>
+          </a:prstGeom>
+          <a:noFill/>
+        </p:spPr>
+        <p:txBody>
+          <a:bodyPr wrap="square">
+            <a:spAutoFit/>
+          </a:bodyPr>
+          <a:lstStyle/>
+          <a:p>
+            <a:pPr>
+              <a:lnSpc>
+                <a:spcPct val="125000"/>
+              </a:lnSpc>
+              <a:spcAft>
+                <a:spcPts val="1000"/>
+              </a:spcAft>
+            </a:pPr>
+            <a:r>
+              <a:rPr sz="1500" b="1">
+                <a:solidFill>
+                  <a:srgbClr val="CC0E1E"/>
+                </a:solidFill>
+                <a:latin typeface="Calibri"/>
+              </a:rPr>
+              <a:t>—  </a:t>
+            </a:r>
+            <a:r>
+              <a:rPr sz="1500">
+                <a:solidFill>
+                  <a:srgbClr val="1A1A1A"/>
+                </a:solidFill>
+                <a:latin typeface="Calibri"/>
+              </a:rPr>
+              <a:t>Extra detail for meeting prep — pick which slides to share with BL ehf..</a:t>
+            </a:r>
+          </a:p>
+          <a:p>
+            <a:pPr>
+              <a:lnSpc>
+                <a:spcPct val="125000"/>
+              </a:lnSpc>
+              <a:spcAft>
+                <a:spcPts val="1000"/>
+              </a:spcAft>
+            </a:pPr>
+            <a:r>
+              <a:rPr sz="1500" b="1">
+                <a:solidFill>
+                  <a:srgbClr val="CC0E1E"/>
+                </a:solidFill>
+                <a:latin typeface="Calibri"/>
+              </a:rPr>
+              <a:t>—  </a:t>
+            </a:r>
+            <a:r>
+              <a:rPr sz="1500">
+                <a:solidFill>
+                  <a:srgbClr val="1A1A1A"/>
+                </a:solidFill>
+                <a:latin typeface="Calibri"/>
+              </a:rPr>
+              <a:t>Mode A ends on the previous closing slide.</a:t>
+            </a:r>
+          </a:p>
+          <a:p>
+            <a:pPr>
+              <a:lnSpc>
+                <a:spcPct val="125000"/>
+              </a:lnSpc>
+              <a:spcAft>
+                <a:spcPts val="1000"/>
+              </a:spcAft>
+            </a:pPr>
+            <a:r>
+              <a:rPr sz="1500" b="1">
+                <a:solidFill>
+                  <a:srgbClr val="CC0E1E"/>
+                </a:solidFill>
+                <a:latin typeface="Calibri"/>
+              </a:rPr>
+              <a:t>—  </a:t>
+            </a:r>
+            <a:r>
+              <a:rPr sz="1500">
+                <a:solidFill>
+                  <a:srgbClr val="1A1A1A"/>
+                </a:solidFill>
+                <a:latin typeface="Calibri"/>
+              </a:rPr>
+              <a:t>Label in all charts: “Genuine with BVP alternative” (not “genuine contested”).</a:t>
+            </a:r>
+          </a:p>
+        </p:txBody>
+      </p:sp>
     </p:spTree>
   </p:cSld>
   <p:clrMapOvr>
@@ -9595,6 +10013,5723 @@
 </p:sld>
 </file>
 
+<file path=ppt/slides/slide20.xml><?xml version="1.0" encoding="utf-8"?>
+<p:sld xmlns:a="http://schemas.openxmlformats.org/drawingml/2006/main" xmlns:p="http://schemas.openxmlformats.org/presentationml/2006/main" xmlns:r="http://schemas.openxmlformats.org/officeDocument/2006/relationships">
+  <p:cSld>
+    <p:bg>
+      <p:bgPr>
+        <a:solidFill>
+          <a:srgbClr val="FFFFFF"/>
+        </a:solidFill>
+        <a:effectLst/>
+      </p:bgPr>
+    </p:bg>
+    <p:spTree>
+      <p:nvGrpSpPr>
+        <p:cNvPr id="1" name=""/>
+        <p:cNvGrpSpPr/>
+        <p:nvPr/>
+      </p:nvGrpSpPr>
+      <p:grpSpPr/>
+      <p:pic>
+        <p:nvPicPr>
+          <p:cNvPr id="2" name="Picture 1" descr="image.png"/>
+          <p:cNvPicPr>
+            <a:picLocks noChangeAspect="1"/>
+          </p:cNvPicPr>
+          <p:nvPr/>
+        </p:nvPicPr>
+        <p:blipFill>
+          <a:blip r:embed="rId2"/>
+          <a:stretch>
+            <a:fillRect/>
+          </a:stretch>
+        </p:blipFill>
+        <p:spPr>
+          <a:xfrm>
+            <a:off x="256032" y="6263640"/>
+            <a:ext cx="1679787" cy="292608"/>
+          </a:xfrm>
+          <a:prstGeom prst="rect">
+            <a:avLst/>
+          </a:prstGeom>
+        </p:spPr>
+      </p:pic>
+      <p:sp>
+        <p:nvSpPr>
+          <p:cNvPr id="3" name="Rectangle 2"/>
+          <p:cNvSpPr/>
+          <p:nvPr/>
+        </p:nvSpPr>
+        <p:spPr>
+          <a:xfrm>
+            <a:off x="0" y="6766560"/>
+            <a:ext cx="12188952" cy="91440"/>
+          </a:xfrm>
+          <a:prstGeom prst="rect">
+            <a:avLst/>
+          </a:prstGeom>
+          <a:solidFill>
+            <a:srgbClr val="CC0E1E"/>
+          </a:solidFill>
+          <a:ln>
+            <a:noFill/>
+          </a:ln>
+        </p:spPr>
+        <p:style>
+          <a:lnRef idx="1">
+            <a:schemeClr val="accent1"/>
+          </a:lnRef>
+          <a:fillRef idx="3">
+            <a:schemeClr val="accent1"/>
+          </a:fillRef>
+          <a:effectRef idx="2">
+            <a:schemeClr val="accent1"/>
+          </a:effectRef>
+          <a:fontRef idx="minor">
+            <a:schemeClr val="lt1"/>
+          </a:fontRef>
+        </p:style>
+        <p:txBody>
+          <a:bodyPr rtlCol="0" anchor="ctr"/>
+          <a:lstStyle/>
+          <a:p>
+            <a:pPr algn="ctr"/>
+          </a:p>
+        </p:txBody>
+      </p:sp>
+      <p:sp>
+        <p:nvSpPr>
+          <p:cNvPr id="4" name="TextBox 3"/>
+          <p:cNvSpPr txBox="1"/>
+          <p:nvPr/>
+        </p:nvSpPr>
+        <p:spPr>
+          <a:xfrm>
+            <a:off x="292608" y="201168"/>
+            <a:ext cx="11430000" cy="274320"/>
+          </a:xfrm>
+          <a:prstGeom prst="rect">
+            <a:avLst/>
+          </a:prstGeom>
+          <a:noFill/>
+        </p:spPr>
+        <p:txBody>
+          <a:bodyPr wrap="square">
+            <a:spAutoFit/>
+          </a:bodyPr>
+          <a:lstStyle/>
+          <a:p>
+            <a:pPr algn="l"/>
+            <a:r>
+              <a:rPr sz="1100" b="1">
+                <a:solidFill>
+                  <a:srgbClr val="CC0E1E"/>
+                </a:solidFill>
+                <a:latin typeface="Calibri"/>
+              </a:rPr>
+              <a:t>AGENDA</a:t>
+            </a:r>
+          </a:p>
+        </p:txBody>
+      </p:sp>
+      <p:sp>
+        <p:nvSpPr>
+          <p:cNvPr id="5" name="TextBox 4"/>
+          <p:cNvSpPr txBox="1"/>
+          <p:nvPr/>
+        </p:nvSpPr>
+        <p:spPr>
+          <a:xfrm>
+            <a:off x="292608" y="475488"/>
+            <a:ext cx="11612880" cy="566928"/>
+          </a:xfrm>
+          <a:prstGeom prst="rect">
+            <a:avLst/>
+          </a:prstGeom>
+          <a:noFill/>
+        </p:spPr>
+        <p:txBody>
+          <a:bodyPr wrap="square">
+            <a:spAutoFit/>
+          </a:bodyPr>
+          <a:lstStyle/>
+          <a:p>
+            <a:pPr algn="l"/>
+            <a:r>
+              <a:rPr sz="2500" b="1">
+                <a:solidFill>
+                  <a:srgbClr val="1A1A1A"/>
+                </a:solidFill>
+                <a:latin typeface="Calibri"/>
+              </a:rPr>
+              <a:t>Deep-dive agenda</a:t>
+            </a:r>
+          </a:p>
+        </p:txBody>
+      </p:sp>
+      <p:sp>
+        <p:nvSpPr>
+          <p:cNvPr id="6" name="Rectangle 5"/>
+          <p:cNvSpPr/>
+          <p:nvPr/>
+        </p:nvSpPr>
+        <p:spPr>
+          <a:xfrm>
+            <a:off x="292608" y="1005840"/>
+            <a:ext cx="11612880" cy="28000"/>
+          </a:xfrm>
+          <a:prstGeom prst="rect">
+            <a:avLst/>
+          </a:prstGeom>
+          <a:solidFill>
+            <a:srgbClr val="CC0E1E"/>
+          </a:solidFill>
+          <a:ln>
+            <a:noFill/>
+          </a:ln>
+        </p:spPr>
+        <p:style>
+          <a:lnRef idx="1">
+            <a:schemeClr val="accent1"/>
+          </a:lnRef>
+          <a:fillRef idx="3">
+            <a:schemeClr val="accent1"/>
+          </a:fillRef>
+          <a:effectRef idx="2">
+            <a:schemeClr val="accent1"/>
+          </a:effectRef>
+          <a:fontRef idx="minor">
+            <a:schemeClr val="lt1"/>
+          </a:fontRef>
+        </p:style>
+        <p:txBody>
+          <a:bodyPr rtlCol="0" anchor="ctr"/>
+          <a:lstStyle/>
+          <a:p>
+            <a:pPr algn="ctr"/>
+          </a:p>
+        </p:txBody>
+      </p:sp>
+      <p:sp>
+        <p:nvSpPr>
+          <p:cNvPr id="7" name="TextBox 6"/>
+          <p:cNvSpPr txBox="1"/>
+          <p:nvPr/>
+        </p:nvSpPr>
+        <p:spPr>
+          <a:xfrm>
+            <a:off x="11594592" y="6473952"/>
+            <a:ext cx="365760" cy="274320"/>
+          </a:xfrm>
+          <a:prstGeom prst="rect">
+            <a:avLst/>
+          </a:prstGeom>
+          <a:noFill/>
+        </p:spPr>
+        <p:txBody>
+          <a:bodyPr wrap="square">
+            <a:spAutoFit/>
+          </a:bodyPr>
+          <a:lstStyle/>
+          <a:p>
+            <a:pPr algn="r"/>
+            <a:r>
+              <a:rPr sz="1000" b="0">
+                <a:solidFill>
+                  <a:srgbClr val="5A5A5A"/>
+                </a:solidFill>
+                <a:latin typeface="Calibri"/>
+              </a:rPr>
+              <a:t>20</a:t>
+            </a:r>
+          </a:p>
+        </p:txBody>
+      </p:sp>
+      <p:sp>
+        <p:nvSpPr>
+          <p:cNvPr id="8" name="TextBox 7"/>
+          <p:cNvSpPr txBox="1"/>
+          <p:nvPr/>
+        </p:nvSpPr>
+        <p:spPr>
+          <a:xfrm>
+            <a:off x="292608" y="1234440"/>
+            <a:ext cx="10972800" cy="4754880"/>
+          </a:xfrm>
+          <a:prstGeom prst="rect">
+            <a:avLst/>
+          </a:prstGeom>
+          <a:noFill/>
+        </p:spPr>
+        <p:txBody>
+          <a:bodyPr wrap="square">
+            <a:spAutoFit/>
+          </a:bodyPr>
+          <a:lstStyle/>
+          <a:p>
+            <a:pPr>
+              <a:lnSpc>
+                <a:spcPct val="125000"/>
+              </a:lnSpc>
+              <a:spcAft>
+                <a:spcPts val="1000"/>
+              </a:spcAft>
+            </a:pPr>
+            <a:r>
+              <a:rPr sz="1500" b="1">
+                <a:solidFill>
+                  <a:srgbClr val="CC0E1E"/>
+                </a:solidFill>
+                <a:latin typeface="Calibri"/>
+              </a:rPr>
+              <a:t>—  </a:t>
+            </a:r>
+            <a:r>
+              <a:rPr sz="1500">
+                <a:solidFill>
+                  <a:srgbClr val="1A1A1A"/>
+                </a:solidFill>
+                <a:latin typeface="Calibri"/>
+              </a:rPr>
+              <a:t>GPS — fiscal year (headline vs excl. warranty; max two lines)</a:t>
+            </a:r>
+          </a:p>
+          <a:p>
+            <a:pPr>
+              <a:lnSpc>
+                <a:spcPct val="125000"/>
+              </a:lnSpc>
+              <a:spcAft>
+                <a:spcPts val="1000"/>
+              </a:spcAft>
+            </a:pPr>
+            <a:r>
+              <a:rPr sz="1500" b="1">
+                <a:solidFill>
+                  <a:srgbClr val="CC0E1E"/>
+                </a:solidFill>
+                <a:latin typeface="Calibri"/>
+              </a:rPr>
+              <a:t>—  </a:t>
+            </a:r>
+            <a:r>
+              <a:rPr sz="1500">
+                <a:solidFill>
+                  <a:srgbClr val="1A1A1A"/>
+                </a:solidFill>
+                <a:latin typeface="Calibri"/>
+              </a:rPr>
+              <a:t>FY2025 → FY2026 wallet mix (Genuine / Genuine with BVP alternative / BVP)</a:t>
+            </a:r>
+          </a:p>
+          <a:p>
+            <a:pPr>
+              <a:lnSpc>
+                <a:spcPct val="125000"/>
+              </a:lnSpc>
+              <a:spcAft>
+                <a:spcPts val="1000"/>
+              </a:spcAft>
+            </a:pPr>
+            <a:r>
+              <a:rPr sz="1500" b="1">
+                <a:solidFill>
+                  <a:srgbClr val="CC0E1E"/>
+                </a:solidFill>
+                <a:latin typeface="Calibri"/>
+              </a:rPr>
+              <a:t>—  </a:t>
+            </a:r>
+            <a:r>
+              <a:rPr sz="1500">
+                <a:solidFill>
+                  <a:srgbClr val="1A1A1A"/>
+                </a:solidFill>
+                <a:latin typeface="Calibri"/>
+              </a:rPr>
+              <a:t>Where the money went — outside the service-parts basket (FY)</a:t>
+            </a:r>
+          </a:p>
+          <a:p>
+            <a:pPr>
+              <a:lnSpc>
+                <a:spcPct val="125000"/>
+              </a:lnSpc>
+              <a:spcAft>
+                <a:spcPts val="1000"/>
+              </a:spcAft>
+            </a:pPr>
+            <a:r>
+              <a:rPr sz="1500" b="1">
+                <a:solidFill>
+                  <a:srgbClr val="CC0E1E"/>
+                </a:solidFill>
+                <a:latin typeface="Calibri"/>
+              </a:rPr>
+              <a:t>—  </a:t>
+            </a:r>
+            <a:r>
+              <a:rPr sz="1500">
+                <a:solidFill>
+                  <a:srgbClr val="1A1A1A"/>
+                </a:solidFill>
+                <a:latin typeface="Calibri"/>
+              </a:rPr>
+              <a:t>Service parts: CY capture vs network + FY billing (capture % is CY-only by design)</a:t>
+            </a:r>
+          </a:p>
+          <a:p>
+            <a:pPr>
+              <a:lnSpc>
+                <a:spcPct val="125000"/>
+              </a:lnSpc>
+              <a:spcAft>
+                <a:spcPts val="1000"/>
+              </a:spcAft>
+            </a:pPr>
+            <a:r>
+              <a:rPr sz="1500" b="1">
+                <a:solidFill>
+                  <a:srgbClr val="CC0E1E"/>
+                </a:solidFill>
+                <a:latin typeface="Calibri"/>
+              </a:rPr>
+              <a:t>—  </a:t>
+            </a:r>
+            <a:r>
+              <a:rPr sz="1500">
+                <a:solidFill>
+                  <a:srgbClr val="1A1A1A"/>
+                </a:solidFill>
+                <a:latin typeface="Calibri"/>
+              </a:rPr>
+              <a:t>Brake pads — BVP share of total brake pad sales (FY)</a:t>
+            </a:r>
+          </a:p>
+          <a:p>
+            <a:pPr>
+              <a:lnSpc>
+                <a:spcPct val="125000"/>
+              </a:lnSpc>
+              <a:spcAft>
+                <a:spcPts val="1000"/>
+              </a:spcAft>
+            </a:pPr>
+            <a:r>
+              <a:rPr sz="1500" b="1">
+                <a:solidFill>
+                  <a:srgbClr val="CC0E1E"/>
+                </a:solidFill>
+                <a:latin typeface="Calibri"/>
+              </a:rPr>
+              <a:t>—  </a:t>
+            </a:r>
+            <a:r>
+              <a:rPr sz="1500">
+                <a:solidFill>
+                  <a:srgbClr val="1A1A1A"/>
+                </a:solidFill>
+                <a:latin typeface="Calibri"/>
+              </a:rPr>
+              <a:t>AIM exposure</a:t>
+            </a:r>
+          </a:p>
+          <a:p>
+            <a:pPr>
+              <a:lnSpc>
+                <a:spcPct val="125000"/>
+              </a:lnSpc>
+              <a:spcAft>
+                <a:spcPts val="1000"/>
+              </a:spcAft>
+            </a:pPr>
+            <a:r>
+              <a:rPr sz="1500" b="1">
+                <a:solidFill>
+                  <a:srgbClr val="CC0E1E"/>
+                </a:solidFill>
+                <a:latin typeface="Calibri"/>
+              </a:rPr>
+              <a:t>—  </a:t>
+            </a:r>
+            <a:r>
+              <a:rPr sz="1500">
+                <a:solidFill>
+                  <a:srgbClr val="1A1A1A"/>
+                </a:solidFill>
+                <a:latin typeface="Calibri"/>
+              </a:rPr>
+              <a:t>Warranty — two lenses</a:t>
+            </a:r>
+          </a:p>
+          <a:p>
+            <a:pPr>
+              <a:lnSpc>
+                <a:spcPct val="125000"/>
+              </a:lnSpc>
+              <a:spcAft>
+                <a:spcPts val="1000"/>
+              </a:spcAft>
+            </a:pPr>
+            <a:r>
+              <a:rPr sz="1500" b="1">
+                <a:solidFill>
+                  <a:srgbClr val="CC0E1E"/>
+                </a:solidFill>
+                <a:latin typeface="Calibri"/>
+              </a:rPr>
+              <a:t>—  </a:t>
+            </a:r>
+            <a:r>
+              <a:rPr sz="1500">
+                <a:solidFill>
+                  <a:srgbClr val="1A1A1A"/>
+                </a:solidFill>
+                <a:latin typeface="Calibri"/>
+              </a:rPr>
+              <a:t>How to use this in the meeting</a:t>
+            </a:r>
+          </a:p>
+        </p:txBody>
+      </p:sp>
+    </p:spTree>
+  </p:cSld>
+  <p:clrMapOvr>
+    <a:masterClrMapping/>
+  </p:clrMapOvr>
+</p:sld>
+</file>
+
+<file path=ppt/slides/slide21.xml><?xml version="1.0" encoding="utf-8"?>
+<p:sld xmlns:a="http://schemas.openxmlformats.org/drawingml/2006/main" xmlns:p="http://schemas.openxmlformats.org/presentationml/2006/main" xmlns:r="http://schemas.openxmlformats.org/officeDocument/2006/relationships">
+  <p:cSld>
+    <p:bg>
+      <p:bgPr>
+        <a:solidFill>
+          <a:srgbClr val="FFFFFF"/>
+        </a:solidFill>
+        <a:effectLst/>
+      </p:bgPr>
+    </p:bg>
+    <p:spTree>
+      <p:nvGrpSpPr>
+        <p:cNvPr id="1" name=""/>
+        <p:cNvGrpSpPr/>
+        <p:nvPr/>
+      </p:nvGrpSpPr>
+      <p:grpSpPr/>
+      <p:pic>
+        <p:nvPicPr>
+          <p:cNvPr id="2" name="Picture 1" descr="image.png"/>
+          <p:cNvPicPr>
+            <a:picLocks noChangeAspect="1"/>
+          </p:cNvPicPr>
+          <p:nvPr/>
+        </p:nvPicPr>
+        <p:blipFill>
+          <a:blip r:embed="rId2"/>
+          <a:stretch>
+            <a:fillRect/>
+          </a:stretch>
+        </p:blipFill>
+        <p:spPr>
+          <a:xfrm>
+            <a:off x="256032" y="6263640"/>
+            <a:ext cx="1679787" cy="292608"/>
+          </a:xfrm>
+          <a:prstGeom prst="rect">
+            <a:avLst/>
+          </a:prstGeom>
+        </p:spPr>
+      </p:pic>
+      <p:sp>
+        <p:nvSpPr>
+          <p:cNvPr id="3" name="Rectangle 2"/>
+          <p:cNvSpPr/>
+          <p:nvPr/>
+        </p:nvSpPr>
+        <p:spPr>
+          <a:xfrm>
+            <a:off x="0" y="6766560"/>
+            <a:ext cx="12188952" cy="91440"/>
+          </a:xfrm>
+          <a:prstGeom prst="rect">
+            <a:avLst/>
+          </a:prstGeom>
+          <a:solidFill>
+            <a:srgbClr val="CC0E1E"/>
+          </a:solidFill>
+          <a:ln>
+            <a:noFill/>
+          </a:ln>
+        </p:spPr>
+        <p:style>
+          <a:lnRef idx="1">
+            <a:schemeClr val="accent1"/>
+          </a:lnRef>
+          <a:fillRef idx="3">
+            <a:schemeClr val="accent1"/>
+          </a:fillRef>
+          <a:effectRef idx="2">
+            <a:schemeClr val="accent1"/>
+          </a:effectRef>
+          <a:fontRef idx="minor">
+            <a:schemeClr val="lt1"/>
+          </a:fontRef>
+        </p:style>
+        <p:txBody>
+          <a:bodyPr rtlCol="0" anchor="ctr"/>
+          <a:lstStyle/>
+          <a:p>
+            <a:pPr algn="ctr"/>
+          </a:p>
+        </p:txBody>
+      </p:sp>
+      <p:sp>
+        <p:nvSpPr>
+          <p:cNvPr id="4" name="TextBox 3"/>
+          <p:cNvSpPr txBox="1"/>
+          <p:nvPr/>
+        </p:nvSpPr>
+        <p:spPr>
+          <a:xfrm>
+            <a:off x="292608" y="201168"/>
+            <a:ext cx="11430000" cy="274320"/>
+          </a:xfrm>
+          <a:prstGeom prst="rect">
+            <a:avLst/>
+          </a:prstGeom>
+          <a:noFill/>
+        </p:spPr>
+        <p:txBody>
+          <a:bodyPr wrap="square">
+            <a:spAutoFit/>
+          </a:bodyPr>
+          <a:lstStyle/>
+          <a:p>
+            <a:pPr algn="l"/>
+            <a:r>
+              <a:rPr sz="1100" b="1">
+                <a:solidFill>
+                  <a:srgbClr val="CC0E1E"/>
+                </a:solidFill>
+                <a:latin typeface="Calibri"/>
+              </a:rPr>
+              <a:t>GPS</a:t>
+            </a:r>
+          </a:p>
+        </p:txBody>
+      </p:sp>
+      <p:sp>
+        <p:nvSpPr>
+          <p:cNvPr id="5" name="TextBox 4"/>
+          <p:cNvSpPr txBox="1"/>
+          <p:nvPr/>
+        </p:nvSpPr>
+        <p:spPr>
+          <a:xfrm>
+            <a:off x="292608" y="475488"/>
+            <a:ext cx="11612880" cy="566928"/>
+          </a:xfrm>
+          <a:prstGeom prst="rect">
+            <a:avLst/>
+          </a:prstGeom>
+          <a:noFill/>
+        </p:spPr>
+        <p:txBody>
+          <a:bodyPr wrap="square">
+            <a:spAutoFit/>
+          </a:bodyPr>
+          <a:lstStyle/>
+          <a:p>
+            <a:pPr algn="l"/>
+            <a:r>
+              <a:rPr sz="2500" b="1">
+                <a:solidFill>
+                  <a:srgbClr val="1A1A1A"/>
+                </a:solidFill>
+                <a:latin typeface="Calibri"/>
+              </a:rPr>
+              <a:t>GPS: fiscal year headline vs after warranty</a:t>
+            </a:r>
+          </a:p>
+        </p:txBody>
+      </p:sp>
+      <p:sp>
+        <p:nvSpPr>
+          <p:cNvPr id="6" name="Rectangle 5"/>
+          <p:cNvSpPr/>
+          <p:nvPr/>
+        </p:nvSpPr>
+        <p:spPr>
+          <a:xfrm>
+            <a:off x="292608" y="1005840"/>
+            <a:ext cx="11612880" cy="28000"/>
+          </a:xfrm>
+          <a:prstGeom prst="rect">
+            <a:avLst/>
+          </a:prstGeom>
+          <a:solidFill>
+            <a:srgbClr val="CC0E1E"/>
+          </a:solidFill>
+          <a:ln>
+            <a:noFill/>
+          </a:ln>
+        </p:spPr>
+        <p:style>
+          <a:lnRef idx="1">
+            <a:schemeClr val="accent1"/>
+          </a:lnRef>
+          <a:fillRef idx="3">
+            <a:schemeClr val="accent1"/>
+          </a:fillRef>
+          <a:effectRef idx="2">
+            <a:schemeClr val="accent1"/>
+          </a:effectRef>
+          <a:fontRef idx="minor">
+            <a:schemeClr val="lt1"/>
+          </a:fontRef>
+        </p:style>
+        <p:txBody>
+          <a:bodyPr rtlCol="0" anchor="ctr"/>
+          <a:lstStyle/>
+          <a:p>
+            <a:pPr algn="ctr"/>
+          </a:p>
+        </p:txBody>
+      </p:sp>
+      <p:sp>
+        <p:nvSpPr>
+          <p:cNvPr id="7" name="TextBox 6"/>
+          <p:cNvSpPr txBox="1"/>
+          <p:nvPr/>
+        </p:nvSpPr>
+        <p:spPr>
+          <a:xfrm>
+            <a:off x="11594592" y="6473952"/>
+            <a:ext cx="365760" cy="274320"/>
+          </a:xfrm>
+          <a:prstGeom prst="rect">
+            <a:avLst/>
+          </a:prstGeom>
+          <a:noFill/>
+        </p:spPr>
+        <p:txBody>
+          <a:bodyPr wrap="square">
+            <a:spAutoFit/>
+          </a:bodyPr>
+          <a:lstStyle/>
+          <a:p>
+            <a:pPr algn="r"/>
+            <a:r>
+              <a:rPr sz="1000" b="0">
+                <a:solidFill>
+                  <a:srgbClr val="5A5A5A"/>
+                </a:solidFill>
+                <a:latin typeface="Calibri"/>
+              </a:rPr>
+              <a:t>21</a:t>
+            </a:r>
+          </a:p>
+        </p:txBody>
+      </p:sp>
+      <p:pic>
+        <p:nvPicPr>
+          <p:cNvPr id="8" name="Picture 7" descr="modeb_gps.png"/>
+          <p:cNvPicPr>
+            <a:picLocks noChangeAspect="1"/>
+          </p:cNvPicPr>
+          <p:nvPr/>
+        </p:nvPicPr>
+        <p:blipFill>
+          <a:blip r:embed="rId3"/>
+          <a:stretch>
+            <a:fillRect/>
+          </a:stretch>
+        </p:blipFill>
+        <p:spPr>
+          <a:xfrm>
+            <a:off x="292608" y="2120980"/>
+            <a:ext cx="7178040" cy="3027520"/>
+          </a:xfrm>
+          <a:prstGeom prst="rect">
+            <a:avLst/>
+          </a:prstGeom>
+        </p:spPr>
+      </p:pic>
+      <p:sp>
+        <p:nvSpPr>
+          <p:cNvPr id="9" name="Rectangle 8"/>
+          <p:cNvSpPr/>
+          <p:nvPr/>
+        </p:nvSpPr>
+        <p:spPr>
+          <a:xfrm>
+            <a:off x="7726679" y="1188720"/>
+            <a:ext cx="22000" cy="4892040"/>
+          </a:xfrm>
+          <a:prstGeom prst="rect">
+            <a:avLst/>
+          </a:prstGeom>
+          <a:solidFill>
+            <a:srgbClr val="ECECEC"/>
+          </a:solidFill>
+          <a:ln>
+            <a:noFill/>
+          </a:ln>
+        </p:spPr>
+        <p:style>
+          <a:lnRef idx="1">
+            <a:schemeClr val="accent1"/>
+          </a:lnRef>
+          <a:fillRef idx="3">
+            <a:schemeClr val="accent1"/>
+          </a:fillRef>
+          <a:effectRef idx="2">
+            <a:schemeClr val="accent1"/>
+          </a:effectRef>
+          <a:fontRef idx="minor">
+            <a:schemeClr val="lt1"/>
+          </a:fontRef>
+        </p:style>
+        <p:txBody>
+          <a:bodyPr rtlCol="0" anchor="ctr"/>
+          <a:lstStyle/>
+          <a:p>
+            <a:pPr algn="ctr"/>
+          </a:p>
+        </p:txBody>
+      </p:sp>
+      <p:sp>
+        <p:nvSpPr>
+          <p:cNvPr id="10" name="TextBox 9"/>
+          <p:cNvSpPr txBox="1"/>
+          <p:nvPr/>
+        </p:nvSpPr>
+        <p:spPr>
+          <a:xfrm>
+            <a:off x="7927847" y="1234440"/>
+            <a:ext cx="3886200" cy="320040"/>
+          </a:xfrm>
+          <a:prstGeom prst="rect">
+            <a:avLst/>
+          </a:prstGeom>
+          <a:noFill/>
+        </p:spPr>
+        <p:txBody>
+          <a:bodyPr wrap="square">
+            <a:spAutoFit/>
+          </a:bodyPr>
+          <a:lstStyle/>
+          <a:p>
+            <a:pPr algn="l"/>
+            <a:r>
+              <a:rPr sz="1200" b="1">
+                <a:solidFill>
+                  <a:srgbClr val="CC0E1E"/>
+                </a:solidFill>
+                <a:latin typeface="Calibri"/>
+              </a:rPr>
+              <a:t>TAKEAWAYS</a:t>
+            </a:r>
+          </a:p>
+        </p:txBody>
+      </p:sp>
+      <p:sp>
+        <p:nvSpPr>
+          <p:cNvPr id="11" name="TextBox 10"/>
+          <p:cNvSpPr txBox="1"/>
+          <p:nvPr/>
+        </p:nvSpPr>
+        <p:spPr>
+          <a:xfrm>
+            <a:off x="7927847" y="1691640"/>
+            <a:ext cx="3794760" cy="4343400"/>
+          </a:xfrm>
+          <a:prstGeom prst="rect">
+            <a:avLst/>
+          </a:prstGeom>
+          <a:noFill/>
+        </p:spPr>
+        <p:txBody>
+          <a:bodyPr wrap="square">
+            <a:spAutoFit/>
+          </a:bodyPr>
+          <a:lstStyle/>
+          <a:p>
+            <a:pPr>
+              <a:lnSpc>
+                <a:spcPct val="125000"/>
+              </a:lnSpc>
+              <a:spcAft>
+                <a:spcPts val="1000"/>
+              </a:spcAft>
+            </a:pPr>
+            <a:r>
+              <a:rPr sz="1250" b="1">
+                <a:solidFill>
+                  <a:srgbClr val="CC0E1E"/>
+                </a:solidFill>
+                <a:latin typeface="Calibri"/>
+              </a:rPr>
+              <a:t>—  </a:t>
+            </a:r>
+            <a:r>
+              <a:rPr sz="1250">
+                <a:solidFill>
+                  <a:srgbClr val="1A1A1A"/>
+                </a:solidFill>
+                <a:latin typeface="Calibri"/>
+              </a:rPr>
+              <a:t>Red = fiscal-year GPS (frozen CY2025 wallet). FY25 72.6% → FY26 82.6%.</a:t>
+            </a:r>
+          </a:p>
+          <a:p>
+            <a:pPr>
+              <a:lnSpc>
+                <a:spcPct val="125000"/>
+              </a:lnSpc>
+              <a:spcAft>
+                <a:spcPts val="1000"/>
+              </a:spcAft>
+            </a:pPr>
+            <a:r>
+              <a:rPr sz="1250" b="1">
+                <a:solidFill>
+                  <a:srgbClr val="CC0E1E"/>
+                </a:solidFill>
+                <a:latin typeface="Calibri"/>
+              </a:rPr>
+              <a:t>—  </a:t>
+            </a:r>
+            <a:r>
+              <a:rPr sz="1250">
+                <a:solidFill>
+                  <a:srgbClr val="1A1A1A"/>
+                </a:solidFill>
+                <a:latin typeface="Calibri"/>
+              </a:rPr>
+              <a:t>Black = fiscal GPS after removing warranty parts (€). FY26 ≈ 72.8% (warranty EUR 9,865 ≈ 12% of FY26 billing).</a:t>
+            </a:r>
+          </a:p>
+          <a:p>
+            <a:pPr>
+              <a:lnSpc>
+                <a:spcPct val="125000"/>
+              </a:lnSpc>
+              <a:spcAft>
+                <a:spcPts val="1000"/>
+              </a:spcAft>
+            </a:pPr>
+            <a:r>
+              <a:rPr sz="1250" b="1">
+                <a:solidFill>
+                  <a:srgbClr val="CC0E1E"/>
+                </a:solidFill>
+                <a:latin typeface="Calibri"/>
+              </a:rPr>
+              <a:t>—  </a:t>
+            </a:r>
+            <a:r>
+              <a:rPr sz="1250">
+                <a:solidFill>
+                  <a:srgbClr val="1A1A1A"/>
+                </a:solidFill>
+                <a:latin typeface="Calibri"/>
+              </a:rPr>
+              <a:t>Fleet 406 → 401 (working year-end estimate under the FY2027 target).</a:t>
+            </a:r>
+          </a:p>
+        </p:txBody>
+      </p:sp>
+    </p:spTree>
+  </p:cSld>
+  <p:clrMapOvr>
+    <a:masterClrMapping/>
+  </p:clrMapOvr>
+</p:sld>
+</file>
+
+<file path=ppt/slides/slide22.xml><?xml version="1.0" encoding="utf-8"?>
+<p:sld xmlns:a="http://schemas.openxmlformats.org/drawingml/2006/main" xmlns:p="http://schemas.openxmlformats.org/presentationml/2006/main" xmlns:r="http://schemas.openxmlformats.org/officeDocument/2006/relationships">
+  <p:cSld>
+    <p:bg>
+      <p:bgPr>
+        <a:solidFill>
+          <a:srgbClr val="FFFFFF"/>
+        </a:solidFill>
+        <a:effectLst/>
+      </p:bgPr>
+    </p:bg>
+    <p:spTree>
+      <p:nvGrpSpPr>
+        <p:cNvPr id="1" name=""/>
+        <p:cNvGrpSpPr/>
+        <p:nvPr/>
+      </p:nvGrpSpPr>
+      <p:grpSpPr/>
+      <p:pic>
+        <p:nvPicPr>
+          <p:cNvPr id="2" name="Picture 1" descr="image.png"/>
+          <p:cNvPicPr>
+            <a:picLocks noChangeAspect="1"/>
+          </p:cNvPicPr>
+          <p:nvPr/>
+        </p:nvPicPr>
+        <p:blipFill>
+          <a:blip r:embed="rId2"/>
+          <a:stretch>
+            <a:fillRect/>
+          </a:stretch>
+        </p:blipFill>
+        <p:spPr>
+          <a:xfrm>
+            <a:off x="256032" y="6263640"/>
+            <a:ext cx="1679787" cy="292608"/>
+          </a:xfrm>
+          <a:prstGeom prst="rect">
+            <a:avLst/>
+          </a:prstGeom>
+        </p:spPr>
+      </p:pic>
+      <p:sp>
+        <p:nvSpPr>
+          <p:cNvPr id="3" name="Rectangle 2"/>
+          <p:cNvSpPr/>
+          <p:nvPr/>
+        </p:nvSpPr>
+        <p:spPr>
+          <a:xfrm>
+            <a:off x="0" y="6766560"/>
+            <a:ext cx="12188952" cy="91440"/>
+          </a:xfrm>
+          <a:prstGeom prst="rect">
+            <a:avLst/>
+          </a:prstGeom>
+          <a:solidFill>
+            <a:srgbClr val="CC0E1E"/>
+          </a:solidFill>
+          <a:ln>
+            <a:noFill/>
+          </a:ln>
+        </p:spPr>
+        <p:style>
+          <a:lnRef idx="1">
+            <a:schemeClr val="accent1"/>
+          </a:lnRef>
+          <a:fillRef idx="3">
+            <a:schemeClr val="accent1"/>
+          </a:fillRef>
+          <a:effectRef idx="2">
+            <a:schemeClr val="accent1"/>
+          </a:effectRef>
+          <a:fontRef idx="minor">
+            <a:schemeClr val="lt1"/>
+          </a:fontRef>
+        </p:style>
+        <p:txBody>
+          <a:bodyPr rtlCol="0" anchor="ctr"/>
+          <a:lstStyle/>
+          <a:p>
+            <a:pPr algn="ctr"/>
+          </a:p>
+        </p:txBody>
+      </p:sp>
+      <p:sp>
+        <p:nvSpPr>
+          <p:cNvPr id="4" name="TextBox 3"/>
+          <p:cNvSpPr txBox="1"/>
+          <p:nvPr/>
+        </p:nvSpPr>
+        <p:spPr>
+          <a:xfrm>
+            <a:off x="292608" y="201168"/>
+            <a:ext cx="11430000" cy="274320"/>
+          </a:xfrm>
+          <a:prstGeom prst="rect">
+            <a:avLst/>
+          </a:prstGeom>
+          <a:noFill/>
+        </p:spPr>
+        <p:txBody>
+          <a:bodyPr wrap="square">
+            <a:spAutoFit/>
+          </a:bodyPr>
+          <a:lstStyle/>
+          <a:p>
+            <a:pPr algn="l"/>
+            <a:r>
+              <a:rPr sz="1100" b="1">
+                <a:solidFill>
+                  <a:srgbClr val="CC0E1E"/>
+                </a:solidFill>
+                <a:latin typeface="Calibri"/>
+              </a:rPr>
+              <a:t>WALLET MIX</a:t>
+            </a:r>
+          </a:p>
+        </p:txBody>
+      </p:sp>
+      <p:sp>
+        <p:nvSpPr>
+          <p:cNvPr id="5" name="TextBox 4"/>
+          <p:cNvSpPr txBox="1"/>
+          <p:nvPr/>
+        </p:nvSpPr>
+        <p:spPr>
+          <a:xfrm>
+            <a:off x="292608" y="475488"/>
+            <a:ext cx="11612880" cy="566928"/>
+          </a:xfrm>
+          <a:prstGeom prst="rect">
+            <a:avLst/>
+          </a:prstGeom>
+          <a:noFill/>
+        </p:spPr>
+        <p:txBody>
+          <a:bodyPr wrap="square">
+            <a:spAutoFit/>
+          </a:bodyPr>
+          <a:lstStyle/>
+          <a:p>
+            <a:pPr algn="l"/>
+            <a:r>
+              <a:rPr sz="2500" b="1">
+                <a:solidFill>
+                  <a:srgbClr val="1A1A1A"/>
+                </a:solidFill>
+                <a:latin typeface="Calibri"/>
+              </a:rPr>
+              <a:t>FY2025 → FY2026 wallet mix</a:t>
+            </a:r>
+          </a:p>
+        </p:txBody>
+      </p:sp>
+      <p:sp>
+        <p:nvSpPr>
+          <p:cNvPr id="6" name="Rectangle 5"/>
+          <p:cNvSpPr/>
+          <p:nvPr/>
+        </p:nvSpPr>
+        <p:spPr>
+          <a:xfrm>
+            <a:off x="292608" y="1005840"/>
+            <a:ext cx="11612880" cy="28000"/>
+          </a:xfrm>
+          <a:prstGeom prst="rect">
+            <a:avLst/>
+          </a:prstGeom>
+          <a:solidFill>
+            <a:srgbClr val="CC0E1E"/>
+          </a:solidFill>
+          <a:ln>
+            <a:noFill/>
+          </a:ln>
+        </p:spPr>
+        <p:style>
+          <a:lnRef idx="1">
+            <a:schemeClr val="accent1"/>
+          </a:lnRef>
+          <a:fillRef idx="3">
+            <a:schemeClr val="accent1"/>
+          </a:fillRef>
+          <a:effectRef idx="2">
+            <a:schemeClr val="accent1"/>
+          </a:effectRef>
+          <a:fontRef idx="minor">
+            <a:schemeClr val="lt1"/>
+          </a:fontRef>
+        </p:style>
+        <p:txBody>
+          <a:bodyPr rtlCol="0" anchor="ctr"/>
+          <a:lstStyle/>
+          <a:p>
+            <a:pPr algn="ctr"/>
+          </a:p>
+        </p:txBody>
+      </p:sp>
+      <p:sp>
+        <p:nvSpPr>
+          <p:cNvPr id="7" name="TextBox 6"/>
+          <p:cNvSpPr txBox="1"/>
+          <p:nvPr/>
+        </p:nvSpPr>
+        <p:spPr>
+          <a:xfrm>
+            <a:off x="11594592" y="6473952"/>
+            <a:ext cx="365760" cy="274320"/>
+          </a:xfrm>
+          <a:prstGeom prst="rect">
+            <a:avLst/>
+          </a:prstGeom>
+          <a:noFill/>
+        </p:spPr>
+        <p:txBody>
+          <a:bodyPr wrap="square">
+            <a:spAutoFit/>
+          </a:bodyPr>
+          <a:lstStyle/>
+          <a:p>
+            <a:pPr algn="r"/>
+            <a:r>
+              <a:rPr sz="1000" b="0">
+                <a:solidFill>
+                  <a:srgbClr val="5A5A5A"/>
+                </a:solidFill>
+                <a:latin typeface="Calibri"/>
+              </a:rPr>
+              <a:t>22</a:t>
+            </a:r>
+          </a:p>
+        </p:txBody>
+      </p:sp>
+      <p:pic>
+        <p:nvPicPr>
+          <p:cNvPr id="8" name="Picture 7" descr="modeb_fy_wallet.png"/>
+          <p:cNvPicPr>
+            <a:picLocks noChangeAspect="1"/>
+          </p:cNvPicPr>
+          <p:nvPr/>
+        </p:nvPicPr>
+        <p:blipFill>
+          <a:blip r:embed="rId3"/>
+          <a:stretch>
+            <a:fillRect/>
+          </a:stretch>
+        </p:blipFill>
+        <p:spPr>
+          <a:xfrm>
+            <a:off x="292608" y="1323369"/>
+            <a:ext cx="6949440" cy="2931102"/>
+          </a:xfrm>
+          <a:prstGeom prst="rect">
+            <a:avLst/>
+          </a:prstGeom>
+        </p:spPr>
+      </p:pic>
+      <p:sp>
+        <p:nvSpPr>
+          <p:cNvPr id="9" name="TextBox 8"/>
+          <p:cNvSpPr txBox="1"/>
+          <p:nvPr/>
+        </p:nvSpPr>
+        <p:spPr>
+          <a:xfrm>
+            <a:off x="7406640" y="1234440"/>
+            <a:ext cx="4297680" cy="4114800"/>
+          </a:xfrm>
+          <a:prstGeom prst="rect">
+            <a:avLst/>
+          </a:prstGeom>
+          <a:noFill/>
+        </p:spPr>
+        <p:txBody>
+          <a:bodyPr wrap="square">
+            <a:spAutoFit/>
+          </a:bodyPr>
+          <a:lstStyle/>
+          <a:p>
+            <a:pPr>
+              <a:lnSpc>
+                <a:spcPct val="125000"/>
+              </a:lnSpc>
+              <a:spcAft>
+                <a:spcPts val="1000"/>
+              </a:spcAft>
+            </a:pPr>
+            <a:r>
+              <a:rPr sz="1300" b="1">
+                <a:solidFill>
+                  <a:srgbClr val="CC0E1E"/>
+                </a:solidFill>
+                <a:latin typeface="Calibri"/>
+              </a:rPr>
+              <a:t>—  </a:t>
+            </a:r>
+            <a:r>
+              <a:rPr sz="1300">
+                <a:solidFill>
+                  <a:srgbClr val="1A1A1A"/>
+                </a:solidFill>
+                <a:latin typeface="Calibri"/>
+              </a:rPr>
+              <a:t>Total EUR 76,214 → EUR 89,959 (+18.0%).</a:t>
+            </a:r>
+          </a:p>
+          <a:p>
+            <a:pPr>
+              <a:lnSpc>
+                <a:spcPct val="125000"/>
+              </a:lnSpc>
+              <a:spcAft>
+                <a:spcPts val="1000"/>
+              </a:spcAft>
+            </a:pPr>
+            <a:r>
+              <a:rPr sz="1300" b="1">
+                <a:solidFill>
+                  <a:srgbClr val="CC0E1E"/>
+                </a:solidFill>
+                <a:latin typeface="Calibri"/>
+              </a:rPr>
+              <a:t>—  </a:t>
+            </a:r>
+            <a:r>
+              <a:rPr sz="1300">
+                <a:solidFill>
+                  <a:srgbClr val="1A1A1A"/>
+                </a:solidFill>
+                <a:latin typeface="Calibri"/>
+              </a:rPr>
+              <a:t>Genuine only EUR 11,823.</a:t>
+            </a:r>
+          </a:p>
+          <a:p>
+            <a:pPr>
+              <a:lnSpc>
+                <a:spcPct val="125000"/>
+              </a:lnSpc>
+              <a:spcAft>
+                <a:spcPts val="1000"/>
+              </a:spcAft>
+            </a:pPr>
+            <a:r>
+              <a:rPr sz="1300" b="1">
+                <a:solidFill>
+                  <a:srgbClr val="CC0E1E"/>
+                </a:solidFill>
+                <a:latin typeface="Calibri"/>
+              </a:rPr>
+              <a:t>—  </a:t>
+            </a:r>
+            <a:r>
+              <a:rPr sz="1300">
+                <a:solidFill>
+                  <a:srgbClr val="1A1A1A"/>
+                </a:solidFill>
+                <a:latin typeface="Calibri"/>
+              </a:rPr>
+              <a:t>Genuine with BVP alternative EUR 1,922; BVP EUR 0 (0.0% of FY26 wallet).</a:t>
+            </a:r>
+          </a:p>
+          <a:p>
+            <a:pPr>
+              <a:lnSpc>
+                <a:spcPct val="125000"/>
+              </a:lnSpc>
+              <a:spcAft>
+                <a:spcPts val="1000"/>
+              </a:spcAft>
+            </a:pPr>
+            <a:r>
+              <a:rPr sz="1300" b="1">
+                <a:solidFill>
+                  <a:srgbClr val="CC0E1E"/>
+                </a:solidFill>
+                <a:latin typeface="Calibri"/>
+              </a:rPr>
+              <a:t>—  </a:t>
+            </a:r>
+            <a:r>
+              <a:rPr sz="1300">
+                <a:solidFill>
+                  <a:srgbClr val="1A1A1A"/>
+                </a:solidFill>
+                <a:latin typeface="Calibri"/>
+              </a:rPr>
+              <a:t>Display label locked: Genuine with BVP alternative.</a:t>
+            </a:r>
+          </a:p>
+        </p:txBody>
+      </p:sp>
+    </p:spTree>
+  </p:cSld>
+  <p:clrMapOvr>
+    <a:masterClrMapping/>
+  </p:clrMapOvr>
+</p:sld>
+</file>
+
+<file path=ppt/slides/slide23.xml><?xml version="1.0" encoding="utf-8"?>
+<p:sld xmlns:a="http://schemas.openxmlformats.org/drawingml/2006/main" xmlns:p="http://schemas.openxmlformats.org/presentationml/2006/main" xmlns:r="http://schemas.openxmlformats.org/officeDocument/2006/relationships">
+  <p:cSld>
+    <p:bg>
+      <p:bgPr>
+        <a:solidFill>
+          <a:srgbClr val="FFFFFF"/>
+        </a:solidFill>
+        <a:effectLst/>
+      </p:bgPr>
+    </p:bg>
+    <p:spTree>
+      <p:nvGrpSpPr>
+        <p:cNvPr id="1" name=""/>
+        <p:cNvGrpSpPr/>
+        <p:nvPr/>
+      </p:nvGrpSpPr>
+      <p:grpSpPr/>
+      <p:pic>
+        <p:nvPicPr>
+          <p:cNvPr id="2" name="Picture 1" descr="image.png"/>
+          <p:cNvPicPr>
+            <a:picLocks noChangeAspect="1"/>
+          </p:cNvPicPr>
+          <p:nvPr/>
+        </p:nvPicPr>
+        <p:blipFill>
+          <a:blip r:embed="rId2"/>
+          <a:stretch>
+            <a:fillRect/>
+          </a:stretch>
+        </p:blipFill>
+        <p:spPr>
+          <a:xfrm>
+            <a:off x="256032" y="6263640"/>
+            <a:ext cx="1679787" cy="292608"/>
+          </a:xfrm>
+          <a:prstGeom prst="rect">
+            <a:avLst/>
+          </a:prstGeom>
+        </p:spPr>
+      </p:pic>
+      <p:sp>
+        <p:nvSpPr>
+          <p:cNvPr id="3" name="Rectangle 2"/>
+          <p:cNvSpPr/>
+          <p:nvPr/>
+        </p:nvSpPr>
+        <p:spPr>
+          <a:xfrm>
+            <a:off x="0" y="6766560"/>
+            <a:ext cx="12188952" cy="91440"/>
+          </a:xfrm>
+          <a:prstGeom prst="rect">
+            <a:avLst/>
+          </a:prstGeom>
+          <a:solidFill>
+            <a:srgbClr val="CC0E1E"/>
+          </a:solidFill>
+          <a:ln>
+            <a:noFill/>
+          </a:ln>
+        </p:spPr>
+        <p:style>
+          <a:lnRef idx="1">
+            <a:schemeClr val="accent1"/>
+          </a:lnRef>
+          <a:fillRef idx="3">
+            <a:schemeClr val="accent1"/>
+          </a:fillRef>
+          <a:effectRef idx="2">
+            <a:schemeClr val="accent1"/>
+          </a:effectRef>
+          <a:fontRef idx="minor">
+            <a:schemeClr val="lt1"/>
+          </a:fontRef>
+        </p:style>
+        <p:txBody>
+          <a:bodyPr rtlCol="0" anchor="ctr"/>
+          <a:lstStyle/>
+          <a:p>
+            <a:pPr algn="ctr"/>
+          </a:p>
+        </p:txBody>
+      </p:sp>
+      <p:sp>
+        <p:nvSpPr>
+          <p:cNvPr id="4" name="TextBox 3"/>
+          <p:cNvSpPr txBox="1"/>
+          <p:nvPr/>
+        </p:nvSpPr>
+        <p:spPr>
+          <a:xfrm>
+            <a:off x="292608" y="201168"/>
+            <a:ext cx="11430000" cy="274320"/>
+          </a:xfrm>
+          <a:prstGeom prst="rect">
+            <a:avLst/>
+          </a:prstGeom>
+          <a:noFill/>
+        </p:spPr>
+        <p:txBody>
+          <a:bodyPr wrap="square">
+            <a:spAutoFit/>
+          </a:bodyPr>
+          <a:lstStyle/>
+          <a:p>
+            <a:pPr algn="l"/>
+            <a:r>
+              <a:rPr sz="1100" b="1">
+                <a:solidFill>
+                  <a:srgbClr val="CC0E1E"/>
+                </a:solidFill>
+                <a:latin typeface="Calibri"/>
+              </a:rPr>
+              <a:t>WALLET MIX</a:t>
+            </a:r>
+          </a:p>
+        </p:txBody>
+      </p:sp>
+      <p:sp>
+        <p:nvSpPr>
+          <p:cNvPr id="5" name="TextBox 4"/>
+          <p:cNvSpPr txBox="1"/>
+          <p:nvPr/>
+        </p:nvSpPr>
+        <p:spPr>
+          <a:xfrm>
+            <a:off x="292608" y="475488"/>
+            <a:ext cx="11612880" cy="566928"/>
+          </a:xfrm>
+          <a:prstGeom prst="rect">
+            <a:avLst/>
+          </a:prstGeom>
+          <a:noFill/>
+        </p:spPr>
+        <p:txBody>
+          <a:bodyPr wrap="square">
+            <a:spAutoFit/>
+          </a:bodyPr>
+          <a:lstStyle/>
+          <a:p>
+            <a:pPr algn="l"/>
+            <a:r>
+              <a:rPr sz="2500" b="1">
+                <a:solidFill>
+                  <a:srgbClr val="1A1A1A"/>
+                </a:solidFill>
+                <a:latin typeface="Calibri"/>
+              </a:rPr>
+              <a:t>FY wallet mix — detail</a:t>
+            </a:r>
+          </a:p>
+        </p:txBody>
+      </p:sp>
+      <p:sp>
+        <p:nvSpPr>
+          <p:cNvPr id="6" name="Rectangle 5"/>
+          <p:cNvSpPr/>
+          <p:nvPr/>
+        </p:nvSpPr>
+        <p:spPr>
+          <a:xfrm>
+            <a:off x="292608" y="1005840"/>
+            <a:ext cx="11612880" cy="28000"/>
+          </a:xfrm>
+          <a:prstGeom prst="rect">
+            <a:avLst/>
+          </a:prstGeom>
+          <a:solidFill>
+            <a:srgbClr val="CC0E1E"/>
+          </a:solidFill>
+          <a:ln>
+            <a:noFill/>
+          </a:ln>
+        </p:spPr>
+        <p:style>
+          <a:lnRef idx="1">
+            <a:schemeClr val="accent1"/>
+          </a:lnRef>
+          <a:fillRef idx="3">
+            <a:schemeClr val="accent1"/>
+          </a:fillRef>
+          <a:effectRef idx="2">
+            <a:schemeClr val="accent1"/>
+          </a:effectRef>
+          <a:fontRef idx="minor">
+            <a:schemeClr val="lt1"/>
+          </a:fontRef>
+        </p:style>
+        <p:txBody>
+          <a:bodyPr rtlCol="0" anchor="ctr"/>
+          <a:lstStyle/>
+          <a:p>
+            <a:pPr algn="ctr"/>
+          </a:p>
+        </p:txBody>
+      </p:sp>
+      <p:sp>
+        <p:nvSpPr>
+          <p:cNvPr id="7" name="TextBox 6"/>
+          <p:cNvSpPr txBox="1"/>
+          <p:nvPr/>
+        </p:nvSpPr>
+        <p:spPr>
+          <a:xfrm>
+            <a:off x="11594592" y="6473952"/>
+            <a:ext cx="365760" cy="274320"/>
+          </a:xfrm>
+          <a:prstGeom prst="rect">
+            <a:avLst/>
+          </a:prstGeom>
+          <a:noFill/>
+        </p:spPr>
+        <p:txBody>
+          <a:bodyPr wrap="square">
+            <a:spAutoFit/>
+          </a:bodyPr>
+          <a:lstStyle/>
+          <a:p>
+            <a:pPr algn="r"/>
+            <a:r>
+              <a:rPr sz="1000" b="0">
+                <a:solidFill>
+                  <a:srgbClr val="5A5A5A"/>
+                </a:solidFill>
+                <a:latin typeface="Calibri"/>
+              </a:rPr>
+              <a:t>23</a:t>
+            </a:r>
+          </a:p>
+        </p:txBody>
+      </p:sp>
+      <p:graphicFrame>
+        <p:nvGraphicFramePr>
+          <p:cNvPr id="8" name="Table 7"/>
+          <p:cNvGraphicFramePr>
+            <a:graphicFrameLocks noGrp="1"/>
+          </p:cNvGraphicFramePr>
+          <p:nvPr/>
+        </p:nvGraphicFramePr>
+        <p:xfrm>
+          <a:off x="292608" y="1234440"/>
+          <a:ext cx="11430000" cy="2926080"/>
+        </p:xfrm>
+        <a:graphic>
+          <a:graphicData uri="http://schemas.openxmlformats.org/drawingml/2006/table">
+            <a:tbl>
+              <a:tblPr firstRow="1" bandRow="1">
+                <a:tableStyleId>{5C22544A-7EE6-4342-B048-85BDC9FD1C3A}</a:tableStyleId>
+              </a:tblPr>
+              <a:tblGrid>
+                <a:gridCol w="3657600"/>
+                <a:gridCol w="2468880"/>
+                <a:gridCol w="2468880"/>
+                <a:gridCol w="2834640"/>
+              </a:tblGrid>
+              <a:tr h="487680">
+                <a:tc>
+                  <a:txBody>
+                    <a:bodyPr/>
+                    <a:lstStyle/>
+                    <a:p>
+                      <a:pPr algn="l"/>
+                      <a:r>
+                        <a:rPr sz="1300" b="1">
+                          <a:solidFill>
+                            <a:srgbClr val="FFFFFF"/>
+                          </a:solidFill>
+                          <a:latin typeface="Calibri"/>
+                        </a:rPr>
+                        <a:t> </a:t>
+                      </a:r>
+                    </a:p>
+                  </a:txBody>
+                  <a:tcPr anchor="ctr" marL="73152" marR="73152">
+                    <a:solidFill>
+                      <a:srgbClr val="CC0E1E"/>
+                    </a:solidFill>
+                  </a:tcPr>
+                </a:tc>
+                <a:tc>
+                  <a:txBody>
+                    <a:bodyPr/>
+                    <a:lstStyle/>
+                    <a:p>
+                      <a:pPr algn="r"/>
+                      <a:r>
+                        <a:rPr sz="1300" b="1">
+                          <a:solidFill>
+                            <a:srgbClr val="FFFFFF"/>
+                          </a:solidFill>
+                          <a:latin typeface="Calibri"/>
+                        </a:rPr>
+                        <a:t>FY2025</a:t>
+                      </a:r>
+                    </a:p>
+                  </a:txBody>
+                  <a:tcPr anchor="ctr" marL="73152" marR="73152">
+                    <a:solidFill>
+                      <a:srgbClr val="CC0E1E"/>
+                    </a:solidFill>
+                  </a:tcPr>
+                </a:tc>
+                <a:tc>
+                  <a:txBody>
+                    <a:bodyPr/>
+                    <a:lstStyle/>
+                    <a:p>
+                      <a:pPr algn="r"/>
+                      <a:r>
+                        <a:rPr sz="1300" b="1">
+                          <a:solidFill>
+                            <a:srgbClr val="FFFFFF"/>
+                          </a:solidFill>
+                          <a:latin typeface="Calibri"/>
+                        </a:rPr>
+                        <a:t>FY2026</a:t>
+                      </a:r>
+                    </a:p>
+                  </a:txBody>
+                  <a:tcPr anchor="ctr" marL="73152" marR="73152">
+                    <a:solidFill>
+                      <a:srgbClr val="CC0E1E"/>
+                    </a:solidFill>
+                  </a:tcPr>
+                </a:tc>
+                <a:tc>
+                  <a:txBody>
+                    <a:bodyPr/>
+                    <a:lstStyle/>
+                    <a:p>
+                      <a:pPr algn="r"/>
+                      <a:r>
+                        <a:rPr sz="1300" b="1">
+                          <a:solidFill>
+                            <a:srgbClr val="FFFFFF"/>
+                          </a:solidFill>
+                          <a:latin typeface="Calibri"/>
+                        </a:rPr>
+                        <a:t>Δ</a:t>
+                      </a:r>
+                    </a:p>
+                  </a:txBody>
+                  <a:tcPr anchor="ctr" marL="73152" marR="73152">
+                    <a:solidFill>
+                      <a:srgbClr val="CC0E1E"/>
+                    </a:solidFill>
+                  </a:tcPr>
+                </a:tc>
+              </a:tr>
+              <a:tr h="487680">
+                <a:tc>
+                  <a:txBody>
+                    <a:bodyPr/>
+                    <a:lstStyle/>
+                    <a:p>
+                      <a:pPr algn="l"/>
+                      <a:r>
+                        <a:rPr sz="1300" b="0">
+                          <a:solidFill>
+                            <a:srgbClr val="1A1A1A"/>
+                          </a:solidFill>
+                          <a:latin typeface="Calibri"/>
+                        </a:rPr>
+                        <a:t>Total</a:t>
+                      </a:r>
+                    </a:p>
+                  </a:txBody>
+                  <a:tcPr anchor="ctr" marL="73152" marR="73152">
+                    <a:solidFill>
+                      <a:srgbClr val="FFFFFF"/>
+                    </a:solidFill>
+                  </a:tcPr>
+                </a:tc>
+                <a:tc>
+                  <a:txBody>
+                    <a:bodyPr/>
+                    <a:lstStyle/>
+                    <a:p>
+                      <a:pPr algn="r"/>
+                      <a:r>
+                        <a:rPr sz="1300" b="0">
+                          <a:solidFill>
+                            <a:srgbClr val="1A1A1A"/>
+                          </a:solidFill>
+                          <a:latin typeface="Calibri"/>
+                        </a:rPr>
+                        <a:t>EUR 76,214</a:t>
+                      </a:r>
+                    </a:p>
+                  </a:txBody>
+                  <a:tcPr anchor="ctr" marL="73152" marR="73152">
+                    <a:solidFill>
+                      <a:srgbClr val="FFFFFF"/>
+                    </a:solidFill>
+                  </a:tcPr>
+                </a:tc>
+                <a:tc>
+                  <a:txBody>
+                    <a:bodyPr/>
+                    <a:lstStyle/>
+                    <a:p>
+                      <a:pPr algn="r"/>
+                      <a:r>
+                        <a:rPr sz="1300" b="0">
+                          <a:solidFill>
+                            <a:srgbClr val="1A1A1A"/>
+                          </a:solidFill>
+                          <a:latin typeface="Calibri"/>
+                        </a:rPr>
+                        <a:t>EUR 89,959</a:t>
+                      </a:r>
+                    </a:p>
+                  </a:txBody>
+                  <a:tcPr anchor="ctr" marL="73152" marR="73152">
+                    <a:solidFill>
+                      <a:srgbClr val="FFFFFF"/>
+                    </a:solidFill>
+                  </a:tcPr>
+                </a:tc>
+                <a:tc>
+                  <a:txBody>
+                    <a:bodyPr/>
+                    <a:lstStyle/>
+                    <a:p>
+                      <a:pPr algn="r"/>
+                      <a:r>
+                        <a:rPr sz="1300" b="0">
+                          <a:solidFill>
+                            <a:srgbClr val="1A1A1A"/>
+                          </a:solidFill>
+                          <a:latin typeface="Calibri"/>
+                        </a:rPr>
+                        <a:t>EUR 13,745</a:t>
+                      </a:r>
+                    </a:p>
+                  </a:txBody>
+                  <a:tcPr anchor="ctr" marL="73152" marR="73152">
+                    <a:solidFill>
+                      <a:srgbClr val="FFFFFF"/>
+                    </a:solidFill>
+                  </a:tcPr>
+                </a:tc>
+              </a:tr>
+              <a:tr h="487680">
+                <a:tc>
+                  <a:txBody>
+                    <a:bodyPr/>
+                    <a:lstStyle/>
+                    <a:p>
+                      <a:pPr algn="l"/>
+                      <a:r>
+                        <a:rPr sz="1300" b="0">
+                          <a:solidFill>
+                            <a:srgbClr val="1A1A1A"/>
+                          </a:solidFill>
+                          <a:latin typeface="Calibri"/>
+                        </a:rPr>
+                        <a:t>Genuine only</a:t>
+                      </a:r>
+                    </a:p>
+                  </a:txBody>
+                  <a:tcPr anchor="ctr" marL="73152" marR="73152">
+                    <a:solidFill>
+                      <a:srgbClr val="ECECEC"/>
+                    </a:solidFill>
+                  </a:tcPr>
+                </a:tc>
+                <a:tc>
+                  <a:txBody>
+                    <a:bodyPr/>
+                    <a:lstStyle/>
+                    <a:p>
+                      <a:pPr algn="r"/>
+                      <a:r>
+                        <a:rPr sz="1300" b="0">
+                          <a:solidFill>
+                            <a:srgbClr val="1A1A1A"/>
+                          </a:solidFill>
+                          <a:latin typeface="Calibri"/>
+                        </a:rPr>
+                        <a:t>EUR 67,741</a:t>
+                      </a:r>
+                    </a:p>
+                  </a:txBody>
+                  <a:tcPr anchor="ctr" marL="73152" marR="73152">
+                    <a:solidFill>
+                      <a:srgbClr val="ECECEC"/>
+                    </a:solidFill>
+                  </a:tcPr>
+                </a:tc>
+                <a:tc>
+                  <a:txBody>
+                    <a:bodyPr/>
+                    <a:lstStyle/>
+                    <a:p>
+                      <a:pPr algn="r"/>
+                      <a:r>
+                        <a:rPr sz="1300" b="0">
+                          <a:solidFill>
+                            <a:srgbClr val="1A1A1A"/>
+                          </a:solidFill>
+                          <a:latin typeface="Calibri"/>
+                        </a:rPr>
+                        <a:t>EUR 79,564</a:t>
+                      </a:r>
+                    </a:p>
+                  </a:txBody>
+                  <a:tcPr anchor="ctr" marL="73152" marR="73152">
+                    <a:solidFill>
+                      <a:srgbClr val="ECECEC"/>
+                    </a:solidFill>
+                  </a:tcPr>
+                </a:tc>
+                <a:tc>
+                  <a:txBody>
+                    <a:bodyPr/>
+                    <a:lstStyle/>
+                    <a:p>
+                      <a:pPr algn="r"/>
+                      <a:r>
+                        <a:rPr sz="1300" b="0">
+                          <a:solidFill>
+                            <a:srgbClr val="1A1A1A"/>
+                          </a:solidFill>
+                          <a:latin typeface="Calibri"/>
+                        </a:rPr>
+                        <a:t>EUR 11,823</a:t>
+                      </a:r>
+                    </a:p>
+                  </a:txBody>
+                  <a:tcPr anchor="ctr" marL="73152" marR="73152">
+                    <a:solidFill>
+                      <a:srgbClr val="ECECEC"/>
+                    </a:solidFill>
+                  </a:tcPr>
+                </a:tc>
+              </a:tr>
+              <a:tr h="487680">
+                <a:tc>
+                  <a:txBody>
+                    <a:bodyPr/>
+                    <a:lstStyle/>
+                    <a:p>
+                      <a:pPr algn="l"/>
+                      <a:r>
+                        <a:rPr sz="1300" b="0">
+                          <a:solidFill>
+                            <a:srgbClr val="1A1A1A"/>
+                          </a:solidFill>
+                          <a:latin typeface="Calibri"/>
+                        </a:rPr>
+                        <a:t>Genuine with BVP alternative</a:t>
+                      </a:r>
+                    </a:p>
+                  </a:txBody>
+                  <a:tcPr anchor="ctr" marL="73152" marR="73152">
+                    <a:solidFill>
+                      <a:srgbClr val="FFFFFF"/>
+                    </a:solidFill>
+                  </a:tcPr>
+                </a:tc>
+                <a:tc>
+                  <a:txBody>
+                    <a:bodyPr/>
+                    <a:lstStyle/>
+                    <a:p>
+                      <a:pPr algn="r"/>
+                      <a:r>
+                        <a:rPr sz="1300" b="0">
+                          <a:solidFill>
+                            <a:srgbClr val="1A1A1A"/>
+                          </a:solidFill>
+                          <a:latin typeface="Calibri"/>
+                        </a:rPr>
+                        <a:t>EUR 8,473</a:t>
+                      </a:r>
+                    </a:p>
+                  </a:txBody>
+                  <a:tcPr anchor="ctr" marL="73152" marR="73152">
+                    <a:solidFill>
+                      <a:srgbClr val="FFFFFF"/>
+                    </a:solidFill>
+                  </a:tcPr>
+                </a:tc>
+                <a:tc>
+                  <a:txBody>
+                    <a:bodyPr/>
+                    <a:lstStyle/>
+                    <a:p>
+                      <a:pPr algn="r"/>
+                      <a:r>
+                        <a:rPr sz="1300" b="0">
+                          <a:solidFill>
+                            <a:srgbClr val="1A1A1A"/>
+                          </a:solidFill>
+                          <a:latin typeface="Calibri"/>
+                        </a:rPr>
+                        <a:t>EUR 10,395</a:t>
+                      </a:r>
+                    </a:p>
+                  </a:txBody>
+                  <a:tcPr anchor="ctr" marL="73152" marR="73152">
+                    <a:solidFill>
+                      <a:srgbClr val="FFFFFF"/>
+                    </a:solidFill>
+                  </a:tcPr>
+                </a:tc>
+                <a:tc>
+                  <a:txBody>
+                    <a:bodyPr/>
+                    <a:lstStyle/>
+                    <a:p>
+                      <a:pPr algn="r"/>
+                      <a:r>
+                        <a:rPr sz="1300" b="0">
+                          <a:solidFill>
+                            <a:srgbClr val="1A1A1A"/>
+                          </a:solidFill>
+                          <a:latin typeface="Calibri"/>
+                        </a:rPr>
+                        <a:t>EUR 1,922</a:t>
+                      </a:r>
+                    </a:p>
+                  </a:txBody>
+                  <a:tcPr anchor="ctr" marL="73152" marR="73152">
+                    <a:solidFill>
+                      <a:srgbClr val="FFFFFF"/>
+                    </a:solidFill>
+                  </a:tcPr>
+                </a:tc>
+              </a:tr>
+              <a:tr h="487680">
+                <a:tc>
+                  <a:txBody>
+                    <a:bodyPr/>
+                    <a:lstStyle/>
+                    <a:p>
+                      <a:pPr algn="l"/>
+                      <a:r>
+                        <a:rPr sz="1300" b="0">
+                          <a:solidFill>
+                            <a:srgbClr val="1A1A1A"/>
+                          </a:solidFill>
+                          <a:latin typeface="Calibri"/>
+                        </a:rPr>
+                        <a:t>BVP</a:t>
+                      </a:r>
+                    </a:p>
+                  </a:txBody>
+                  <a:tcPr anchor="ctr" marL="73152" marR="73152">
+                    <a:solidFill>
+                      <a:srgbClr val="ECECEC"/>
+                    </a:solidFill>
+                  </a:tcPr>
+                </a:tc>
+                <a:tc>
+                  <a:txBody>
+                    <a:bodyPr/>
+                    <a:lstStyle/>
+                    <a:p>
+                      <a:pPr algn="r"/>
+                      <a:r>
+                        <a:rPr sz="1300" b="0">
+                          <a:solidFill>
+                            <a:srgbClr val="1A1A1A"/>
+                          </a:solidFill>
+                          <a:latin typeface="Calibri"/>
+                        </a:rPr>
+                        <a:t>EUR 0</a:t>
+                      </a:r>
+                    </a:p>
+                  </a:txBody>
+                  <a:tcPr anchor="ctr" marL="73152" marR="73152">
+                    <a:solidFill>
+                      <a:srgbClr val="ECECEC"/>
+                    </a:solidFill>
+                  </a:tcPr>
+                </a:tc>
+                <a:tc>
+                  <a:txBody>
+                    <a:bodyPr/>
+                    <a:lstStyle/>
+                    <a:p>
+                      <a:pPr algn="r"/>
+                      <a:r>
+                        <a:rPr sz="1300" b="0">
+                          <a:solidFill>
+                            <a:srgbClr val="1A1A1A"/>
+                          </a:solidFill>
+                          <a:latin typeface="Calibri"/>
+                        </a:rPr>
+                        <a:t>EUR 0</a:t>
+                      </a:r>
+                    </a:p>
+                  </a:txBody>
+                  <a:tcPr anchor="ctr" marL="73152" marR="73152">
+                    <a:solidFill>
+                      <a:srgbClr val="ECECEC"/>
+                    </a:solidFill>
+                  </a:tcPr>
+                </a:tc>
+                <a:tc>
+                  <a:txBody>
+                    <a:bodyPr/>
+                    <a:lstStyle/>
+                    <a:p>
+                      <a:pPr algn="r"/>
+                      <a:r>
+                        <a:rPr sz="1300" b="0">
+                          <a:solidFill>
+                            <a:srgbClr val="1A1A1A"/>
+                          </a:solidFill>
+                          <a:latin typeface="Calibri"/>
+                        </a:rPr>
+                        <a:t>EUR 0</a:t>
+                      </a:r>
+                    </a:p>
+                  </a:txBody>
+                  <a:tcPr anchor="ctr" marL="73152" marR="73152">
+                    <a:solidFill>
+                      <a:srgbClr val="ECECEC"/>
+                    </a:solidFill>
+                  </a:tcPr>
+                </a:tc>
+              </a:tr>
+              <a:tr h="487680">
+                <a:tc>
+                  <a:txBody>
+                    <a:bodyPr/>
+                    <a:lstStyle/>
+                    <a:p>
+                      <a:pPr algn="l"/>
+                      <a:r>
+                        <a:rPr sz="1300" b="0">
+                          <a:solidFill>
+                            <a:srgbClr val="1A1A1A"/>
+                          </a:solidFill>
+                          <a:latin typeface="Calibri"/>
+                        </a:rPr>
+                        <a:t>BVP % of wallet</a:t>
+                      </a:r>
+                    </a:p>
+                  </a:txBody>
+                  <a:tcPr anchor="ctr" marL="73152" marR="73152">
+                    <a:solidFill>
+                      <a:srgbClr val="FFFFFF"/>
+                    </a:solidFill>
+                  </a:tcPr>
+                </a:tc>
+                <a:tc>
+                  <a:txBody>
+                    <a:bodyPr/>
+                    <a:lstStyle/>
+                    <a:p>
+                      <a:pPr algn="r"/>
+                      <a:r>
+                        <a:rPr sz="1300" b="0">
+                          <a:solidFill>
+                            <a:srgbClr val="1A1A1A"/>
+                          </a:solidFill>
+                          <a:latin typeface="Calibri"/>
+                        </a:rPr>
+                        <a:t>0.0%</a:t>
+                      </a:r>
+                    </a:p>
+                  </a:txBody>
+                  <a:tcPr anchor="ctr" marL="73152" marR="73152">
+                    <a:solidFill>
+                      <a:srgbClr val="FFFFFF"/>
+                    </a:solidFill>
+                  </a:tcPr>
+                </a:tc>
+                <a:tc>
+                  <a:txBody>
+                    <a:bodyPr/>
+                    <a:lstStyle/>
+                    <a:p>
+                      <a:pPr algn="r"/>
+                      <a:r>
+                        <a:rPr sz="1300" b="0">
+                          <a:solidFill>
+                            <a:srgbClr val="1A1A1A"/>
+                          </a:solidFill>
+                          <a:latin typeface="Calibri"/>
+                        </a:rPr>
+                        <a:t>0.0%</a:t>
+                      </a:r>
+                    </a:p>
+                  </a:txBody>
+                  <a:tcPr anchor="ctr" marL="73152" marR="73152">
+                    <a:solidFill>
+                      <a:srgbClr val="FFFFFF"/>
+                    </a:solidFill>
+                  </a:tcPr>
+                </a:tc>
+                <a:tc>
+                  <a:txBody>
+                    <a:bodyPr/>
+                    <a:lstStyle/>
+                    <a:p>
+                      <a:pPr algn="r"/>
+                      <a:r>
+                        <a:rPr sz="1300" b="0">
+                          <a:solidFill>
+                            <a:srgbClr val="1A1A1A"/>
+                          </a:solidFill>
+                          <a:latin typeface="Calibri"/>
+                        </a:rPr>
+                        <a:t>+0.0 pp</a:t>
+                      </a:r>
+                    </a:p>
+                  </a:txBody>
+                  <a:tcPr anchor="ctr" marL="73152" marR="73152">
+                    <a:solidFill>
+                      <a:srgbClr val="FFFFFF"/>
+                    </a:solidFill>
+                  </a:tcPr>
+                </a:tc>
+              </a:tr>
+            </a:tbl>
+          </a:graphicData>
+        </a:graphic>
+      </p:graphicFrame>
+    </p:spTree>
+  </p:cSld>
+  <p:clrMapOvr>
+    <a:masterClrMapping/>
+  </p:clrMapOvr>
+</p:sld>
+</file>
+
+<file path=ppt/slides/slide24.xml><?xml version="1.0" encoding="utf-8"?>
+<p:sld xmlns:a="http://schemas.openxmlformats.org/drawingml/2006/main" xmlns:p="http://schemas.openxmlformats.org/presentationml/2006/main" xmlns:r="http://schemas.openxmlformats.org/officeDocument/2006/relationships">
+  <p:cSld>
+    <p:bg>
+      <p:bgPr>
+        <a:solidFill>
+          <a:srgbClr val="FFFFFF"/>
+        </a:solidFill>
+        <a:effectLst/>
+      </p:bgPr>
+    </p:bg>
+    <p:spTree>
+      <p:nvGrpSpPr>
+        <p:cNvPr id="1" name=""/>
+        <p:cNvGrpSpPr/>
+        <p:nvPr/>
+      </p:nvGrpSpPr>
+      <p:grpSpPr/>
+      <p:pic>
+        <p:nvPicPr>
+          <p:cNvPr id="2" name="Picture 1" descr="image.png"/>
+          <p:cNvPicPr>
+            <a:picLocks noChangeAspect="1"/>
+          </p:cNvPicPr>
+          <p:nvPr/>
+        </p:nvPicPr>
+        <p:blipFill>
+          <a:blip r:embed="rId2"/>
+          <a:stretch>
+            <a:fillRect/>
+          </a:stretch>
+        </p:blipFill>
+        <p:spPr>
+          <a:xfrm>
+            <a:off x="256032" y="6263640"/>
+            <a:ext cx="1679787" cy="292608"/>
+          </a:xfrm>
+          <a:prstGeom prst="rect">
+            <a:avLst/>
+          </a:prstGeom>
+        </p:spPr>
+      </p:pic>
+      <p:sp>
+        <p:nvSpPr>
+          <p:cNvPr id="3" name="Rectangle 2"/>
+          <p:cNvSpPr/>
+          <p:nvPr/>
+        </p:nvSpPr>
+        <p:spPr>
+          <a:xfrm>
+            <a:off x="0" y="6766560"/>
+            <a:ext cx="12188952" cy="91440"/>
+          </a:xfrm>
+          <a:prstGeom prst="rect">
+            <a:avLst/>
+          </a:prstGeom>
+          <a:solidFill>
+            <a:srgbClr val="CC0E1E"/>
+          </a:solidFill>
+          <a:ln>
+            <a:noFill/>
+          </a:ln>
+        </p:spPr>
+        <p:style>
+          <a:lnRef idx="1">
+            <a:schemeClr val="accent1"/>
+          </a:lnRef>
+          <a:fillRef idx="3">
+            <a:schemeClr val="accent1"/>
+          </a:fillRef>
+          <a:effectRef idx="2">
+            <a:schemeClr val="accent1"/>
+          </a:effectRef>
+          <a:fontRef idx="minor">
+            <a:schemeClr val="lt1"/>
+          </a:fontRef>
+        </p:style>
+        <p:txBody>
+          <a:bodyPr rtlCol="0" anchor="ctr"/>
+          <a:lstStyle/>
+          <a:p>
+            <a:pPr algn="ctr"/>
+          </a:p>
+        </p:txBody>
+      </p:sp>
+      <p:sp>
+        <p:nvSpPr>
+          <p:cNvPr id="4" name="TextBox 3"/>
+          <p:cNvSpPr txBox="1"/>
+          <p:nvPr/>
+        </p:nvSpPr>
+        <p:spPr>
+          <a:xfrm>
+            <a:off x="292608" y="201168"/>
+            <a:ext cx="11430000" cy="274320"/>
+          </a:xfrm>
+          <a:prstGeom prst="rect">
+            <a:avLst/>
+          </a:prstGeom>
+          <a:noFill/>
+        </p:spPr>
+        <p:txBody>
+          <a:bodyPr wrap="square">
+            <a:spAutoFit/>
+          </a:bodyPr>
+          <a:lstStyle/>
+          <a:p>
+            <a:pPr algn="l"/>
+            <a:r>
+              <a:rPr sz="1100" b="1">
+                <a:solidFill>
+                  <a:srgbClr val="CC0E1E"/>
+                </a:solidFill>
+                <a:latin typeface="Calibri"/>
+              </a:rPr>
+              <a:t>DRIVERS</a:t>
+            </a:r>
+          </a:p>
+        </p:txBody>
+      </p:sp>
+      <p:sp>
+        <p:nvSpPr>
+          <p:cNvPr id="5" name="TextBox 4"/>
+          <p:cNvSpPr txBox="1"/>
+          <p:nvPr/>
+        </p:nvSpPr>
+        <p:spPr>
+          <a:xfrm>
+            <a:off x="292608" y="475488"/>
+            <a:ext cx="11612880" cy="566928"/>
+          </a:xfrm>
+          <a:prstGeom prst="rect">
+            <a:avLst/>
+          </a:prstGeom>
+          <a:noFill/>
+        </p:spPr>
+        <p:txBody>
+          <a:bodyPr wrap="square">
+            <a:spAutoFit/>
+          </a:bodyPr>
+          <a:lstStyle/>
+          <a:p>
+            <a:pPr algn="l"/>
+            <a:r>
+              <a:rPr sz="2500" b="1">
+                <a:solidFill>
+                  <a:srgbClr val="1A1A1A"/>
+                </a:solidFill>
+                <a:latin typeface="Calibri"/>
+              </a:rPr>
+              <a:t>Where the genuine drop sits (FY2025 → FY2026)</a:t>
+            </a:r>
+          </a:p>
+        </p:txBody>
+      </p:sp>
+      <p:sp>
+        <p:nvSpPr>
+          <p:cNvPr id="6" name="Rectangle 5"/>
+          <p:cNvSpPr/>
+          <p:nvPr/>
+        </p:nvSpPr>
+        <p:spPr>
+          <a:xfrm>
+            <a:off x="292608" y="1005840"/>
+            <a:ext cx="11612880" cy="28000"/>
+          </a:xfrm>
+          <a:prstGeom prst="rect">
+            <a:avLst/>
+          </a:prstGeom>
+          <a:solidFill>
+            <a:srgbClr val="CC0E1E"/>
+          </a:solidFill>
+          <a:ln>
+            <a:noFill/>
+          </a:ln>
+        </p:spPr>
+        <p:style>
+          <a:lnRef idx="1">
+            <a:schemeClr val="accent1"/>
+          </a:lnRef>
+          <a:fillRef idx="3">
+            <a:schemeClr val="accent1"/>
+          </a:fillRef>
+          <a:effectRef idx="2">
+            <a:schemeClr val="accent1"/>
+          </a:effectRef>
+          <a:fontRef idx="minor">
+            <a:schemeClr val="lt1"/>
+          </a:fontRef>
+        </p:style>
+        <p:txBody>
+          <a:bodyPr rtlCol="0" anchor="ctr"/>
+          <a:lstStyle/>
+          <a:p>
+            <a:pPr algn="ctr"/>
+          </a:p>
+        </p:txBody>
+      </p:sp>
+      <p:sp>
+        <p:nvSpPr>
+          <p:cNvPr id="7" name="TextBox 6"/>
+          <p:cNvSpPr txBox="1"/>
+          <p:nvPr/>
+        </p:nvSpPr>
+        <p:spPr>
+          <a:xfrm>
+            <a:off x="11594592" y="6473952"/>
+            <a:ext cx="365760" cy="274320"/>
+          </a:xfrm>
+          <a:prstGeom prst="rect">
+            <a:avLst/>
+          </a:prstGeom>
+          <a:noFill/>
+        </p:spPr>
+        <p:txBody>
+          <a:bodyPr wrap="square">
+            <a:spAutoFit/>
+          </a:bodyPr>
+          <a:lstStyle/>
+          <a:p>
+            <a:pPr algn="r"/>
+            <a:r>
+              <a:rPr sz="1000" b="0">
+                <a:solidFill>
+                  <a:srgbClr val="5A5A5A"/>
+                </a:solidFill>
+                <a:latin typeface="Calibri"/>
+              </a:rPr>
+              <a:t>24</a:t>
+            </a:r>
+          </a:p>
+        </p:txBody>
+      </p:sp>
+      <p:sp>
+        <p:nvSpPr>
+          <p:cNvPr id="8" name="TextBox 7"/>
+          <p:cNvSpPr txBox="1"/>
+          <p:nvPr/>
+        </p:nvSpPr>
+        <p:spPr>
+          <a:xfrm>
+            <a:off x="292608" y="1234440"/>
+            <a:ext cx="11430000" cy="4572000"/>
+          </a:xfrm>
+          <a:prstGeom prst="rect">
+            <a:avLst/>
+          </a:prstGeom>
+          <a:noFill/>
+        </p:spPr>
+        <p:txBody>
+          <a:bodyPr wrap="square">
+            <a:spAutoFit/>
+          </a:bodyPr>
+          <a:lstStyle/>
+          <a:p>
+            <a:pPr>
+              <a:lnSpc>
+                <a:spcPct val="125000"/>
+              </a:lnSpc>
+              <a:spcAft>
+                <a:spcPts val="1000"/>
+              </a:spcAft>
+            </a:pPr>
+            <a:r>
+              <a:rPr sz="1500" b="1">
+                <a:solidFill>
+                  <a:srgbClr val="CC0E1E"/>
+                </a:solidFill>
+                <a:latin typeface="Calibri"/>
+              </a:rPr>
+              <a:t>—  </a:t>
+            </a:r>
+            <a:r>
+              <a:rPr sz="1500">
+                <a:solidFill>
+                  <a:srgbClr val="1A1A1A"/>
+                </a:solidFill>
+                <a:latin typeface="Calibri"/>
+              </a:rPr>
+              <a:t>Genuine-only sales moved EUR 11,823 from FY2025 to FY2026.</a:t>
+            </a:r>
+          </a:p>
+          <a:p>
+            <a:pPr>
+              <a:lnSpc>
+                <a:spcPct val="125000"/>
+              </a:lnSpc>
+              <a:spcAft>
+                <a:spcPts val="1000"/>
+              </a:spcAft>
+            </a:pPr>
+            <a:r>
+              <a:rPr sz="1500" b="1">
+                <a:solidFill>
+                  <a:srgbClr val="CC0E1E"/>
+                </a:solidFill>
+                <a:latin typeface="Calibri"/>
+              </a:rPr>
+              <a:t>—  </a:t>
+            </a:r>
+            <a:r>
+              <a:rPr sz="1500">
+                <a:solidFill>
+                  <a:srgbClr val="1A1A1A"/>
+                </a:solidFill>
+                <a:latin typeface="Calibri"/>
+              </a:rPr>
+              <a:t>Of that, the routine service basket (filters, pads, rotors) moved EUR 3,336 on genuine-only; BVP in that basket moved EUR 0.</a:t>
+            </a:r>
+          </a:p>
+          <a:p>
+            <a:pPr>
+              <a:lnSpc>
+                <a:spcPct val="125000"/>
+              </a:lnSpc>
+              <a:spcAft>
+                <a:spcPts val="1000"/>
+              </a:spcAft>
+            </a:pPr>
+            <a:r>
+              <a:rPr sz="1500" b="1">
+                <a:solidFill>
+                  <a:srgbClr val="CC0E1E"/>
+                </a:solidFill>
+                <a:latin typeface="Calibri"/>
+              </a:rPr>
+              <a:t>—  </a:t>
+            </a:r>
+            <a:r>
+              <a:rPr sz="1500">
+                <a:solidFill>
+                  <a:srgbClr val="1A1A1A"/>
+                </a:solidFill>
+                <a:latin typeface="Calibri"/>
+              </a:rPr>
+              <a:t>Genuine-only did not fall on this FY cut — check category movers and H1 for pressure points.</a:t>
+            </a:r>
+          </a:p>
+          <a:p>
+            <a:pPr>
+              <a:lnSpc>
+                <a:spcPct val="125000"/>
+              </a:lnSpc>
+              <a:spcAft>
+                <a:spcPts val="1000"/>
+              </a:spcAft>
+            </a:pPr>
+            <a:r>
+              <a:rPr sz="1500" b="1">
+                <a:solidFill>
+                  <a:srgbClr val="CC0E1E"/>
+                </a:solidFill>
+                <a:latin typeface="Calibri"/>
+              </a:rPr>
+              <a:t>—  </a:t>
+            </a:r>
+            <a:r>
+              <a:rPr sz="1500">
+                <a:solidFill>
+                  <a:srgbClr val="1A1A1A"/>
+                </a:solidFill>
+                <a:latin typeface="Calibri"/>
+              </a:rPr>
+              <a:t>Meeting line: check high-value assemblies / sensors before blaming the filter or pad menu.</a:t>
+            </a:r>
+          </a:p>
+        </p:txBody>
+      </p:sp>
+    </p:spTree>
+  </p:cSld>
+  <p:clrMapOvr>
+    <a:masterClrMapping/>
+  </p:clrMapOvr>
+</p:sld>
+</file>
+
+<file path=ppt/slides/slide25.xml><?xml version="1.0" encoding="utf-8"?>
+<p:sld xmlns:a="http://schemas.openxmlformats.org/drawingml/2006/main" xmlns:p="http://schemas.openxmlformats.org/presentationml/2006/main" xmlns:r="http://schemas.openxmlformats.org/officeDocument/2006/relationships">
+  <p:cSld>
+    <p:bg>
+      <p:bgPr>
+        <a:solidFill>
+          <a:srgbClr val="FFFFFF"/>
+        </a:solidFill>
+        <a:effectLst/>
+      </p:bgPr>
+    </p:bg>
+    <p:spTree>
+      <p:nvGrpSpPr>
+        <p:cNvPr id="1" name=""/>
+        <p:cNvGrpSpPr/>
+        <p:nvPr/>
+      </p:nvGrpSpPr>
+      <p:grpSpPr/>
+      <p:pic>
+        <p:nvPicPr>
+          <p:cNvPr id="2" name="Picture 1" descr="image.png"/>
+          <p:cNvPicPr>
+            <a:picLocks noChangeAspect="1"/>
+          </p:cNvPicPr>
+          <p:nvPr/>
+        </p:nvPicPr>
+        <p:blipFill>
+          <a:blip r:embed="rId2"/>
+          <a:stretch>
+            <a:fillRect/>
+          </a:stretch>
+        </p:blipFill>
+        <p:spPr>
+          <a:xfrm>
+            <a:off x="256032" y="6263640"/>
+            <a:ext cx="1679787" cy="292608"/>
+          </a:xfrm>
+          <a:prstGeom prst="rect">
+            <a:avLst/>
+          </a:prstGeom>
+        </p:spPr>
+      </p:pic>
+      <p:sp>
+        <p:nvSpPr>
+          <p:cNvPr id="3" name="Rectangle 2"/>
+          <p:cNvSpPr/>
+          <p:nvPr/>
+        </p:nvSpPr>
+        <p:spPr>
+          <a:xfrm>
+            <a:off x="0" y="6766560"/>
+            <a:ext cx="12188952" cy="91440"/>
+          </a:xfrm>
+          <a:prstGeom prst="rect">
+            <a:avLst/>
+          </a:prstGeom>
+          <a:solidFill>
+            <a:srgbClr val="CC0E1E"/>
+          </a:solidFill>
+          <a:ln>
+            <a:noFill/>
+          </a:ln>
+        </p:spPr>
+        <p:style>
+          <a:lnRef idx="1">
+            <a:schemeClr val="accent1"/>
+          </a:lnRef>
+          <a:fillRef idx="3">
+            <a:schemeClr val="accent1"/>
+          </a:fillRef>
+          <a:effectRef idx="2">
+            <a:schemeClr val="accent1"/>
+          </a:effectRef>
+          <a:fontRef idx="minor">
+            <a:schemeClr val="lt1"/>
+          </a:fontRef>
+        </p:style>
+        <p:txBody>
+          <a:bodyPr rtlCol="0" anchor="ctr"/>
+          <a:lstStyle/>
+          <a:p>
+            <a:pPr algn="ctr"/>
+          </a:p>
+        </p:txBody>
+      </p:sp>
+      <p:sp>
+        <p:nvSpPr>
+          <p:cNvPr id="4" name="TextBox 3"/>
+          <p:cNvSpPr txBox="1"/>
+          <p:nvPr/>
+        </p:nvSpPr>
+        <p:spPr>
+          <a:xfrm>
+            <a:off x="292608" y="201168"/>
+            <a:ext cx="11430000" cy="274320"/>
+          </a:xfrm>
+          <a:prstGeom prst="rect">
+            <a:avLst/>
+          </a:prstGeom>
+          <a:noFill/>
+        </p:spPr>
+        <p:txBody>
+          <a:bodyPr wrap="square">
+            <a:spAutoFit/>
+          </a:bodyPr>
+          <a:lstStyle/>
+          <a:p>
+            <a:pPr algn="l"/>
+            <a:r>
+              <a:rPr sz="1100" b="1">
+                <a:solidFill>
+                  <a:srgbClr val="CC0E1E"/>
+                </a:solidFill>
+                <a:latin typeface="Calibri"/>
+              </a:rPr>
+              <a:t>DRIVERS</a:t>
+            </a:r>
+          </a:p>
+        </p:txBody>
+      </p:sp>
+      <p:sp>
+        <p:nvSpPr>
+          <p:cNvPr id="5" name="TextBox 4"/>
+          <p:cNvSpPr txBox="1"/>
+          <p:nvPr/>
+        </p:nvSpPr>
+        <p:spPr>
+          <a:xfrm>
+            <a:off x="292608" y="475488"/>
+            <a:ext cx="11612880" cy="566928"/>
+          </a:xfrm>
+          <a:prstGeom prst="rect">
+            <a:avLst/>
+          </a:prstGeom>
+          <a:noFill/>
+        </p:spPr>
+        <p:txBody>
+          <a:bodyPr wrap="square">
+            <a:spAutoFit/>
+          </a:bodyPr>
+          <a:lstStyle/>
+          <a:p>
+            <a:pPr algn="l"/>
+            <a:r>
+              <a:rPr sz="2500" b="1">
+                <a:solidFill>
+                  <a:srgbClr val="1A1A1A"/>
+                </a:solidFill>
+                <a:latin typeface="Calibri"/>
+              </a:rPr>
+              <a:t>Largest part-number drops (FY24→FY25) — outside service filters</a:t>
+            </a:r>
+          </a:p>
+        </p:txBody>
+      </p:sp>
+      <p:sp>
+        <p:nvSpPr>
+          <p:cNvPr id="6" name="Rectangle 5"/>
+          <p:cNvSpPr/>
+          <p:nvPr/>
+        </p:nvSpPr>
+        <p:spPr>
+          <a:xfrm>
+            <a:off x="292608" y="1005840"/>
+            <a:ext cx="11612880" cy="28000"/>
+          </a:xfrm>
+          <a:prstGeom prst="rect">
+            <a:avLst/>
+          </a:prstGeom>
+          <a:solidFill>
+            <a:srgbClr val="CC0E1E"/>
+          </a:solidFill>
+          <a:ln>
+            <a:noFill/>
+          </a:ln>
+        </p:spPr>
+        <p:style>
+          <a:lnRef idx="1">
+            <a:schemeClr val="accent1"/>
+          </a:lnRef>
+          <a:fillRef idx="3">
+            <a:schemeClr val="accent1"/>
+          </a:fillRef>
+          <a:effectRef idx="2">
+            <a:schemeClr val="accent1"/>
+          </a:effectRef>
+          <a:fontRef idx="minor">
+            <a:schemeClr val="lt1"/>
+          </a:fontRef>
+        </p:style>
+        <p:txBody>
+          <a:bodyPr rtlCol="0" anchor="ctr"/>
+          <a:lstStyle/>
+          <a:p>
+            <a:pPr algn="ctr"/>
+          </a:p>
+        </p:txBody>
+      </p:sp>
+      <p:sp>
+        <p:nvSpPr>
+          <p:cNvPr id="7" name="TextBox 6"/>
+          <p:cNvSpPr txBox="1"/>
+          <p:nvPr/>
+        </p:nvSpPr>
+        <p:spPr>
+          <a:xfrm>
+            <a:off x="11594592" y="6473952"/>
+            <a:ext cx="365760" cy="274320"/>
+          </a:xfrm>
+          <a:prstGeom prst="rect">
+            <a:avLst/>
+          </a:prstGeom>
+          <a:noFill/>
+        </p:spPr>
+        <p:txBody>
+          <a:bodyPr wrap="square">
+            <a:spAutoFit/>
+          </a:bodyPr>
+          <a:lstStyle/>
+          <a:p>
+            <a:pPr algn="r"/>
+            <a:r>
+              <a:rPr sz="1000" b="0">
+                <a:solidFill>
+                  <a:srgbClr val="5A5A5A"/>
+                </a:solidFill>
+                <a:latin typeface="Calibri"/>
+              </a:rPr>
+              <a:t>25</a:t>
+            </a:r>
+          </a:p>
+        </p:txBody>
+      </p:sp>
+      <p:graphicFrame>
+        <p:nvGraphicFramePr>
+          <p:cNvPr id="8" name="Table 7"/>
+          <p:cNvGraphicFramePr>
+            <a:graphicFrameLocks noGrp="1"/>
+          </p:cNvGraphicFramePr>
+          <p:nvPr/>
+        </p:nvGraphicFramePr>
+        <p:xfrm>
+          <a:off x="292608" y="1234440"/>
+          <a:ext cx="11430000" cy="3474720"/>
+        </p:xfrm>
+        <a:graphic>
+          <a:graphicData uri="http://schemas.openxmlformats.org/drawingml/2006/table">
+            <a:tbl>
+              <a:tblPr firstRow="1" bandRow="1">
+                <a:tableStyleId>{5C22544A-7EE6-4342-B048-85BDC9FD1C3A}</a:tableStyleId>
+              </a:tblPr>
+              <a:tblGrid>
+                <a:gridCol w="2926080"/>
+                <a:gridCol w="5486400"/>
+                <a:gridCol w="3017520"/>
+              </a:tblGrid>
+              <a:tr h="434340">
+                <a:tc>
+                  <a:txBody>
+                    <a:bodyPr/>
+                    <a:lstStyle/>
+                    <a:p>
+                      <a:pPr algn="l"/>
+                      <a:r>
+                        <a:rPr sz="1250" b="1">
+                          <a:solidFill>
+                            <a:srgbClr val="FFFFFF"/>
+                          </a:solidFill>
+                          <a:latin typeface="Calibri"/>
+                        </a:rPr>
+                        <a:t>Part</a:t>
+                      </a:r>
+                    </a:p>
+                  </a:txBody>
+                  <a:tcPr anchor="ctr" marL="73152" marR="73152">
+                    <a:solidFill>
+                      <a:srgbClr val="CC0E1E"/>
+                    </a:solidFill>
+                  </a:tcPr>
+                </a:tc>
+                <a:tc>
+                  <a:txBody>
+                    <a:bodyPr/>
+                    <a:lstStyle/>
+                    <a:p>
+                      <a:pPr algn="l"/>
+                      <a:r>
+                        <a:rPr sz="1250" b="1">
+                          <a:solidFill>
+                            <a:srgbClr val="FFFFFF"/>
+                          </a:solidFill>
+                          <a:latin typeface="Calibri"/>
+                        </a:rPr>
+                        <a:t>Description</a:t>
+                      </a:r>
+                    </a:p>
+                  </a:txBody>
+                  <a:tcPr anchor="ctr" marL="73152" marR="73152">
+                    <a:solidFill>
+                      <a:srgbClr val="CC0E1E"/>
+                    </a:solidFill>
+                  </a:tcPr>
+                </a:tc>
+                <a:tc>
+                  <a:txBody>
+                    <a:bodyPr/>
+                    <a:lstStyle/>
+                    <a:p>
+                      <a:pPr algn="r"/>
+                      <a:r>
+                        <a:rPr sz="1250" b="1">
+                          <a:solidFill>
+                            <a:srgbClr val="FFFFFF"/>
+                          </a:solidFill>
+                          <a:latin typeface="Calibri"/>
+                        </a:rPr>
+                        <a:t>Δ EUR</a:t>
+                      </a:r>
+                    </a:p>
+                  </a:txBody>
+                  <a:tcPr anchor="ctr" marL="73152" marR="73152">
+                    <a:solidFill>
+                      <a:srgbClr val="CC0E1E"/>
+                    </a:solidFill>
+                  </a:tcPr>
+                </a:tc>
+              </a:tr>
+              <a:tr h="434340">
+                <a:tc>
+                  <a:txBody>
+                    <a:bodyPr/>
+                    <a:lstStyle/>
+                    <a:p>
+                      <a:pPr algn="l"/>
+                      <a:r>
+                        <a:rPr sz="1250" b="0">
+                          <a:solidFill>
+                            <a:srgbClr val="1A1A1A"/>
+                          </a:solidFill>
+                          <a:latin typeface="Calibri"/>
+                        </a:rPr>
+                        <a:t>8981776324</a:t>
+                      </a:r>
+                    </a:p>
+                  </a:txBody>
+                  <a:tcPr anchor="ctr" marL="73152" marR="73152">
+                    <a:solidFill>
+                      <a:srgbClr val="FFFFFF"/>
+                    </a:solidFill>
+                  </a:tcPr>
+                </a:tc>
+                <a:tc>
+                  <a:txBody>
+                    <a:bodyPr/>
+                    <a:lstStyle/>
+                    <a:p>
+                      <a:pPr algn="l"/>
+                      <a:r>
+                        <a:rPr sz="1250" b="0">
+                          <a:solidFill>
+                            <a:srgbClr val="1A1A1A"/>
+                          </a:solidFill>
+                          <a:latin typeface="Calibri"/>
+                        </a:rPr>
+                        <a:t>DPD ASM</a:t>
+                      </a:r>
+                    </a:p>
+                  </a:txBody>
+                  <a:tcPr anchor="ctr" marL="73152" marR="73152">
+                    <a:solidFill>
+                      <a:srgbClr val="FFFFFF"/>
+                    </a:solidFill>
+                  </a:tcPr>
+                </a:tc>
+                <a:tc>
+                  <a:txBody>
+                    <a:bodyPr/>
+                    <a:lstStyle/>
+                    <a:p>
+                      <a:pPr algn="r"/>
+                      <a:r>
+                        <a:rPr sz="1250" b="0">
+                          <a:solidFill>
+                            <a:srgbClr val="1A1A1A"/>
+                          </a:solidFill>
+                          <a:latin typeface="Calibri"/>
+                        </a:rPr>
+                        <a:t>-1,335</a:t>
+                      </a:r>
+                    </a:p>
+                  </a:txBody>
+                  <a:tcPr anchor="ctr" marL="73152" marR="73152">
+                    <a:solidFill>
+                      <a:srgbClr val="FFFFFF"/>
+                    </a:solidFill>
+                  </a:tcPr>
+                </a:tc>
+              </a:tr>
+              <a:tr h="434340">
+                <a:tc>
+                  <a:txBody>
+                    <a:bodyPr/>
+                    <a:lstStyle/>
+                    <a:p>
+                      <a:pPr algn="l"/>
+                      <a:r>
+                        <a:rPr sz="1250" b="0">
+                          <a:solidFill>
+                            <a:srgbClr val="1A1A1A"/>
+                          </a:solidFill>
+                          <a:latin typeface="Calibri"/>
+                        </a:rPr>
+                        <a:t>8983550720</a:t>
+                      </a:r>
+                    </a:p>
+                  </a:txBody>
+                  <a:tcPr anchor="ctr" marL="73152" marR="73152">
+                    <a:solidFill>
+                      <a:srgbClr val="ECECEC"/>
+                    </a:solidFill>
+                  </a:tcPr>
+                </a:tc>
+                <a:tc>
+                  <a:txBody>
+                    <a:bodyPr/>
+                    <a:lstStyle/>
+                    <a:p>
+                      <a:pPr algn="l"/>
+                      <a:r>
+                        <a:rPr sz="1250" b="0">
+                          <a:solidFill>
+                            <a:srgbClr val="1A1A1A"/>
+                          </a:solidFill>
+                          <a:latin typeface="Calibri"/>
+                        </a:rPr>
+                        <a:t>partikel sensor</a:t>
+                      </a:r>
+                    </a:p>
+                  </a:txBody>
+                  <a:tcPr anchor="ctr" marL="73152" marR="73152">
+                    <a:solidFill>
+                      <a:srgbClr val="ECECEC"/>
+                    </a:solidFill>
+                  </a:tcPr>
+                </a:tc>
+                <a:tc>
+                  <a:txBody>
+                    <a:bodyPr/>
+                    <a:lstStyle/>
+                    <a:p>
+                      <a:pPr algn="r"/>
+                      <a:r>
+                        <a:rPr sz="1250" b="0">
+                          <a:solidFill>
+                            <a:srgbClr val="1A1A1A"/>
+                          </a:solidFill>
+                          <a:latin typeface="Calibri"/>
+                        </a:rPr>
+                        <a:t>-1,168</a:t>
+                      </a:r>
+                    </a:p>
+                  </a:txBody>
+                  <a:tcPr anchor="ctr" marL="73152" marR="73152">
+                    <a:solidFill>
+                      <a:srgbClr val="ECECEC"/>
+                    </a:solidFill>
+                  </a:tcPr>
+                </a:tc>
+              </a:tr>
+              <a:tr h="434340">
+                <a:tc>
+                  <a:txBody>
+                    <a:bodyPr/>
+                    <a:lstStyle/>
+                    <a:p>
+                      <a:pPr algn="l"/>
+                      <a:r>
+                        <a:rPr sz="1250" b="0">
+                          <a:solidFill>
+                            <a:srgbClr val="1A1A1A"/>
+                          </a:solidFill>
+                          <a:latin typeface="Calibri"/>
+                        </a:rPr>
+                        <a:t>8980139111</a:t>
+                      </a:r>
+                    </a:p>
+                  </a:txBody>
+                  <a:tcPr anchor="ctr" marL="73152" marR="73152">
+                    <a:solidFill>
+                      <a:srgbClr val="FFFFFF"/>
+                    </a:solidFill>
+                  </a:tcPr>
+                </a:tc>
+                <a:tc>
+                  <a:txBody>
+                    <a:bodyPr/>
+                    <a:lstStyle/>
+                    <a:p>
+                      <a:pPr algn="l"/>
+                      <a:r>
+                        <a:rPr sz="1250" b="0">
+                          <a:solidFill>
+                            <a:srgbClr val="1A1A1A"/>
+                          </a:solidFill>
+                          <a:latin typeface="Calibri"/>
+                        </a:rPr>
+                        <a:t>VALVE; EGR</a:t>
+                      </a:r>
+                    </a:p>
+                  </a:txBody>
+                  <a:tcPr anchor="ctr" marL="73152" marR="73152">
+                    <a:solidFill>
+                      <a:srgbClr val="FFFFFF"/>
+                    </a:solidFill>
+                  </a:tcPr>
+                </a:tc>
+                <a:tc>
+                  <a:txBody>
+                    <a:bodyPr/>
+                    <a:lstStyle/>
+                    <a:p>
+                      <a:pPr algn="r"/>
+                      <a:r>
+                        <a:rPr sz="1250" b="0">
+                          <a:solidFill>
+                            <a:srgbClr val="1A1A1A"/>
+                          </a:solidFill>
+                          <a:latin typeface="Calibri"/>
+                        </a:rPr>
+                        <a:t>-1,105</a:t>
+                      </a:r>
+                    </a:p>
+                  </a:txBody>
+                  <a:tcPr anchor="ctr" marL="73152" marR="73152">
+                    <a:solidFill>
+                      <a:srgbClr val="FFFFFF"/>
+                    </a:solidFill>
+                  </a:tcPr>
+                </a:tc>
+              </a:tr>
+              <a:tr h="434340">
+                <a:tc>
+                  <a:txBody>
+                    <a:bodyPr/>
+                    <a:lstStyle/>
+                    <a:p>
+                      <a:pPr algn="l"/>
+                      <a:r>
+                        <a:rPr sz="1250" b="0">
+                          <a:solidFill>
+                            <a:srgbClr val="1A1A1A"/>
+                          </a:solidFill>
+                          <a:latin typeface="Calibri"/>
+                        </a:rPr>
+                        <a:t>8974925378</a:t>
+                      </a:r>
+                    </a:p>
+                  </a:txBody>
+                  <a:tcPr anchor="ctr" marL="73152" marR="73152">
+                    <a:solidFill>
+                      <a:srgbClr val="ECECEC"/>
+                    </a:solidFill>
+                  </a:tcPr>
+                </a:tc>
+                <a:tc>
+                  <a:txBody>
+                    <a:bodyPr/>
+                    <a:lstStyle/>
+                    <a:p>
+                      <a:pPr algn="l"/>
+                      <a:r>
+                        <a:rPr sz="1250" b="0">
+                          <a:solidFill>
+                            <a:srgbClr val="1A1A1A"/>
+                          </a:solidFill>
+                          <a:latin typeface="Calibri"/>
+                        </a:rPr>
+                        <a:t>HARNESS; CABLE,ENG ROOM</a:t>
+                      </a:r>
+                    </a:p>
+                  </a:txBody>
+                  <a:tcPr anchor="ctr" marL="73152" marR="73152">
+                    <a:solidFill>
+                      <a:srgbClr val="ECECEC"/>
+                    </a:solidFill>
+                  </a:tcPr>
+                </a:tc>
+                <a:tc>
+                  <a:txBody>
+                    <a:bodyPr/>
+                    <a:lstStyle/>
+                    <a:p>
+                      <a:pPr algn="r"/>
+                      <a:r>
+                        <a:rPr sz="1250" b="0">
+                          <a:solidFill>
+                            <a:srgbClr val="1A1A1A"/>
+                          </a:solidFill>
+                          <a:latin typeface="Calibri"/>
+                        </a:rPr>
+                        <a:t>-894</a:t>
+                      </a:r>
+                    </a:p>
+                  </a:txBody>
+                  <a:tcPr anchor="ctr" marL="73152" marR="73152">
+                    <a:solidFill>
+                      <a:srgbClr val="ECECEC"/>
+                    </a:solidFill>
+                  </a:tcPr>
+                </a:tc>
+              </a:tr>
+              <a:tr h="434340">
+                <a:tc>
+                  <a:txBody>
+                    <a:bodyPr/>
+                    <a:lstStyle/>
+                    <a:p>
+                      <a:pPr algn="l"/>
+                      <a:r>
+                        <a:rPr sz="1250" b="0">
+                          <a:solidFill>
+                            <a:srgbClr val="1A1A1A"/>
+                          </a:solidFill>
+                          <a:latin typeface="Calibri"/>
+                        </a:rPr>
+                        <a:t>8984877702</a:t>
+                      </a:r>
+                    </a:p>
+                  </a:txBody>
+                  <a:tcPr anchor="ctr" marL="73152" marR="73152">
+                    <a:solidFill>
+                      <a:srgbClr val="FFFFFF"/>
+                    </a:solidFill>
+                  </a:tcPr>
+                </a:tc>
+                <a:tc>
+                  <a:txBody>
+                    <a:bodyPr/>
+                    <a:lstStyle/>
+                    <a:p>
+                      <a:pPr algn="l"/>
+                      <a:r>
+                        <a:rPr sz="1250" b="0">
+                          <a:solidFill>
+                            <a:srgbClr val="1A1A1A"/>
+                          </a:solidFill>
+                          <a:latin typeface="Calibri"/>
+                        </a:rPr>
+                        <a:t>DISPLAY; MULTI</a:t>
+                      </a:r>
+                    </a:p>
+                  </a:txBody>
+                  <a:tcPr anchor="ctr" marL="73152" marR="73152">
+                    <a:solidFill>
+                      <a:srgbClr val="FFFFFF"/>
+                    </a:solidFill>
+                  </a:tcPr>
+                </a:tc>
+                <a:tc>
+                  <a:txBody>
+                    <a:bodyPr/>
+                    <a:lstStyle/>
+                    <a:p>
+                      <a:pPr algn="r"/>
+                      <a:r>
+                        <a:rPr sz="1250" b="0">
+                          <a:solidFill>
+                            <a:srgbClr val="1A1A1A"/>
+                          </a:solidFill>
+                          <a:latin typeface="Calibri"/>
+                        </a:rPr>
+                        <a:t>-830</a:t>
+                      </a:r>
+                    </a:p>
+                  </a:txBody>
+                  <a:tcPr anchor="ctr" marL="73152" marR="73152">
+                    <a:solidFill>
+                      <a:srgbClr val="FFFFFF"/>
+                    </a:solidFill>
+                  </a:tcPr>
+                </a:tc>
+              </a:tr>
+              <a:tr h="434340">
+                <a:tc>
+                  <a:txBody>
+                    <a:bodyPr/>
+                    <a:lstStyle/>
+                    <a:p>
+                      <a:pPr algn="l"/>
+                      <a:r>
+                        <a:rPr sz="1250" b="0">
+                          <a:solidFill>
+                            <a:srgbClr val="1A1A1A"/>
+                          </a:solidFill>
+                          <a:latin typeface="Calibri"/>
+                        </a:rPr>
+                        <a:t>8979468160</a:t>
+                      </a:r>
+                    </a:p>
+                  </a:txBody>
+                  <a:tcPr anchor="ctr" marL="73152" marR="73152">
+                    <a:solidFill>
+                      <a:srgbClr val="ECECEC"/>
+                    </a:solidFill>
+                  </a:tcPr>
+                </a:tc>
+                <a:tc>
+                  <a:txBody>
+                    <a:bodyPr/>
+                    <a:lstStyle/>
+                    <a:p>
+                      <a:pPr algn="l"/>
+                      <a:r>
+                        <a:rPr sz="1250" b="0">
+                          <a:solidFill>
+                            <a:srgbClr val="1A1A1A"/>
+                          </a:solidFill>
+                          <a:latin typeface="Calibri"/>
+                        </a:rPr>
+                        <a:t>SPRING ASM; LEAF,RR</a:t>
+                      </a:r>
+                    </a:p>
+                  </a:txBody>
+                  <a:tcPr anchor="ctr" marL="73152" marR="73152">
+                    <a:solidFill>
+                      <a:srgbClr val="ECECEC"/>
+                    </a:solidFill>
+                  </a:tcPr>
+                </a:tc>
+                <a:tc>
+                  <a:txBody>
+                    <a:bodyPr/>
+                    <a:lstStyle/>
+                    <a:p>
+                      <a:pPr algn="r"/>
+                      <a:r>
+                        <a:rPr sz="1250" b="0">
+                          <a:solidFill>
+                            <a:srgbClr val="1A1A1A"/>
+                          </a:solidFill>
+                          <a:latin typeface="Calibri"/>
+                        </a:rPr>
+                        <a:t>-556</a:t>
+                      </a:r>
+                    </a:p>
+                  </a:txBody>
+                  <a:tcPr anchor="ctr" marL="73152" marR="73152">
+                    <a:solidFill>
+                      <a:srgbClr val="ECECEC"/>
+                    </a:solidFill>
+                  </a:tcPr>
+                </a:tc>
+              </a:tr>
+              <a:tr h="434340">
+                <a:tc>
+                  <a:txBody>
+                    <a:bodyPr/>
+                    <a:lstStyle/>
+                    <a:p>
+                      <a:pPr algn="l"/>
+                      <a:r>
+                        <a:rPr sz="1250" b="0">
+                          <a:solidFill>
+                            <a:srgbClr val="1A1A1A"/>
+                          </a:solidFill>
+                          <a:latin typeface="Calibri"/>
+                        </a:rPr>
+                        <a:t>8973873711</a:t>
+                      </a:r>
+                    </a:p>
+                  </a:txBody>
+                  <a:tcPr anchor="ctr" marL="73152" marR="73152">
+                    <a:solidFill>
+                      <a:srgbClr val="FFFFFF"/>
+                    </a:solidFill>
+                  </a:tcPr>
+                </a:tc>
+                <a:tc>
+                  <a:txBody>
+                    <a:bodyPr/>
+                    <a:lstStyle/>
+                    <a:p>
+                      <a:pPr algn="l"/>
+                      <a:r>
+                        <a:rPr sz="1250" b="0">
+                          <a:solidFill>
+                            <a:srgbClr val="1A1A1A"/>
+                          </a:solidFill>
+                          <a:latin typeface="Calibri"/>
+                        </a:rPr>
+                        <a:t>FENDER; FRT</a:t>
+                      </a:r>
+                    </a:p>
+                  </a:txBody>
+                  <a:tcPr anchor="ctr" marL="73152" marR="73152">
+                    <a:solidFill>
+                      <a:srgbClr val="FFFFFF"/>
+                    </a:solidFill>
+                  </a:tcPr>
+                </a:tc>
+                <a:tc>
+                  <a:txBody>
+                    <a:bodyPr/>
+                    <a:lstStyle/>
+                    <a:p>
+                      <a:pPr algn="r"/>
+                      <a:r>
+                        <a:rPr sz="1250" b="0">
+                          <a:solidFill>
+                            <a:srgbClr val="1A1A1A"/>
+                          </a:solidFill>
+                          <a:latin typeface="Calibri"/>
+                        </a:rPr>
+                        <a:t>-503</a:t>
+                      </a:r>
+                    </a:p>
+                  </a:txBody>
+                  <a:tcPr anchor="ctr" marL="73152" marR="73152">
+                    <a:solidFill>
+                      <a:srgbClr val="FFFFFF"/>
+                    </a:solidFill>
+                  </a:tcPr>
+                </a:tc>
+              </a:tr>
+            </a:tbl>
+          </a:graphicData>
+        </a:graphic>
+      </p:graphicFrame>
+      <p:sp>
+        <p:nvSpPr>
+          <p:cNvPr id="9" name="TextBox 8"/>
+          <p:cNvSpPr txBox="1"/>
+          <p:nvPr/>
+        </p:nvSpPr>
+        <p:spPr>
+          <a:xfrm>
+            <a:off x="292608" y="4937760"/>
+            <a:ext cx="11430000" cy="914400"/>
+          </a:xfrm>
+          <a:prstGeom prst="rect">
+            <a:avLst/>
+          </a:prstGeom>
+          <a:noFill/>
+        </p:spPr>
+        <p:txBody>
+          <a:bodyPr wrap="square">
+            <a:spAutoFit/>
+          </a:bodyPr>
+          <a:lstStyle/>
+          <a:p>
+            <a:pPr>
+              <a:lnSpc>
+                <a:spcPct val="125000"/>
+              </a:lnSpc>
+              <a:spcAft>
+                <a:spcPts val="1000"/>
+              </a:spcAft>
+            </a:pPr>
+            <a:r>
+              <a:rPr sz="1300" b="1">
+                <a:solidFill>
+                  <a:srgbClr val="CC0E1E"/>
+                </a:solidFill>
+                <a:latin typeface="Calibri"/>
+              </a:rPr>
+              <a:t>—  </a:t>
+            </a:r>
+            <a:r>
+              <a:rPr sz="1300">
+                <a:solidFill>
+                  <a:srgbClr val="1A1A1A"/>
+                </a:solidFill>
+                <a:latin typeface="Calibri"/>
+              </a:rPr>
+              <a:t>Check warranty / campaign coding before calling competitive leakage.</a:t>
+            </a:r>
+          </a:p>
+        </p:txBody>
+      </p:sp>
+    </p:spTree>
+  </p:cSld>
+  <p:clrMapOvr>
+    <a:masterClrMapping/>
+  </p:clrMapOvr>
+</p:sld>
+</file>
+
+<file path=ppt/slides/slide26.xml><?xml version="1.0" encoding="utf-8"?>
+<p:sld xmlns:a="http://schemas.openxmlformats.org/drawingml/2006/main" xmlns:p="http://schemas.openxmlformats.org/presentationml/2006/main" xmlns:r="http://schemas.openxmlformats.org/officeDocument/2006/relationships">
+  <p:cSld>
+    <p:bg>
+      <p:bgPr>
+        <a:solidFill>
+          <a:srgbClr val="FFFFFF"/>
+        </a:solidFill>
+        <a:effectLst/>
+      </p:bgPr>
+    </p:bg>
+    <p:spTree>
+      <p:nvGrpSpPr>
+        <p:cNvPr id="1" name=""/>
+        <p:cNvGrpSpPr/>
+        <p:nvPr/>
+      </p:nvGrpSpPr>
+      <p:grpSpPr/>
+      <p:pic>
+        <p:nvPicPr>
+          <p:cNvPr id="2" name="Picture 1" descr="image.png"/>
+          <p:cNvPicPr>
+            <a:picLocks noChangeAspect="1"/>
+          </p:cNvPicPr>
+          <p:nvPr/>
+        </p:nvPicPr>
+        <p:blipFill>
+          <a:blip r:embed="rId2"/>
+          <a:stretch>
+            <a:fillRect/>
+          </a:stretch>
+        </p:blipFill>
+        <p:spPr>
+          <a:xfrm>
+            <a:off x="256032" y="6263640"/>
+            <a:ext cx="1679787" cy="292608"/>
+          </a:xfrm>
+          <a:prstGeom prst="rect">
+            <a:avLst/>
+          </a:prstGeom>
+        </p:spPr>
+      </p:pic>
+      <p:sp>
+        <p:nvSpPr>
+          <p:cNvPr id="3" name="Rectangle 2"/>
+          <p:cNvSpPr/>
+          <p:nvPr/>
+        </p:nvSpPr>
+        <p:spPr>
+          <a:xfrm>
+            <a:off x="0" y="6766560"/>
+            <a:ext cx="12188952" cy="91440"/>
+          </a:xfrm>
+          <a:prstGeom prst="rect">
+            <a:avLst/>
+          </a:prstGeom>
+          <a:solidFill>
+            <a:srgbClr val="CC0E1E"/>
+          </a:solidFill>
+          <a:ln>
+            <a:noFill/>
+          </a:ln>
+        </p:spPr>
+        <p:style>
+          <a:lnRef idx="1">
+            <a:schemeClr val="accent1"/>
+          </a:lnRef>
+          <a:fillRef idx="3">
+            <a:schemeClr val="accent1"/>
+          </a:fillRef>
+          <a:effectRef idx="2">
+            <a:schemeClr val="accent1"/>
+          </a:effectRef>
+          <a:fontRef idx="minor">
+            <a:schemeClr val="lt1"/>
+          </a:fontRef>
+        </p:style>
+        <p:txBody>
+          <a:bodyPr rtlCol="0" anchor="ctr"/>
+          <a:lstStyle/>
+          <a:p>
+            <a:pPr algn="ctr"/>
+          </a:p>
+        </p:txBody>
+      </p:sp>
+      <p:sp>
+        <p:nvSpPr>
+          <p:cNvPr id="4" name="TextBox 3"/>
+          <p:cNvSpPr txBox="1"/>
+          <p:nvPr/>
+        </p:nvSpPr>
+        <p:spPr>
+          <a:xfrm>
+            <a:off x="292608" y="201168"/>
+            <a:ext cx="11430000" cy="274320"/>
+          </a:xfrm>
+          <a:prstGeom prst="rect">
+            <a:avLst/>
+          </a:prstGeom>
+          <a:noFill/>
+        </p:spPr>
+        <p:txBody>
+          <a:bodyPr wrap="square">
+            <a:spAutoFit/>
+          </a:bodyPr>
+          <a:lstStyle/>
+          <a:p>
+            <a:pPr algn="l"/>
+            <a:r>
+              <a:rPr sz="1100" b="1">
+                <a:solidFill>
+                  <a:srgbClr val="CC0E1E"/>
+                </a:solidFill>
+                <a:latin typeface="Calibri"/>
+              </a:rPr>
+              <a:t>SERVICE PARTS</a:t>
+            </a:r>
+          </a:p>
+        </p:txBody>
+      </p:sp>
+      <p:sp>
+        <p:nvSpPr>
+          <p:cNvPr id="5" name="TextBox 4"/>
+          <p:cNvSpPr txBox="1"/>
+          <p:nvPr/>
+        </p:nvSpPr>
+        <p:spPr>
+          <a:xfrm>
+            <a:off x="292608" y="475488"/>
+            <a:ext cx="11612880" cy="566928"/>
+          </a:xfrm>
+          <a:prstGeom prst="rect">
+            <a:avLst/>
+          </a:prstGeom>
+          <a:noFill/>
+        </p:spPr>
+        <p:txBody>
+          <a:bodyPr wrap="square">
+            <a:spAutoFit/>
+          </a:bodyPr>
+          <a:lstStyle/>
+          <a:p>
+            <a:pPr algn="l"/>
+            <a:r>
+              <a:rPr sz="2500" b="1">
+                <a:solidFill>
+                  <a:srgbClr val="1A1A1A"/>
+                </a:solidFill>
+                <a:latin typeface="Calibri"/>
+              </a:rPr>
+              <a:t>Service-parts capture vs network (calendar year)</a:t>
+            </a:r>
+          </a:p>
+        </p:txBody>
+      </p:sp>
+      <p:sp>
+        <p:nvSpPr>
+          <p:cNvPr id="6" name="Rectangle 5"/>
+          <p:cNvSpPr/>
+          <p:nvPr/>
+        </p:nvSpPr>
+        <p:spPr>
+          <a:xfrm>
+            <a:off x="292608" y="1005840"/>
+            <a:ext cx="11612880" cy="28000"/>
+          </a:xfrm>
+          <a:prstGeom prst="rect">
+            <a:avLst/>
+          </a:prstGeom>
+          <a:solidFill>
+            <a:srgbClr val="CC0E1E"/>
+          </a:solidFill>
+          <a:ln>
+            <a:noFill/>
+          </a:ln>
+        </p:spPr>
+        <p:style>
+          <a:lnRef idx="1">
+            <a:schemeClr val="accent1"/>
+          </a:lnRef>
+          <a:fillRef idx="3">
+            <a:schemeClr val="accent1"/>
+          </a:fillRef>
+          <a:effectRef idx="2">
+            <a:schemeClr val="accent1"/>
+          </a:effectRef>
+          <a:fontRef idx="minor">
+            <a:schemeClr val="lt1"/>
+          </a:fontRef>
+        </p:style>
+        <p:txBody>
+          <a:bodyPr rtlCol="0" anchor="ctr"/>
+          <a:lstStyle/>
+          <a:p>
+            <a:pPr algn="ctr"/>
+          </a:p>
+        </p:txBody>
+      </p:sp>
+      <p:sp>
+        <p:nvSpPr>
+          <p:cNvPr id="7" name="TextBox 6"/>
+          <p:cNvSpPr txBox="1"/>
+          <p:nvPr/>
+        </p:nvSpPr>
+        <p:spPr>
+          <a:xfrm>
+            <a:off x="11594592" y="6473952"/>
+            <a:ext cx="365760" cy="274320"/>
+          </a:xfrm>
+          <a:prstGeom prst="rect">
+            <a:avLst/>
+          </a:prstGeom>
+          <a:noFill/>
+        </p:spPr>
+        <p:txBody>
+          <a:bodyPr wrap="square">
+            <a:spAutoFit/>
+          </a:bodyPr>
+          <a:lstStyle/>
+          <a:p>
+            <a:pPr algn="r"/>
+            <a:r>
+              <a:rPr sz="1000" b="0">
+                <a:solidFill>
+                  <a:srgbClr val="5A5A5A"/>
+                </a:solidFill>
+                <a:latin typeface="Calibri"/>
+              </a:rPr>
+              <a:t>26</a:t>
+            </a:r>
+          </a:p>
+        </p:txBody>
+      </p:sp>
+      <p:pic>
+        <p:nvPicPr>
+          <p:cNvPr id="8" name="Picture 7" descr="modeb_pms.png"/>
+          <p:cNvPicPr>
+            <a:picLocks noChangeAspect="1"/>
+          </p:cNvPicPr>
+          <p:nvPr/>
+        </p:nvPicPr>
+        <p:blipFill>
+          <a:blip r:embed="rId3"/>
+          <a:stretch>
+            <a:fillRect/>
+          </a:stretch>
+        </p:blipFill>
+        <p:spPr>
+          <a:xfrm>
+            <a:off x="292608" y="2120980"/>
+            <a:ext cx="7178040" cy="3027520"/>
+          </a:xfrm>
+          <a:prstGeom prst="rect">
+            <a:avLst/>
+          </a:prstGeom>
+        </p:spPr>
+      </p:pic>
+      <p:sp>
+        <p:nvSpPr>
+          <p:cNvPr id="9" name="Rectangle 8"/>
+          <p:cNvSpPr/>
+          <p:nvPr/>
+        </p:nvSpPr>
+        <p:spPr>
+          <a:xfrm>
+            <a:off x="7726679" y="1188720"/>
+            <a:ext cx="22000" cy="4892040"/>
+          </a:xfrm>
+          <a:prstGeom prst="rect">
+            <a:avLst/>
+          </a:prstGeom>
+          <a:solidFill>
+            <a:srgbClr val="ECECEC"/>
+          </a:solidFill>
+          <a:ln>
+            <a:noFill/>
+          </a:ln>
+        </p:spPr>
+        <p:style>
+          <a:lnRef idx="1">
+            <a:schemeClr val="accent1"/>
+          </a:lnRef>
+          <a:fillRef idx="3">
+            <a:schemeClr val="accent1"/>
+          </a:fillRef>
+          <a:effectRef idx="2">
+            <a:schemeClr val="accent1"/>
+          </a:effectRef>
+          <a:fontRef idx="minor">
+            <a:schemeClr val="lt1"/>
+          </a:fontRef>
+        </p:style>
+        <p:txBody>
+          <a:bodyPr rtlCol="0" anchor="ctr"/>
+          <a:lstStyle/>
+          <a:p>
+            <a:pPr algn="ctr"/>
+          </a:p>
+        </p:txBody>
+      </p:sp>
+      <p:sp>
+        <p:nvSpPr>
+          <p:cNvPr id="10" name="TextBox 9"/>
+          <p:cNvSpPr txBox="1"/>
+          <p:nvPr/>
+        </p:nvSpPr>
+        <p:spPr>
+          <a:xfrm>
+            <a:off x="7927847" y="1234440"/>
+            <a:ext cx="3886200" cy="320040"/>
+          </a:xfrm>
+          <a:prstGeom prst="rect">
+            <a:avLst/>
+          </a:prstGeom>
+          <a:noFill/>
+        </p:spPr>
+        <p:txBody>
+          <a:bodyPr wrap="square">
+            <a:spAutoFit/>
+          </a:bodyPr>
+          <a:lstStyle/>
+          <a:p>
+            <a:pPr algn="l"/>
+            <a:r>
+              <a:rPr sz="1200" b="1">
+                <a:solidFill>
+                  <a:srgbClr val="CC0E1E"/>
+                </a:solidFill>
+                <a:latin typeface="Calibri"/>
+              </a:rPr>
+              <a:t>TAKEAWAYS</a:t>
+            </a:r>
+          </a:p>
+        </p:txBody>
+      </p:sp>
+      <p:sp>
+        <p:nvSpPr>
+          <p:cNvPr id="11" name="TextBox 10"/>
+          <p:cNvSpPr txBox="1"/>
+          <p:nvPr/>
+        </p:nvSpPr>
+        <p:spPr>
+          <a:xfrm>
+            <a:off x="7927847" y="1691640"/>
+            <a:ext cx="3794760" cy="4343400"/>
+          </a:xfrm>
+          <a:prstGeom prst="rect">
+            <a:avLst/>
+          </a:prstGeom>
+          <a:noFill/>
+        </p:spPr>
+        <p:txBody>
+          <a:bodyPr wrap="square">
+            <a:spAutoFit/>
+          </a:bodyPr>
+          <a:lstStyle/>
+          <a:p>
+            <a:pPr>
+              <a:lnSpc>
+                <a:spcPct val="125000"/>
+              </a:lnSpc>
+              <a:spcAft>
+                <a:spcPts val="1000"/>
+              </a:spcAft>
+            </a:pPr>
+            <a:r>
+              <a:rPr sz="1250" b="1">
+                <a:solidFill>
+                  <a:srgbClr val="CC0E1E"/>
+                </a:solidFill>
+                <a:latin typeface="Calibri"/>
+              </a:rPr>
+              <a:t>—  </a:t>
+            </a:r>
+            <a:r>
+              <a:rPr sz="1250">
+                <a:solidFill>
+                  <a:srgbClr val="1A1A1A"/>
+                </a:solidFill>
+                <a:latin typeface="Calibri"/>
+              </a:rPr>
+              <a:t>Capture % is calendar-year (full CY2025). Fleet demand is modelled on calendar years — there is no matching fiscal-year capture %.</a:t>
+            </a:r>
+          </a:p>
+          <a:p>
+            <a:pPr>
+              <a:lnSpc>
+                <a:spcPct val="125000"/>
+              </a:lnSpc>
+              <a:spcAft>
+                <a:spcPts val="1000"/>
+              </a:spcAft>
+            </a:pPr>
+            <a:r>
+              <a:rPr sz="1250" b="1">
+                <a:solidFill>
+                  <a:srgbClr val="CC0E1E"/>
+                </a:solidFill>
+                <a:latin typeface="Calibri"/>
+              </a:rPr>
+              <a:t>—  </a:t>
+            </a:r>
+            <a:r>
+              <a:rPr sz="1250">
+                <a:solidFill>
+                  <a:srgbClr val="1A1A1A"/>
+                </a:solidFill>
+                <a:latin typeface="Calibri"/>
+              </a:rPr>
+              <a:t>Oil filter 70.7% vs network 60.5%; Fuel filter 23.6% vs network 46.6%; Air filter 70.9% vs network 52.2%.</a:t>
+            </a:r>
+          </a:p>
+          <a:p>
+            <a:pPr>
+              <a:lnSpc>
+                <a:spcPct val="125000"/>
+              </a:lnSpc>
+              <a:spcAft>
+                <a:spcPts val="1000"/>
+              </a:spcAft>
+            </a:pPr>
+            <a:r>
+              <a:rPr sz="1250" b="1">
+                <a:solidFill>
+                  <a:srgbClr val="CC0E1E"/>
+                </a:solidFill>
+                <a:latin typeface="Calibri"/>
+              </a:rPr>
+              <a:t>—  </a:t>
+            </a:r>
+            <a:r>
+              <a:rPr sz="1250">
+                <a:solidFill>
+                  <a:srgbClr val="1A1A1A"/>
+                </a:solidFill>
+                <a:latin typeface="Calibri"/>
+              </a:rPr>
+              <a:t>Next slide: fiscal-year € billing in the same five categories.</a:t>
+            </a:r>
+          </a:p>
+          <a:p>
+            <a:pPr>
+              <a:lnSpc>
+                <a:spcPct val="125000"/>
+              </a:lnSpc>
+              <a:spcAft>
+                <a:spcPts val="1000"/>
+              </a:spcAft>
+            </a:pPr>
+            <a:r>
+              <a:rPr sz="1250" b="1">
+                <a:solidFill>
+                  <a:srgbClr val="CC0E1E"/>
+                </a:solidFill>
+                <a:latin typeface="Calibri"/>
+              </a:rPr>
+              <a:t>—  </a:t>
+            </a:r>
+            <a:r>
+              <a:rPr sz="1250">
+                <a:solidFill>
+                  <a:srgbClr val="1A1A1A"/>
+                </a:solidFill>
+                <a:latin typeface="Calibri"/>
+              </a:rPr>
+              <a:t>Primary lens = total capture (not genuine-only).</a:t>
+            </a:r>
+          </a:p>
+        </p:txBody>
+      </p:sp>
+    </p:spTree>
+  </p:cSld>
+  <p:clrMapOvr>
+    <a:masterClrMapping/>
+  </p:clrMapOvr>
+</p:sld>
+</file>
+
+<file path=ppt/slides/slide27.xml><?xml version="1.0" encoding="utf-8"?>
+<p:sld xmlns:a="http://schemas.openxmlformats.org/drawingml/2006/main" xmlns:p="http://schemas.openxmlformats.org/presentationml/2006/main" xmlns:r="http://schemas.openxmlformats.org/officeDocument/2006/relationships">
+  <p:cSld>
+    <p:bg>
+      <p:bgPr>
+        <a:solidFill>
+          <a:srgbClr val="FFFFFF"/>
+        </a:solidFill>
+        <a:effectLst/>
+      </p:bgPr>
+    </p:bg>
+    <p:spTree>
+      <p:nvGrpSpPr>
+        <p:cNvPr id="1" name=""/>
+        <p:cNvGrpSpPr/>
+        <p:nvPr/>
+      </p:nvGrpSpPr>
+      <p:grpSpPr/>
+      <p:pic>
+        <p:nvPicPr>
+          <p:cNvPr id="2" name="Picture 1" descr="image.png"/>
+          <p:cNvPicPr>
+            <a:picLocks noChangeAspect="1"/>
+          </p:cNvPicPr>
+          <p:nvPr/>
+        </p:nvPicPr>
+        <p:blipFill>
+          <a:blip r:embed="rId2"/>
+          <a:stretch>
+            <a:fillRect/>
+          </a:stretch>
+        </p:blipFill>
+        <p:spPr>
+          <a:xfrm>
+            <a:off x="256032" y="6263640"/>
+            <a:ext cx="1679787" cy="292608"/>
+          </a:xfrm>
+          <a:prstGeom prst="rect">
+            <a:avLst/>
+          </a:prstGeom>
+        </p:spPr>
+      </p:pic>
+      <p:sp>
+        <p:nvSpPr>
+          <p:cNvPr id="3" name="Rectangle 2"/>
+          <p:cNvSpPr/>
+          <p:nvPr/>
+        </p:nvSpPr>
+        <p:spPr>
+          <a:xfrm>
+            <a:off x="0" y="6766560"/>
+            <a:ext cx="12188952" cy="91440"/>
+          </a:xfrm>
+          <a:prstGeom prst="rect">
+            <a:avLst/>
+          </a:prstGeom>
+          <a:solidFill>
+            <a:srgbClr val="CC0E1E"/>
+          </a:solidFill>
+          <a:ln>
+            <a:noFill/>
+          </a:ln>
+        </p:spPr>
+        <p:style>
+          <a:lnRef idx="1">
+            <a:schemeClr val="accent1"/>
+          </a:lnRef>
+          <a:fillRef idx="3">
+            <a:schemeClr val="accent1"/>
+          </a:fillRef>
+          <a:effectRef idx="2">
+            <a:schemeClr val="accent1"/>
+          </a:effectRef>
+          <a:fontRef idx="minor">
+            <a:schemeClr val="lt1"/>
+          </a:fontRef>
+        </p:style>
+        <p:txBody>
+          <a:bodyPr rtlCol="0" anchor="ctr"/>
+          <a:lstStyle/>
+          <a:p>
+            <a:pPr algn="ctr"/>
+          </a:p>
+        </p:txBody>
+      </p:sp>
+      <p:sp>
+        <p:nvSpPr>
+          <p:cNvPr id="4" name="TextBox 3"/>
+          <p:cNvSpPr txBox="1"/>
+          <p:nvPr/>
+        </p:nvSpPr>
+        <p:spPr>
+          <a:xfrm>
+            <a:off x="292608" y="201168"/>
+            <a:ext cx="11430000" cy="274320"/>
+          </a:xfrm>
+          <a:prstGeom prst="rect">
+            <a:avLst/>
+          </a:prstGeom>
+          <a:noFill/>
+        </p:spPr>
+        <p:txBody>
+          <a:bodyPr wrap="square">
+            <a:spAutoFit/>
+          </a:bodyPr>
+          <a:lstStyle/>
+          <a:p>
+            <a:pPr algn="l"/>
+            <a:r>
+              <a:rPr sz="1100" b="1">
+                <a:solidFill>
+                  <a:srgbClr val="CC0E1E"/>
+                </a:solidFill>
+                <a:latin typeface="Calibri"/>
+              </a:rPr>
+              <a:t>SERVICE PARTS · FY</a:t>
+            </a:r>
+          </a:p>
+        </p:txBody>
+      </p:sp>
+      <p:sp>
+        <p:nvSpPr>
+          <p:cNvPr id="5" name="TextBox 4"/>
+          <p:cNvSpPr txBox="1"/>
+          <p:nvPr/>
+        </p:nvSpPr>
+        <p:spPr>
+          <a:xfrm>
+            <a:off x="292608" y="475488"/>
+            <a:ext cx="11612880" cy="566928"/>
+          </a:xfrm>
+          <a:prstGeom prst="rect">
+            <a:avLst/>
+          </a:prstGeom>
+          <a:noFill/>
+        </p:spPr>
+        <p:txBody>
+          <a:bodyPr wrap="square">
+            <a:spAutoFit/>
+          </a:bodyPr>
+          <a:lstStyle/>
+          <a:p>
+            <a:pPr algn="l"/>
+            <a:r>
+              <a:rPr sz="2500" b="1">
+                <a:solidFill>
+                  <a:srgbClr val="1A1A1A"/>
+                </a:solidFill>
+                <a:latin typeface="Calibri"/>
+              </a:rPr>
+              <a:t>Service-parts billing by fiscal year (same five lines)</a:t>
+            </a:r>
+          </a:p>
+        </p:txBody>
+      </p:sp>
+      <p:sp>
+        <p:nvSpPr>
+          <p:cNvPr id="6" name="Rectangle 5"/>
+          <p:cNvSpPr/>
+          <p:nvPr/>
+        </p:nvSpPr>
+        <p:spPr>
+          <a:xfrm>
+            <a:off x="292608" y="1005840"/>
+            <a:ext cx="11612880" cy="28000"/>
+          </a:xfrm>
+          <a:prstGeom prst="rect">
+            <a:avLst/>
+          </a:prstGeom>
+          <a:solidFill>
+            <a:srgbClr val="CC0E1E"/>
+          </a:solidFill>
+          <a:ln>
+            <a:noFill/>
+          </a:ln>
+        </p:spPr>
+        <p:style>
+          <a:lnRef idx="1">
+            <a:schemeClr val="accent1"/>
+          </a:lnRef>
+          <a:fillRef idx="3">
+            <a:schemeClr val="accent1"/>
+          </a:fillRef>
+          <a:effectRef idx="2">
+            <a:schemeClr val="accent1"/>
+          </a:effectRef>
+          <a:fontRef idx="minor">
+            <a:schemeClr val="lt1"/>
+          </a:fontRef>
+        </p:style>
+        <p:txBody>
+          <a:bodyPr rtlCol="0" anchor="ctr"/>
+          <a:lstStyle/>
+          <a:p>
+            <a:pPr algn="ctr"/>
+          </a:p>
+        </p:txBody>
+      </p:sp>
+      <p:sp>
+        <p:nvSpPr>
+          <p:cNvPr id="7" name="TextBox 6"/>
+          <p:cNvSpPr txBox="1"/>
+          <p:nvPr/>
+        </p:nvSpPr>
+        <p:spPr>
+          <a:xfrm>
+            <a:off x="11594592" y="6473952"/>
+            <a:ext cx="365760" cy="274320"/>
+          </a:xfrm>
+          <a:prstGeom prst="rect">
+            <a:avLst/>
+          </a:prstGeom>
+          <a:noFill/>
+        </p:spPr>
+        <p:txBody>
+          <a:bodyPr wrap="square">
+            <a:spAutoFit/>
+          </a:bodyPr>
+          <a:lstStyle/>
+          <a:p>
+            <a:pPr algn="r"/>
+            <a:r>
+              <a:rPr sz="1000" b="0">
+                <a:solidFill>
+                  <a:srgbClr val="5A5A5A"/>
+                </a:solidFill>
+                <a:latin typeface="Calibri"/>
+              </a:rPr>
+              <a:t>27</a:t>
+            </a:r>
+          </a:p>
+        </p:txBody>
+      </p:sp>
+      <p:pic>
+        <p:nvPicPr>
+          <p:cNvPr id="8" name="Picture 7" descr="modeb_pms_fy.png"/>
+          <p:cNvPicPr>
+            <a:picLocks noChangeAspect="1"/>
+          </p:cNvPicPr>
+          <p:nvPr/>
+        </p:nvPicPr>
+        <p:blipFill>
+          <a:blip r:embed="rId3"/>
+          <a:stretch>
+            <a:fillRect/>
+          </a:stretch>
+        </p:blipFill>
+        <p:spPr>
+          <a:xfrm>
+            <a:off x="292608" y="2120980"/>
+            <a:ext cx="7178040" cy="3027520"/>
+          </a:xfrm>
+          <a:prstGeom prst="rect">
+            <a:avLst/>
+          </a:prstGeom>
+        </p:spPr>
+      </p:pic>
+      <p:sp>
+        <p:nvSpPr>
+          <p:cNvPr id="9" name="Rectangle 8"/>
+          <p:cNvSpPr/>
+          <p:nvPr/>
+        </p:nvSpPr>
+        <p:spPr>
+          <a:xfrm>
+            <a:off x="7726679" y="1188720"/>
+            <a:ext cx="22000" cy="4892040"/>
+          </a:xfrm>
+          <a:prstGeom prst="rect">
+            <a:avLst/>
+          </a:prstGeom>
+          <a:solidFill>
+            <a:srgbClr val="ECECEC"/>
+          </a:solidFill>
+          <a:ln>
+            <a:noFill/>
+          </a:ln>
+        </p:spPr>
+        <p:style>
+          <a:lnRef idx="1">
+            <a:schemeClr val="accent1"/>
+          </a:lnRef>
+          <a:fillRef idx="3">
+            <a:schemeClr val="accent1"/>
+          </a:fillRef>
+          <a:effectRef idx="2">
+            <a:schemeClr val="accent1"/>
+          </a:effectRef>
+          <a:fontRef idx="minor">
+            <a:schemeClr val="lt1"/>
+          </a:fontRef>
+        </p:style>
+        <p:txBody>
+          <a:bodyPr rtlCol="0" anchor="ctr"/>
+          <a:lstStyle/>
+          <a:p>
+            <a:pPr algn="ctr"/>
+          </a:p>
+        </p:txBody>
+      </p:sp>
+      <p:sp>
+        <p:nvSpPr>
+          <p:cNvPr id="10" name="TextBox 9"/>
+          <p:cNvSpPr txBox="1"/>
+          <p:nvPr/>
+        </p:nvSpPr>
+        <p:spPr>
+          <a:xfrm>
+            <a:off x="7927847" y="1234440"/>
+            <a:ext cx="3886200" cy="320040"/>
+          </a:xfrm>
+          <a:prstGeom prst="rect">
+            <a:avLst/>
+          </a:prstGeom>
+          <a:noFill/>
+        </p:spPr>
+        <p:txBody>
+          <a:bodyPr wrap="square">
+            <a:spAutoFit/>
+          </a:bodyPr>
+          <a:lstStyle/>
+          <a:p>
+            <a:pPr algn="l"/>
+            <a:r>
+              <a:rPr sz="1200" b="1">
+                <a:solidFill>
+                  <a:srgbClr val="CC0E1E"/>
+                </a:solidFill>
+                <a:latin typeface="Calibri"/>
+              </a:rPr>
+              <a:t>TAKEAWAYS</a:t>
+            </a:r>
+          </a:p>
+        </p:txBody>
+      </p:sp>
+      <p:sp>
+        <p:nvSpPr>
+          <p:cNvPr id="11" name="TextBox 10"/>
+          <p:cNvSpPr txBox="1"/>
+          <p:nvPr/>
+        </p:nvSpPr>
+        <p:spPr>
+          <a:xfrm>
+            <a:off x="7927847" y="1691640"/>
+            <a:ext cx="3794760" cy="4343400"/>
+          </a:xfrm>
+          <a:prstGeom prst="rect">
+            <a:avLst/>
+          </a:prstGeom>
+          <a:noFill/>
+        </p:spPr>
+        <p:txBody>
+          <a:bodyPr wrap="square">
+            <a:spAutoFit/>
+          </a:bodyPr>
+          <a:lstStyle/>
+          <a:p>
+            <a:pPr>
+              <a:lnSpc>
+                <a:spcPct val="125000"/>
+              </a:lnSpc>
+              <a:spcAft>
+                <a:spcPts val="1000"/>
+              </a:spcAft>
+            </a:pPr>
+            <a:r>
+              <a:rPr sz="1250" b="1">
+                <a:solidFill>
+                  <a:srgbClr val="CC0E1E"/>
+                </a:solidFill>
+                <a:latin typeface="Calibri"/>
+              </a:rPr>
+              <a:t>—  </a:t>
+            </a:r>
+            <a:r>
+              <a:rPr sz="1250">
+                <a:solidFill>
+                  <a:srgbClr val="1A1A1A"/>
+                </a:solidFill>
+                <a:latin typeface="Calibri"/>
+              </a:rPr>
+              <a:t>This is Sales-to-BL ehf. € in fiscal years — not capture % of fleet demand.</a:t>
+            </a:r>
+          </a:p>
+          <a:p>
+            <a:pPr>
+              <a:lnSpc>
+                <a:spcPct val="125000"/>
+              </a:lnSpc>
+              <a:spcAft>
+                <a:spcPts val="1000"/>
+              </a:spcAft>
+            </a:pPr>
+            <a:r>
+              <a:rPr sz="1250" b="1">
+                <a:solidFill>
+                  <a:srgbClr val="CC0E1E"/>
+                </a:solidFill>
+                <a:latin typeface="Calibri"/>
+              </a:rPr>
+              <a:t>—  </a:t>
+            </a:r>
+            <a:r>
+              <a:rPr sz="1250">
+                <a:solidFill>
+                  <a:srgbClr val="1A1A1A"/>
+                </a:solidFill>
+                <a:latin typeface="Calibri"/>
+              </a:rPr>
+              <a:t>Use both lenses — do not mix % capture with € billing.</a:t>
+            </a:r>
+          </a:p>
+          <a:p>
+            <a:pPr>
+              <a:lnSpc>
+                <a:spcPct val="125000"/>
+              </a:lnSpc>
+              <a:spcAft>
+                <a:spcPts val="1000"/>
+              </a:spcAft>
+            </a:pPr>
+            <a:r>
+              <a:rPr sz="1250" b="1">
+                <a:solidFill>
+                  <a:srgbClr val="CC0E1E"/>
+                </a:solidFill>
+                <a:latin typeface="Calibri"/>
+              </a:rPr>
+              <a:t>—  </a:t>
+            </a:r>
+            <a:r>
+              <a:rPr sz="1250">
+                <a:solidFill>
+                  <a:srgbClr val="1A1A1A"/>
+                </a:solidFill>
+                <a:latin typeface="Calibri"/>
+              </a:rPr>
+              <a:t>Primary = total sales in the basket.</a:t>
+            </a:r>
+          </a:p>
+        </p:txBody>
+      </p:sp>
+    </p:spTree>
+  </p:cSld>
+  <p:clrMapOvr>
+    <a:masterClrMapping/>
+  </p:clrMapOvr>
+</p:sld>
+</file>
+
+<file path=ppt/slides/slide28.xml><?xml version="1.0" encoding="utf-8"?>
+<p:sld xmlns:a="http://schemas.openxmlformats.org/drawingml/2006/main" xmlns:p="http://schemas.openxmlformats.org/presentationml/2006/main" xmlns:r="http://schemas.openxmlformats.org/officeDocument/2006/relationships">
+  <p:cSld>
+    <p:bg>
+      <p:bgPr>
+        <a:solidFill>
+          <a:srgbClr val="FFFFFF"/>
+        </a:solidFill>
+        <a:effectLst/>
+      </p:bgPr>
+    </p:bg>
+    <p:spTree>
+      <p:nvGrpSpPr>
+        <p:cNvPr id="1" name=""/>
+        <p:cNvGrpSpPr/>
+        <p:nvPr/>
+      </p:nvGrpSpPr>
+      <p:grpSpPr/>
+      <p:pic>
+        <p:nvPicPr>
+          <p:cNvPr id="2" name="Picture 1" descr="image.png"/>
+          <p:cNvPicPr>
+            <a:picLocks noChangeAspect="1"/>
+          </p:cNvPicPr>
+          <p:nvPr/>
+        </p:nvPicPr>
+        <p:blipFill>
+          <a:blip r:embed="rId2"/>
+          <a:stretch>
+            <a:fillRect/>
+          </a:stretch>
+        </p:blipFill>
+        <p:spPr>
+          <a:xfrm>
+            <a:off x="256032" y="6263640"/>
+            <a:ext cx="1679787" cy="292608"/>
+          </a:xfrm>
+          <a:prstGeom prst="rect">
+            <a:avLst/>
+          </a:prstGeom>
+        </p:spPr>
+      </p:pic>
+      <p:sp>
+        <p:nvSpPr>
+          <p:cNvPr id="3" name="Rectangle 2"/>
+          <p:cNvSpPr/>
+          <p:nvPr/>
+        </p:nvSpPr>
+        <p:spPr>
+          <a:xfrm>
+            <a:off x="0" y="6766560"/>
+            <a:ext cx="12188952" cy="91440"/>
+          </a:xfrm>
+          <a:prstGeom prst="rect">
+            <a:avLst/>
+          </a:prstGeom>
+          <a:solidFill>
+            <a:srgbClr val="CC0E1E"/>
+          </a:solidFill>
+          <a:ln>
+            <a:noFill/>
+          </a:ln>
+        </p:spPr>
+        <p:style>
+          <a:lnRef idx="1">
+            <a:schemeClr val="accent1"/>
+          </a:lnRef>
+          <a:fillRef idx="3">
+            <a:schemeClr val="accent1"/>
+          </a:fillRef>
+          <a:effectRef idx="2">
+            <a:schemeClr val="accent1"/>
+          </a:effectRef>
+          <a:fontRef idx="minor">
+            <a:schemeClr val="lt1"/>
+          </a:fontRef>
+        </p:style>
+        <p:txBody>
+          <a:bodyPr rtlCol="0" anchor="ctr"/>
+          <a:lstStyle/>
+          <a:p>
+            <a:pPr algn="ctr"/>
+          </a:p>
+        </p:txBody>
+      </p:sp>
+      <p:sp>
+        <p:nvSpPr>
+          <p:cNvPr id="4" name="TextBox 3"/>
+          <p:cNvSpPr txBox="1"/>
+          <p:nvPr/>
+        </p:nvSpPr>
+        <p:spPr>
+          <a:xfrm>
+            <a:off x="292608" y="201168"/>
+            <a:ext cx="11430000" cy="274320"/>
+          </a:xfrm>
+          <a:prstGeom prst="rect">
+            <a:avLst/>
+          </a:prstGeom>
+          <a:noFill/>
+        </p:spPr>
+        <p:txBody>
+          <a:bodyPr wrap="square">
+            <a:spAutoFit/>
+          </a:bodyPr>
+          <a:lstStyle/>
+          <a:p>
+            <a:pPr algn="l"/>
+            <a:r>
+              <a:rPr sz="1100" b="1">
+                <a:solidFill>
+                  <a:srgbClr val="CC0E1E"/>
+                </a:solidFill>
+                <a:latin typeface="Calibri"/>
+              </a:rPr>
+              <a:t>BRAKES</a:t>
+            </a:r>
+          </a:p>
+        </p:txBody>
+      </p:sp>
+      <p:sp>
+        <p:nvSpPr>
+          <p:cNvPr id="5" name="TextBox 4"/>
+          <p:cNvSpPr txBox="1"/>
+          <p:nvPr/>
+        </p:nvSpPr>
+        <p:spPr>
+          <a:xfrm>
+            <a:off x="292608" y="475488"/>
+            <a:ext cx="11612880" cy="566928"/>
+          </a:xfrm>
+          <a:prstGeom prst="rect">
+            <a:avLst/>
+          </a:prstGeom>
+          <a:noFill/>
+        </p:spPr>
+        <p:txBody>
+          <a:bodyPr wrap="square">
+            <a:spAutoFit/>
+          </a:bodyPr>
+          <a:lstStyle/>
+          <a:p>
+            <a:pPr algn="l"/>
+            <a:r>
+              <a:rPr sz="2500" b="1">
+                <a:solidFill>
+                  <a:srgbClr val="1A1A1A"/>
+                </a:solidFill>
+                <a:latin typeface="Calibri"/>
+              </a:rPr>
+              <a:t>Brake pads — BVP share of total brake pad sales (FY)</a:t>
+            </a:r>
+          </a:p>
+        </p:txBody>
+      </p:sp>
+      <p:sp>
+        <p:nvSpPr>
+          <p:cNvPr id="6" name="Rectangle 5"/>
+          <p:cNvSpPr/>
+          <p:nvPr/>
+        </p:nvSpPr>
+        <p:spPr>
+          <a:xfrm>
+            <a:off x="292608" y="1005840"/>
+            <a:ext cx="11612880" cy="28000"/>
+          </a:xfrm>
+          <a:prstGeom prst="rect">
+            <a:avLst/>
+          </a:prstGeom>
+          <a:solidFill>
+            <a:srgbClr val="CC0E1E"/>
+          </a:solidFill>
+          <a:ln>
+            <a:noFill/>
+          </a:ln>
+        </p:spPr>
+        <p:style>
+          <a:lnRef idx="1">
+            <a:schemeClr val="accent1"/>
+          </a:lnRef>
+          <a:fillRef idx="3">
+            <a:schemeClr val="accent1"/>
+          </a:fillRef>
+          <a:effectRef idx="2">
+            <a:schemeClr val="accent1"/>
+          </a:effectRef>
+          <a:fontRef idx="minor">
+            <a:schemeClr val="lt1"/>
+          </a:fontRef>
+        </p:style>
+        <p:txBody>
+          <a:bodyPr rtlCol="0" anchor="ctr"/>
+          <a:lstStyle/>
+          <a:p>
+            <a:pPr algn="ctr"/>
+          </a:p>
+        </p:txBody>
+      </p:sp>
+      <p:sp>
+        <p:nvSpPr>
+          <p:cNvPr id="7" name="TextBox 6"/>
+          <p:cNvSpPr txBox="1"/>
+          <p:nvPr/>
+        </p:nvSpPr>
+        <p:spPr>
+          <a:xfrm>
+            <a:off x="11594592" y="6473952"/>
+            <a:ext cx="365760" cy="274320"/>
+          </a:xfrm>
+          <a:prstGeom prst="rect">
+            <a:avLst/>
+          </a:prstGeom>
+          <a:noFill/>
+        </p:spPr>
+        <p:txBody>
+          <a:bodyPr wrap="square">
+            <a:spAutoFit/>
+          </a:bodyPr>
+          <a:lstStyle/>
+          <a:p>
+            <a:pPr algn="r"/>
+            <a:r>
+              <a:rPr sz="1000" b="0">
+                <a:solidFill>
+                  <a:srgbClr val="5A5A5A"/>
+                </a:solidFill>
+                <a:latin typeface="Calibri"/>
+              </a:rPr>
+              <a:t>28</a:t>
+            </a:r>
+          </a:p>
+        </p:txBody>
+      </p:sp>
+      <p:graphicFrame>
+        <p:nvGraphicFramePr>
+          <p:cNvPr id="8" name="Table 7"/>
+          <p:cNvGraphicFramePr>
+            <a:graphicFrameLocks noGrp="1"/>
+          </p:cNvGraphicFramePr>
+          <p:nvPr/>
+        </p:nvGraphicFramePr>
+        <p:xfrm>
+          <a:off x="292608" y="1280160"/>
+          <a:ext cx="6583680" cy="2194560"/>
+        </p:xfrm>
+        <a:graphic>
+          <a:graphicData uri="http://schemas.openxmlformats.org/drawingml/2006/table">
+            <a:tbl>
+              <a:tblPr firstRow="1" bandRow="1">
+                <a:tableStyleId>{5C22544A-7EE6-4342-B048-85BDC9FD1C3A}</a:tableStyleId>
+              </a:tblPr>
+              <a:tblGrid>
+                <a:gridCol w="3291840"/>
+                <a:gridCol w="1645920"/>
+                <a:gridCol w="1645920"/>
+              </a:tblGrid>
+              <a:tr h="548640">
+                <a:tc>
+                  <a:txBody>
+                    <a:bodyPr/>
+                    <a:lstStyle/>
+                    <a:p>
+                      <a:pPr algn="l"/>
+                      <a:r>
+                        <a:rPr sz="1300" b="1">
+                          <a:solidFill>
+                            <a:srgbClr val="FFFFFF"/>
+                          </a:solidFill>
+                          <a:latin typeface="Calibri"/>
+                        </a:rPr>
+                        <a:t> </a:t>
+                      </a:r>
+                    </a:p>
+                  </a:txBody>
+                  <a:tcPr anchor="ctr" marL="73152" marR="73152">
+                    <a:solidFill>
+                      <a:srgbClr val="CC0E1E"/>
+                    </a:solidFill>
+                  </a:tcPr>
+                </a:tc>
+                <a:tc>
+                  <a:txBody>
+                    <a:bodyPr/>
+                    <a:lstStyle/>
+                    <a:p>
+                      <a:pPr algn="r"/>
+                      <a:r>
+                        <a:rPr sz="1300" b="1">
+                          <a:solidFill>
+                            <a:srgbClr val="FFFFFF"/>
+                          </a:solidFill>
+                          <a:latin typeface="Calibri"/>
+                        </a:rPr>
+                        <a:t>FY2025</a:t>
+                      </a:r>
+                    </a:p>
+                  </a:txBody>
+                  <a:tcPr anchor="ctr" marL="73152" marR="73152">
+                    <a:solidFill>
+                      <a:srgbClr val="CC0E1E"/>
+                    </a:solidFill>
+                  </a:tcPr>
+                </a:tc>
+                <a:tc>
+                  <a:txBody>
+                    <a:bodyPr/>
+                    <a:lstStyle/>
+                    <a:p>
+                      <a:pPr algn="r"/>
+                      <a:r>
+                        <a:rPr sz="1300" b="1">
+                          <a:solidFill>
+                            <a:srgbClr val="FFFFFF"/>
+                          </a:solidFill>
+                          <a:latin typeface="Calibri"/>
+                        </a:rPr>
+                        <a:t>FY2026</a:t>
+                      </a:r>
+                    </a:p>
+                  </a:txBody>
+                  <a:tcPr anchor="ctr" marL="73152" marR="73152">
+                    <a:solidFill>
+                      <a:srgbClr val="CC0E1E"/>
+                    </a:solidFill>
+                  </a:tcPr>
+                </a:tc>
+              </a:tr>
+              <a:tr h="548640">
+                <a:tc>
+                  <a:txBody>
+                    <a:bodyPr/>
+                    <a:lstStyle/>
+                    <a:p>
+                      <a:pPr algn="l"/>
+                      <a:r>
+                        <a:rPr sz="1300" b="0">
+                          <a:solidFill>
+                            <a:srgbClr val="1A1A1A"/>
+                          </a:solidFill>
+                          <a:latin typeface="Calibri"/>
+                        </a:rPr>
+                        <a:t>Genuine qty</a:t>
+                      </a:r>
+                    </a:p>
+                  </a:txBody>
+                  <a:tcPr anchor="ctr" marL="73152" marR="73152">
+                    <a:solidFill>
+                      <a:srgbClr val="FFFFFF"/>
+                    </a:solidFill>
+                  </a:tcPr>
+                </a:tc>
+                <a:tc>
+                  <a:txBody>
+                    <a:bodyPr/>
+                    <a:lstStyle/>
+                    <a:p>
+                      <a:pPr algn="r"/>
+                      <a:r>
+                        <a:rPr sz="1300" b="0">
+                          <a:solidFill>
+                            <a:srgbClr val="1A1A1A"/>
+                          </a:solidFill>
+                          <a:latin typeface="Calibri"/>
+                        </a:rPr>
+                        <a:t>0</a:t>
+                      </a:r>
+                    </a:p>
+                  </a:txBody>
+                  <a:tcPr anchor="ctr" marL="73152" marR="73152">
+                    <a:solidFill>
+                      <a:srgbClr val="FFFFFF"/>
+                    </a:solidFill>
+                  </a:tcPr>
+                </a:tc>
+                <a:tc>
+                  <a:txBody>
+                    <a:bodyPr/>
+                    <a:lstStyle/>
+                    <a:p>
+                      <a:pPr algn="r"/>
+                      <a:r>
+                        <a:rPr sz="1300" b="0">
+                          <a:solidFill>
+                            <a:srgbClr val="1A1A1A"/>
+                          </a:solidFill>
+                          <a:latin typeface="Calibri"/>
+                        </a:rPr>
+                        <a:t>0</a:t>
+                      </a:r>
+                    </a:p>
+                  </a:txBody>
+                  <a:tcPr anchor="ctr" marL="73152" marR="73152">
+                    <a:solidFill>
+                      <a:srgbClr val="FFFFFF"/>
+                    </a:solidFill>
+                  </a:tcPr>
+                </a:tc>
+              </a:tr>
+              <a:tr h="548640">
+                <a:tc>
+                  <a:txBody>
+                    <a:bodyPr/>
+                    <a:lstStyle/>
+                    <a:p>
+                      <a:pPr algn="l"/>
+                      <a:r>
+                        <a:rPr sz="1300" b="0">
+                          <a:solidFill>
+                            <a:srgbClr val="1A1A1A"/>
+                          </a:solidFill>
+                          <a:latin typeface="Calibri"/>
+                        </a:rPr>
+                        <a:t>BVP qty</a:t>
+                      </a:r>
+                    </a:p>
+                  </a:txBody>
+                  <a:tcPr anchor="ctr" marL="73152" marR="73152">
+                    <a:solidFill>
+                      <a:srgbClr val="ECECEC"/>
+                    </a:solidFill>
+                  </a:tcPr>
+                </a:tc>
+                <a:tc>
+                  <a:txBody>
+                    <a:bodyPr/>
+                    <a:lstStyle/>
+                    <a:p>
+                      <a:pPr algn="r"/>
+                      <a:r>
+                        <a:rPr sz="1300" b="0">
+                          <a:solidFill>
+                            <a:srgbClr val="1A1A1A"/>
+                          </a:solidFill>
+                          <a:latin typeface="Calibri"/>
+                        </a:rPr>
+                        <a:t>0</a:t>
+                      </a:r>
+                    </a:p>
+                  </a:txBody>
+                  <a:tcPr anchor="ctr" marL="73152" marR="73152">
+                    <a:solidFill>
+                      <a:srgbClr val="ECECEC"/>
+                    </a:solidFill>
+                  </a:tcPr>
+                </a:tc>
+                <a:tc>
+                  <a:txBody>
+                    <a:bodyPr/>
+                    <a:lstStyle/>
+                    <a:p>
+                      <a:pPr algn="r"/>
+                      <a:r>
+                        <a:rPr sz="1300" b="0">
+                          <a:solidFill>
+                            <a:srgbClr val="1A1A1A"/>
+                          </a:solidFill>
+                          <a:latin typeface="Calibri"/>
+                        </a:rPr>
+                        <a:t>0</a:t>
+                      </a:r>
+                    </a:p>
+                  </a:txBody>
+                  <a:tcPr anchor="ctr" marL="73152" marR="73152">
+                    <a:solidFill>
+                      <a:srgbClr val="ECECEC"/>
+                    </a:solidFill>
+                  </a:tcPr>
+                </a:tc>
+              </a:tr>
+              <a:tr h="548640">
+                <a:tc>
+                  <a:txBody>
+                    <a:bodyPr/>
+                    <a:lstStyle/>
+                    <a:p>
+                      <a:pPr algn="l"/>
+                      <a:r>
+                        <a:rPr sz="1300" b="0">
+                          <a:solidFill>
+                            <a:srgbClr val="1A1A1A"/>
+                          </a:solidFill>
+                          <a:latin typeface="Calibri"/>
+                        </a:rPr>
+                        <a:t>BVP share of total brake pad sales (€)</a:t>
+                      </a:r>
+                    </a:p>
+                  </a:txBody>
+                  <a:tcPr anchor="ctr" marL="73152" marR="73152">
+                    <a:solidFill>
+                      <a:srgbClr val="FFFFFF"/>
+                    </a:solidFill>
+                  </a:tcPr>
+                </a:tc>
+                <a:tc>
+                  <a:txBody>
+                    <a:bodyPr/>
+                    <a:lstStyle/>
+                    <a:p>
+                      <a:pPr algn="r"/>
+                      <a:r>
+                        <a:rPr sz="1300" b="0">
+                          <a:solidFill>
+                            <a:srgbClr val="1A1A1A"/>
+                          </a:solidFill>
+                          <a:latin typeface="Calibri"/>
+                        </a:rPr>
+                        <a:t>0%</a:t>
+                      </a:r>
+                    </a:p>
+                  </a:txBody>
+                  <a:tcPr anchor="ctr" marL="73152" marR="73152">
+                    <a:solidFill>
+                      <a:srgbClr val="FFFFFF"/>
+                    </a:solidFill>
+                  </a:tcPr>
+                </a:tc>
+                <a:tc>
+                  <a:txBody>
+                    <a:bodyPr/>
+                    <a:lstStyle/>
+                    <a:p>
+                      <a:pPr algn="r"/>
+                      <a:r>
+                        <a:rPr sz="1300" b="0">
+                          <a:solidFill>
+                            <a:srgbClr val="1A1A1A"/>
+                          </a:solidFill>
+                          <a:latin typeface="Calibri"/>
+                        </a:rPr>
+                        <a:t>0%</a:t>
+                      </a:r>
+                    </a:p>
+                  </a:txBody>
+                  <a:tcPr anchor="ctr" marL="73152" marR="73152">
+                    <a:solidFill>
+                      <a:srgbClr val="FFFFFF"/>
+                    </a:solidFill>
+                  </a:tcPr>
+                </a:tc>
+              </a:tr>
+            </a:tbl>
+          </a:graphicData>
+        </a:graphic>
+      </p:graphicFrame>
+      <p:sp>
+        <p:nvSpPr>
+          <p:cNvPr id="9" name="TextBox 8"/>
+          <p:cNvSpPr txBox="1"/>
+          <p:nvPr/>
+        </p:nvSpPr>
+        <p:spPr>
+          <a:xfrm>
+            <a:off x="7040880" y="1188720"/>
+            <a:ext cx="4663440" cy="4114800"/>
+          </a:xfrm>
+          <a:prstGeom prst="rect">
+            <a:avLst/>
+          </a:prstGeom>
+          <a:noFill/>
+        </p:spPr>
+        <p:txBody>
+          <a:bodyPr wrap="square">
+            <a:spAutoFit/>
+          </a:bodyPr>
+          <a:lstStyle/>
+          <a:p>
+            <a:pPr>
+              <a:lnSpc>
+                <a:spcPct val="125000"/>
+              </a:lnSpc>
+              <a:spcAft>
+                <a:spcPts val="1000"/>
+              </a:spcAft>
+            </a:pPr>
+            <a:r>
+              <a:rPr sz="1300" b="1">
+                <a:solidFill>
+                  <a:srgbClr val="CC0E1E"/>
+                </a:solidFill>
+                <a:latin typeface="Calibri"/>
+              </a:rPr>
+              <a:t>—  </a:t>
+            </a:r>
+            <a:r>
+              <a:rPr sz="1300">
+                <a:solidFill>
+                  <a:srgbClr val="1A1A1A"/>
+                </a:solidFill>
+                <a:latin typeface="Calibri"/>
+              </a:rPr>
+              <a:t>BVP share = BVP € ÷ all brake-pad € billed (genuine + BVP). Not a PMS capture %.</a:t>
+            </a:r>
+          </a:p>
+          <a:p>
+            <a:pPr>
+              <a:lnSpc>
+                <a:spcPct val="125000"/>
+              </a:lnSpc>
+              <a:spcAft>
+                <a:spcPts val="1000"/>
+              </a:spcAft>
+            </a:pPr>
+            <a:r>
+              <a:rPr sz="1300" b="1">
+                <a:solidFill>
+                  <a:srgbClr val="CC0E1E"/>
+                </a:solidFill>
+                <a:latin typeface="Calibri"/>
+              </a:rPr>
+              <a:t>—  </a:t>
+            </a:r>
+            <a:r>
+              <a:rPr sz="1300">
+                <a:solidFill>
+                  <a:srgbClr val="1A1A1A"/>
+                </a:solidFill>
+                <a:latin typeface="Calibri"/>
+              </a:rPr>
+              <a:t>Wallet-level BVP is still only ~0.0% of FY26 — do not generalise a pad story to the whole wallet.</a:t>
+            </a:r>
+          </a:p>
+        </p:txBody>
+      </p:sp>
+    </p:spTree>
+  </p:cSld>
+  <p:clrMapOvr>
+    <a:masterClrMapping/>
+  </p:clrMapOvr>
+</p:sld>
+</file>
+
+<file path=ppt/slides/slide29.xml><?xml version="1.0" encoding="utf-8"?>
+<p:sld xmlns:a="http://schemas.openxmlformats.org/drawingml/2006/main" xmlns:p="http://schemas.openxmlformats.org/presentationml/2006/main" xmlns:r="http://schemas.openxmlformats.org/officeDocument/2006/relationships">
+  <p:cSld>
+    <p:bg>
+      <p:bgPr>
+        <a:solidFill>
+          <a:srgbClr val="FFFFFF"/>
+        </a:solidFill>
+        <a:effectLst/>
+      </p:bgPr>
+    </p:bg>
+    <p:spTree>
+      <p:nvGrpSpPr>
+        <p:cNvPr id="1" name=""/>
+        <p:cNvGrpSpPr/>
+        <p:nvPr/>
+      </p:nvGrpSpPr>
+      <p:grpSpPr/>
+      <p:pic>
+        <p:nvPicPr>
+          <p:cNvPr id="2" name="Picture 1" descr="image.png"/>
+          <p:cNvPicPr>
+            <a:picLocks noChangeAspect="1"/>
+          </p:cNvPicPr>
+          <p:nvPr/>
+        </p:nvPicPr>
+        <p:blipFill>
+          <a:blip r:embed="rId2"/>
+          <a:stretch>
+            <a:fillRect/>
+          </a:stretch>
+        </p:blipFill>
+        <p:spPr>
+          <a:xfrm>
+            <a:off x="256032" y="6263640"/>
+            <a:ext cx="1679787" cy="292608"/>
+          </a:xfrm>
+          <a:prstGeom prst="rect">
+            <a:avLst/>
+          </a:prstGeom>
+        </p:spPr>
+      </p:pic>
+      <p:sp>
+        <p:nvSpPr>
+          <p:cNvPr id="3" name="Rectangle 2"/>
+          <p:cNvSpPr/>
+          <p:nvPr/>
+        </p:nvSpPr>
+        <p:spPr>
+          <a:xfrm>
+            <a:off x="0" y="6766560"/>
+            <a:ext cx="12188952" cy="91440"/>
+          </a:xfrm>
+          <a:prstGeom prst="rect">
+            <a:avLst/>
+          </a:prstGeom>
+          <a:solidFill>
+            <a:srgbClr val="CC0E1E"/>
+          </a:solidFill>
+          <a:ln>
+            <a:noFill/>
+          </a:ln>
+        </p:spPr>
+        <p:style>
+          <a:lnRef idx="1">
+            <a:schemeClr val="accent1"/>
+          </a:lnRef>
+          <a:fillRef idx="3">
+            <a:schemeClr val="accent1"/>
+          </a:fillRef>
+          <a:effectRef idx="2">
+            <a:schemeClr val="accent1"/>
+          </a:effectRef>
+          <a:fontRef idx="minor">
+            <a:schemeClr val="lt1"/>
+          </a:fontRef>
+        </p:style>
+        <p:txBody>
+          <a:bodyPr rtlCol="0" anchor="ctr"/>
+          <a:lstStyle/>
+          <a:p>
+            <a:pPr algn="ctr"/>
+          </a:p>
+        </p:txBody>
+      </p:sp>
+      <p:sp>
+        <p:nvSpPr>
+          <p:cNvPr id="4" name="TextBox 3"/>
+          <p:cNvSpPr txBox="1"/>
+          <p:nvPr/>
+        </p:nvSpPr>
+        <p:spPr>
+          <a:xfrm>
+            <a:off x="292608" y="201168"/>
+            <a:ext cx="11430000" cy="274320"/>
+          </a:xfrm>
+          <a:prstGeom prst="rect">
+            <a:avLst/>
+          </a:prstGeom>
+          <a:noFill/>
+        </p:spPr>
+        <p:txBody>
+          <a:bodyPr wrap="square">
+            <a:spAutoFit/>
+          </a:bodyPr>
+          <a:lstStyle/>
+          <a:p>
+            <a:pPr algn="l"/>
+            <a:r>
+              <a:rPr sz="1100" b="1">
+                <a:solidFill>
+                  <a:srgbClr val="CC0E1E"/>
+                </a:solidFill>
+                <a:latin typeface="Calibri"/>
+              </a:rPr>
+              <a:t>AIM</a:t>
+            </a:r>
+          </a:p>
+        </p:txBody>
+      </p:sp>
+      <p:sp>
+        <p:nvSpPr>
+          <p:cNvPr id="5" name="TextBox 4"/>
+          <p:cNvSpPr txBox="1"/>
+          <p:nvPr/>
+        </p:nvSpPr>
+        <p:spPr>
+          <a:xfrm>
+            <a:off x="292608" y="475488"/>
+            <a:ext cx="11612880" cy="566928"/>
+          </a:xfrm>
+          <a:prstGeom prst="rect">
+            <a:avLst/>
+          </a:prstGeom>
+          <a:noFill/>
+        </p:spPr>
+        <p:txBody>
+          <a:bodyPr wrap="square">
+            <a:spAutoFit/>
+          </a:bodyPr>
+          <a:lstStyle/>
+          <a:p>
+            <a:pPr algn="l"/>
+            <a:r>
+              <a:rPr sz="2500" b="1">
+                <a:solidFill>
+                  <a:srgbClr val="1A1A1A"/>
+                </a:solidFill>
+                <a:latin typeface="Calibri"/>
+              </a:rPr>
+              <a:t>AIM exposure</a:t>
+            </a:r>
+          </a:p>
+        </p:txBody>
+      </p:sp>
+      <p:sp>
+        <p:nvSpPr>
+          <p:cNvPr id="6" name="Rectangle 5"/>
+          <p:cNvSpPr/>
+          <p:nvPr/>
+        </p:nvSpPr>
+        <p:spPr>
+          <a:xfrm>
+            <a:off x="292608" y="1005840"/>
+            <a:ext cx="11612880" cy="28000"/>
+          </a:xfrm>
+          <a:prstGeom prst="rect">
+            <a:avLst/>
+          </a:prstGeom>
+          <a:solidFill>
+            <a:srgbClr val="CC0E1E"/>
+          </a:solidFill>
+          <a:ln>
+            <a:noFill/>
+          </a:ln>
+        </p:spPr>
+        <p:style>
+          <a:lnRef idx="1">
+            <a:schemeClr val="accent1"/>
+          </a:lnRef>
+          <a:fillRef idx="3">
+            <a:schemeClr val="accent1"/>
+          </a:fillRef>
+          <a:effectRef idx="2">
+            <a:schemeClr val="accent1"/>
+          </a:effectRef>
+          <a:fontRef idx="minor">
+            <a:schemeClr val="lt1"/>
+          </a:fontRef>
+        </p:style>
+        <p:txBody>
+          <a:bodyPr rtlCol="0" anchor="ctr"/>
+          <a:lstStyle/>
+          <a:p>
+            <a:pPr algn="ctr"/>
+          </a:p>
+        </p:txBody>
+      </p:sp>
+      <p:sp>
+        <p:nvSpPr>
+          <p:cNvPr id="7" name="TextBox 6"/>
+          <p:cNvSpPr txBox="1"/>
+          <p:nvPr/>
+        </p:nvSpPr>
+        <p:spPr>
+          <a:xfrm>
+            <a:off x="11594592" y="6473952"/>
+            <a:ext cx="365760" cy="274320"/>
+          </a:xfrm>
+          <a:prstGeom prst="rect">
+            <a:avLst/>
+          </a:prstGeom>
+          <a:noFill/>
+        </p:spPr>
+        <p:txBody>
+          <a:bodyPr wrap="square">
+            <a:spAutoFit/>
+          </a:bodyPr>
+          <a:lstStyle/>
+          <a:p>
+            <a:pPr algn="r"/>
+            <a:r>
+              <a:rPr sz="1000" b="0">
+                <a:solidFill>
+                  <a:srgbClr val="5A5A5A"/>
+                </a:solidFill>
+                <a:latin typeface="Calibri"/>
+              </a:rPr>
+              <a:t>29</a:t>
+            </a:r>
+          </a:p>
+        </p:txBody>
+      </p:sp>
+      <p:graphicFrame>
+        <p:nvGraphicFramePr>
+          <p:cNvPr id="8" name="Table 7"/>
+          <p:cNvGraphicFramePr>
+            <a:graphicFrameLocks noGrp="1"/>
+          </p:cNvGraphicFramePr>
+          <p:nvPr/>
+        </p:nvGraphicFramePr>
+        <p:xfrm>
+          <a:off x="292608" y="1234440"/>
+          <a:ext cx="11430000" cy="2194560"/>
+        </p:xfrm>
+        <a:graphic>
+          <a:graphicData uri="http://schemas.openxmlformats.org/drawingml/2006/table">
+            <a:tbl>
+              <a:tblPr firstRow="1" bandRow="1">
+                <a:tableStyleId>{5C22544A-7EE6-4342-B048-85BDC9FD1C3A}</a:tableStyleId>
+              </a:tblPr>
+              <a:tblGrid>
+                <a:gridCol w="1828800"/>
+                <a:gridCol w="2743200"/>
+                <a:gridCol w="2743200"/>
+                <a:gridCol w="4114800"/>
+              </a:tblGrid>
+              <a:tr h="548640">
+                <a:tc>
+                  <a:txBody>
+                    <a:bodyPr/>
+                    <a:lstStyle/>
+                    <a:p>
+                      <a:pPr algn="l"/>
+                      <a:r>
+                        <a:rPr sz="1300" b="1">
+                          <a:solidFill>
+                            <a:srgbClr val="FFFFFF"/>
+                          </a:solidFill>
+                          <a:latin typeface="Calibri"/>
+                        </a:rPr>
+                        <a:t>Year</a:t>
+                      </a:r>
+                    </a:p>
+                  </a:txBody>
+                  <a:tcPr anchor="ctr" marL="73152" marR="73152">
+                    <a:solidFill>
+                      <a:srgbClr val="CC0E1E"/>
+                    </a:solidFill>
+                  </a:tcPr>
+                </a:tc>
+                <a:tc>
+                  <a:txBody>
+                    <a:bodyPr/>
+                    <a:lstStyle/>
+                    <a:p>
+                      <a:pPr algn="r"/>
+                      <a:r>
+                        <a:rPr sz="1300" b="1">
+                          <a:solidFill>
+                            <a:srgbClr val="FFFFFF"/>
+                          </a:solidFill>
+                          <a:latin typeface="Calibri"/>
+                        </a:rPr>
+                        <a:t>High-risk €</a:t>
+                      </a:r>
+                    </a:p>
+                  </a:txBody>
+                  <a:tcPr anchor="ctr" marL="73152" marR="73152">
+                    <a:solidFill>
+                      <a:srgbClr val="CC0E1E"/>
+                    </a:solidFill>
+                  </a:tcPr>
+                </a:tc>
+                <a:tc>
+                  <a:txBody>
+                    <a:bodyPr/>
+                    <a:lstStyle/>
+                    <a:p>
+                      <a:pPr algn="r"/>
+                      <a:r>
+                        <a:rPr sz="1300" b="1">
+                          <a:solidFill>
+                            <a:srgbClr val="FFFFFF"/>
+                          </a:solidFill>
+                          <a:latin typeface="Calibri"/>
+                        </a:rPr>
+                        <a:t>High-risk %</a:t>
+                      </a:r>
+                    </a:p>
+                  </a:txBody>
+                  <a:tcPr anchor="ctr" marL="73152" marR="73152">
+                    <a:solidFill>
+                      <a:srgbClr val="CC0E1E"/>
+                    </a:solidFill>
+                  </a:tcPr>
+                </a:tc>
+                <a:tc>
+                  <a:txBody>
+                    <a:bodyPr/>
+                    <a:lstStyle/>
+                    <a:p>
+                      <a:pPr algn="l"/>
+                      <a:r>
+                        <a:rPr sz="1300" b="1">
+                          <a:solidFill>
+                            <a:srgbClr val="FFFFFF"/>
+                          </a:solidFill>
+                          <a:latin typeface="Calibri"/>
+                        </a:rPr>
+                        <a:t>Quadrant</a:t>
+                      </a:r>
+                    </a:p>
+                  </a:txBody>
+                  <a:tcPr anchor="ctr" marL="73152" marR="73152">
+                    <a:solidFill>
+                      <a:srgbClr val="CC0E1E"/>
+                    </a:solidFill>
+                  </a:tcPr>
+                </a:tc>
+              </a:tr>
+              <a:tr h="548640">
+                <a:tc>
+                  <a:txBody>
+                    <a:bodyPr/>
+                    <a:lstStyle/>
+                    <a:p>
+                      <a:pPr algn="l"/>
+                      <a:r>
+                        <a:rPr sz="1300" b="0">
+                          <a:solidFill>
+                            <a:srgbClr val="1A1A1A"/>
+                          </a:solidFill>
+                          <a:latin typeface="Calibri"/>
+                        </a:rPr>
+                        <a:t>2023</a:t>
+                      </a:r>
+                    </a:p>
+                  </a:txBody>
+                  <a:tcPr anchor="ctr" marL="73152" marR="73152">
+                    <a:solidFill>
+                      <a:srgbClr val="FFFFFF"/>
+                    </a:solidFill>
+                  </a:tcPr>
+                </a:tc>
+                <a:tc>
+                  <a:txBody>
+                    <a:bodyPr/>
+                    <a:lstStyle/>
+                    <a:p>
+                      <a:pPr algn="r"/>
+                      <a:r>
+                        <a:rPr sz="1300" b="0">
+                          <a:solidFill>
+                            <a:srgbClr val="1A1A1A"/>
+                          </a:solidFill>
+                          <a:latin typeface="Calibri"/>
+                        </a:rPr>
+                        <a:t>EUR 130</a:t>
+                      </a:r>
+                    </a:p>
+                  </a:txBody>
+                  <a:tcPr anchor="ctr" marL="73152" marR="73152">
+                    <a:solidFill>
+                      <a:srgbClr val="FFFFFF"/>
+                    </a:solidFill>
+                  </a:tcPr>
+                </a:tc>
+                <a:tc>
+                  <a:txBody>
+                    <a:bodyPr/>
+                    <a:lstStyle/>
+                    <a:p>
+                      <a:pPr algn="r"/>
+                      <a:r>
+                        <a:rPr sz="1300" b="0">
+                          <a:solidFill>
+                            <a:srgbClr val="1A1A1A"/>
+                          </a:solidFill>
+                          <a:latin typeface="Calibri"/>
+                        </a:rPr>
+                        <a:t>0.2%</a:t>
+                      </a:r>
+                    </a:p>
+                  </a:txBody>
+                  <a:tcPr anchor="ctr" marL="73152" marR="73152">
+                    <a:solidFill>
+                      <a:srgbClr val="FFFFFF"/>
+                    </a:solidFill>
+                  </a:tcPr>
+                </a:tc>
+                <a:tc>
+                  <a:txBody>
+                    <a:bodyPr/>
+                    <a:lstStyle/>
+                    <a:p>
+                      <a:pPr algn="l"/>
+                      <a:r>
+                        <a:rPr sz="1300" b="0">
+                          <a:solidFill>
+                            <a:srgbClr val="1A1A1A"/>
+                          </a:solidFill>
+                          <a:latin typeface="Calibri"/>
+                        </a:rPr>
+                        <a:t>Attach gap (high GPS - low capture)</a:t>
+                      </a:r>
+                    </a:p>
+                  </a:txBody>
+                  <a:tcPr anchor="ctr" marL="73152" marR="73152">
+                    <a:solidFill>
+                      <a:srgbClr val="FFFFFF"/>
+                    </a:solidFill>
+                  </a:tcPr>
+                </a:tc>
+              </a:tr>
+              <a:tr h="548640">
+                <a:tc>
+                  <a:txBody>
+                    <a:bodyPr/>
+                    <a:lstStyle/>
+                    <a:p>
+                      <a:pPr algn="l"/>
+                      <a:r>
+                        <a:rPr sz="1300" b="0">
+                          <a:solidFill>
+                            <a:srgbClr val="1A1A1A"/>
+                          </a:solidFill>
+                          <a:latin typeface="Calibri"/>
+                        </a:rPr>
+                        <a:t>2024</a:t>
+                      </a:r>
+                    </a:p>
+                  </a:txBody>
+                  <a:tcPr anchor="ctr" marL="73152" marR="73152">
+                    <a:solidFill>
+                      <a:srgbClr val="ECECEC"/>
+                    </a:solidFill>
+                  </a:tcPr>
+                </a:tc>
+                <a:tc>
+                  <a:txBody>
+                    <a:bodyPr/>
+                    <a:lstStyle/>
+                    <a:p>
+                      <a:pPr algn="r"/>
+                      <a:r>
+                        <a:rPr sz="1300" b="0">
+                          <a:solidFill>
+                            <a:srgbClr val="1A1A1A"/>
+                          </a:solidFill>
+                          <a:latin typeface="Calibri"/>
+                        </a:rPr>
+                        <a:t>EUR 767</a:t>
+                      </a:r>
+                    </a:p>
+                  </a:txBody>
+                  <a:tcPr anchor="ctr" marL="73152" marR="73152">
+                    <a:solidFill>
+                      <a:srgbClr val="ECECEC"/>
+                    </a:solidFill>
+                  </a:tcPr>
+                </a:tc>
+                <a:tc>
+                  <a:txBody>
+                    <a:bodyPr/>
+                    <a:lstStyle/>
+                    <a:p>
+                      <a:pPr algn="r"/>
+                      <a:r>
+                        <a:rPr sz="1300" b="0">
+                          <a:solidFill>
+                            <a:srgbClr val="1A1A1A"/>
+                          </a:solidFill>
+                          <a:latin typeface="Calibri"/>
+                        </a:rPr>
+                        <a:t>1.0%</a:t>
+                      </a:r>
+                    </a:p>
+                  </a:txBody>
+                  <a:tcPr anchor="ctr" marL="73152" marR="73152">
+                    <a:solidFill>
+                      <a:srgbClr val="ECECEC"/>
+                    </a:solidFill>
+                  </a:tcPr>
+                </a:tc>
+                <a:tc>
+                  <a:txBody>
+                    <a:bodyPr/>
+                    <a:lstStyle/>
+                    <a:p>
+                      <a:pPr algn="l"/>
+                      <a:r>
+                        <a:rPr sz="1300" b="0">
+                          <a:solidFill>
+                            <a:srgbClr val="1A1A1A"/>
+                          </a:solidFill>
+                          <a:latin typeface="Calibri"/>
+                        </a:rPr>
+                        <a:t>Attach gap (high GPS - low capture)</a:t>
+                      </a:r>
+                    </a:p>
+                  </a:txBody>
+                  <a:tcPr anchor="ctr" marL="73152" marR="73152">
+                    <a:solidFill>
+                      <a:srgbClr val="ECECEC"/>
+                    </a:solidFill>
+                  </a:tcPr>
+                </a:tc>
+              </a:tr>
+              <a:tr h="548640">
+                <a:tc>
+                  <a:txBody>
+                    <a:bodyPr/>
+                    <a:lstStyle/>
+                    <a:p>
+                      <a:pPr algn="l"/>
+                      <a:r>
+                        <a:rPr sz="1300" b="0">
+                          <a:solidFill>
+                            <a:srgbClr val="1A1A1A"/>
+                          </a:solidFill>
+                          <a:latin typeface="Calibri"/>
+                        </a:rPr>
+                        <a:t>2025</a:t>
+                      </a:r>
+                    </a:p>
+                  </a:txBody>
+                  <a:tcPr anchor="ctr" marL="73152" marR="73152">
+                    <a:solidFill>
+                      <a:srgbClr val="FFFFFF"/>
+                    </a:solidFill>
+                  </a:tcPr>
+                </a:tc>
+                <a:tc>
+                  <a:txBody>
+                    <a:bodyPr/>
+                    <a:lstStyle/>
+                    <a:p>
+                      <a:pPr algn="r"/>
+                      <a:r>
+                        <a:rPr sz="1300" b="0">
+                          <a:solidFill>
+                            <a:srgbClr val="1A1A1A"/>
+                          </a:solidFill>
+                          <a:latin typeface="Calibri"/>
+                        </a:rPr>
+                        <a:t>EUR 435</a:t>
+                      </a:r>
+                    </a:p>
+                  </a:txBody>
+                  <a:tcPr anchor="ctr" marL="73152" marR="73152">
+                    <a:solidFill>
+                      <a:srgbClr val="FFFFFF"/>
+                    </a:solidFill>
+                  </a:tcPr>
+                </a:tc>
+                <a:tc>
+                  <a:txBody>
+                    <a:bodyPr/>
+                    <a:lstStyle/>
+                    <a:p>
+                      <a:pPr algn="r"/>
+                      <a:r>
+                        <a:rPr sz="1300" b="0">
+                          <a:solidFill>
+                            <a:srgbClr val="1A1A1A"/>
+                          </a:solidFill>
+                          <a:latin typeface="Calibri"/>
+                        </a:rPr>
+                        <a:t>0.5%</a:t>
+                      </a:r>
+                    </a:p>
+                  </a:txBody>
+                  <a:tcPr anchor="ctr" marL="73152" marR="73152">
+                    <a:solidFill>
+                      <a:srgbClr val="FFFFFF"/>
+                    </a:solidFill>
+                  </a:tcPr>
+                </a:tc>
+                <a:tc>
+                  <a:txBody>
+                    <a:bodyPr/>
+                    <a:lstStyle/>
+                    <a:p>
+                      <a:pPr algn="l"/>
+                      <a:r>
+                        <a:rPr sz="1300" b="0">
+                          <a:solidFill>
+                            <a:srgbClr val="1A1A1A"/>
+                          </a:solidFill>
+                          <a:latin typeface="Calibri"/>
+                        </a:rPr>
+                        <a:t>Defend (high GPS - high capture)</a:t>
+                      </a:r>
+                    </a:p>
+                  </a:txBody>
+                  <a:tcPr anchor="ctr" marL="73152" marR="73152">
+                    <a:solidFill>
+                      <a:srgbClr val="FFFFFF"/>
+                    </a:solidFill>
+                  </a:tcPr>
+                </a:tc>
+              </a:tr>
+            </a:tbl>
+          </a:graphicData>
+        </a:graphic>
+      </p:graphicFrame>
+      <p:sp>
+        <p:nvSpPr>
+          <p:cNvPr id="9" name="TextBox 8"/>
+          <p:cNvSpPr txBox="1"/>
+          <p:nvPr/>
+        </p:nvSpPr>
+        <p:spPr>
+          <a:xfrm>
+            <a:off x="292608" y="3749039"/>
+            <a:ext cx="11430000" cy="1828800"/>
+          </a:xfrm>
+          <a:prstGeom prst="rect">
+            <a:avLst/>
+          </a:prstGeom>
+          <a:noFill/>
+        </p:spPr>
+        <p:txBody>
+          <a:bodyPr wrap="square">
+            <a:spAutoFit/>
+          </a:bodyPr>
+          <a:lstStyle/>
+          <a:p>
+            <a:pPr>
+              <a:lnSpc>
+                <a:spcPct val="125000"/>
+              </a:lnSpc>
+              <a:spcAft>
+                <a:spcPts val="1000"/>
+              </a:spcAft>
+            </a:pPr>
+            <a:r>
+              <a:rPr sz="1400" b="1">
+                <a:solidFill>
+                  <a:srgbClr val="CC0E1E"/>
+                </a:solidFill>
+                <a:latin typeface="Calibri"/>
+              </a:rPr>
+              <a:t>—  </a:t>
+            </a:r>
+            <a:r>
+              <a:rPr sz="1400">
+                <a:solidFill>
+                  <a:srgbClr val="1A1A1A"/>
+                </a:solidFill>
+                <a:latin typeface="Calibri"/>
+              </a:rPr>
+              <a:t>High-risk € is catalogue AIM exposure, not proven walk-out.</a:t>
+            </a:r>
+          </a:p>
+          <a:p>
+            <a:pPr>
+              <a:lnSpc>
+                <a:spcPct val="125000"/>
+              </a:lnSpc>
+              <a:spcAft>
+                <a:spcPts val="1000"/>
+              </a:spcAft>
+            </a:pPr>
+            <a:r>
+              <a:rPr sz="1400" b="1">
+                <a:solidFill>
+                  <a:srgbClr val="CC0E1E"/>
+                </a:solidFill>
+                <a:latin typeface="Calibri"/>
+              </a:rPr>
+              <a:t>—  </a:t>
+            </a:r>
+            <a:r>
+              <a:rPr sz="1400">
+                <a:solidFill>
+                  <a:srgbClr val="1A1A1A"/>
+                </a:solidFill>
+                <a:latin typeface="Calibri"/>
+              </a:rPr>
+              <a:t>Open on jobs not bought through the distributor — not a street IAM war alone.</a:t>
+            </a:r>
+          </a:p>
+        </p:txBody>
+      </p:sp>
+    </p:spTree>
+  </p:cSld>
+  <p:clrMapOvr>
+    <a:masterClrMapping/>
+  </p:clrMapOvr>
+</p:sld>
+</file>
+
 <file path=ppt/slides/slide3.xml><?xml version="1.0" encoding="utf-8"?>
 <p:sld xmlns:a="http://schemas.openxmlformats.org/drawingml/2006/main" xmlns:p="http://schemas.openxmlformats.org/presentationml/2006/main" xmlns:r="http://schemas.openxmlformats.org/officeDocument/2006/relationships">
   <p:cSld>
@@ -9745,7 +15880,7 @@
                 </a:solidFill>
                 <a:latin typeface="Calibri"/>
               </a:rPr>
-              <a:t>Parts Performance — CY H1 2026 vs CY H1 2025</a:t>
+              <a:t>Parts Performance — CY H1 2026 vs CY H1 2025 (commercial, ex-warranty)</a:t>
             </a:r>
           </a:p>
         </p:txBody>
@@ -9976,7 +16111,7 @@
                 </a:solidFill>
                 <a:latin typeface="Calibri"/>
               </a:rPr>
-              <a:t>Parts billing EUR 43K against EUR 45K a year earlier — -4.5%.</a:t>
+              <a:t>Commercial parts billing (warranty/campaign excluded) EUR 38K against EUR 38K a year earlier — -0.1% (CY H1 2026 vs CY H1 2025, Jan–Jun).</a:t>
             </a:r>
           </a:p>
           <a:p>
@@ -10004,7 +16139,7 @@
                 </a:solidFill>
                 <a:latin typeface="Calibri"/>
               </a:rPr>
-              <a:t>Biggest declines: Transmission parts EUR -2K; Air conditioning EUR -2K.</a:t>
+              <a:t>Largest PN drops: 8983952370 (DRIVE ASM; FINAL,RR) EUR -1K, 1 fewer pcs; 8974926118 (HARNESS; CABLE,ENG R) EUR -1K, 1 fewer pcs; 8980088940 (MOTOR ASM; FAN,BLOWE) EUR -1K, 11 fewer pcs.</a:t>
             </a:r>
           </a:p>
           <a:p>
@@ -10032,7 +16167,7 @@
                 </a:solidFill>
                 <a:latin typeface="Calibri"/>
               </a:rPr>
-              <a:t>Growing: Engine parts +2093%, Exhaust +125%.</a:t>
+              <a:t>Largest PN gains: 8983767550 (ROTOR; DISC BRK,FRT) EUR 1K, 14 more pcs; 8978279610 (PAD KIT; DISC BRK,W/) EUR 1K, 9 more pcs; 8983937793 (SUPPORT; RR BUMPER) EUR 0K, 3 more pcs.</a:t>
             </a:r>
           </a:p>
           <a:p>
@@ -10060,11 +16195,1372 @@
                 </a:solidFill>
                 <a:latin typeface="Calibri"/>
               </a:rPr>
-              <a:t>CY H1 2026 against CY H1 2025 (calendar Jan–Jun, Q1+Q2) — like-for-like half-year cut.</a:t>
-            </a:r>
-          </a:p>
-        </p:txBody>
-      </p:sp>
+              <a:t>About EUR 4K of claim-matched PN billing was stripped so this chart is aftermarket demand, not warranty.</a:t>
+            </a:r>
+          </a:p>
+        </p:txBody>
+      </p:sp>
+    </p:spTree>
+  </p:cSld>
+  <p:clrMapOvr>
+    <a:masterClrMapping/>
+  </p:clrMapOvr>
+</p:sld>
+</file>
+
+<file path=ppt/slides/slide30.xml><?xml version="1.0" encoding="utf-8"?>
+<p:sld xmlns:a="http://schemas.openxmlformats.org/drawingml/2006/main" xmlns:p="http://schemas.openxmlformats.org/presentationml/2006/main" xmlns:r="http://schemas.openxmlformats.org/officeDocument/2006/relationships">
+  <p:cSld>
+    <p:bg>
+      <p:bgPr>
+        <a:solidFill>
+          <a:srgbClr val="FFFFFF"/>
+        </a:solidFill>
+        <a:effectLst/>
+      </p:bgPr>
+    </p:bg>
+    <p:spTree>
+      <p:nvGrpSpPr>
+        <p:cNvPr id="1" name=""/>
+        <p:cNvGrpSpPr/>
+        <p:nvPr/>
+      </p:nvGrpSpPr>
+      <p:grpSpPr/>
+      <p:pic>
+        <p:nvPicPr>
+          <p:cNvPr id="2" name="Picture 1" descr="image.png"/>
+          <p:cNvPicPr>
+            <a:picLocks noChangeAspect="1"/>
+          </p:cNvPicPr>
+          <p:nvPr/>
+        </p:nvPicPr>
+        <p:blipFill>
+          <a:blip r:embed="rId2"/>
+          <a:stretch>
+            <a:fillRect/>
+          </a:stretch>
+        </p:blipFill>
+        <p:spPr>
+          <a:xfrm>
+            <a:off x="256032" y="6263640"/>
+            <a:ext cx="1679787" cy="292608"/>
+          </a:xfrm>
+          <a:prstGeom prst="rect">
+            <a:avLst/>
+          </a:prstGeom>
+        </p:spPr>
+      </p:pic>
+      <p:sp>
+        <p:nvSpPr>
+          <p:cNvPr id="3" name="Rectangle 2"/>
+          <p:cNvSpPr/>
+          <p:nvPr/>
+        </p:nvSpPr>
+        <p:spPr>
+          <a:xfrm>
+            <a:off x="0" y="6766560"/>
+            <a:ext cx="12188952" cy="91440"/>
+          </a:xfrm>
+          <a:prstGeom prst="rect">
+            <a:avLst/>
+          </a:prstGeom>
+          <a:solidFill>
+            <a:srgbClr val="CC0E1E"/>
+          </a:solidFill>
+          <a:ln>
+            <a:noFill/>
+          </a:ln>
+        </p:spPr>
+        <p:style>
+          <a:lnRef idx="1">
+            <a:schemeClr val="accent1"/>
+          </a:lnRef>
+          <a:fillRef idx="3">
+            <a:schemeClr val="accent1"/>
+          </a:fillRef>
+          <a:effectRef idx="2">
+            <a:schemeClr val="accent1"/>
+          </a:effectRef>
+          <a:fontRef idx="minor">
+            <a:schemeClr val="lt1"/>
+          </a:fontRef>
+        </p:style>
+        <p:txBody>
+          <a:bodyPr rtlCol="0" anchor="ctr"/>
+          <a:lstStyle/>
+          <a:p>
+            <a:pPr algn="ctr"/>
+          </a:p>
+        </p:txBody>
+      </p:sp>
+      <p:sp>
+        <p:nvSpPr>
+          <p:cNvPr id="4" name="TextBox 3"/>
+          <p:cNvSpPr txBox="1"/>
+          <p:nvPr/>
+        </p:nvSpPr>
+        <p:spPr>
+          <a:xfrm>
+            <a:off x="292608" y="201168"/>
+            <a:ext cx="11430000" cy="274320"/>
+          </a:xfrm>
+          <a:prstGeom prst="rect">
+            <a:avLst/>
+          </a:prstGeom>
+          <a:noFill/>
+        </p:spPr>
+        <p:txBody>
+          <a:bodyPr wrap="square">
+            <a:spAutoFit/>
+          </a:bodyPr>
+          <a:lstStyle/>
+          <a:p>
+            <a:pPr algn="l"/>
+            <a:r>
+              <a:rPr sz="1100" b="1">
+                <a:solidFill>
+                  <a:srgbClr val="CC0E1E"/>
+                </a:solidFill>
+                <a:latin typeface="Calibri"/>
+              </a:rPr>
+              <a:t>WARRANTY</a:t>
+            </a:r>
+          </a:p>
+        </p:txBody>
+      </p:sp>
+      <p:sp>
+        <p:nvSpPr>
+          <p:cNvPr id="5" name="TextBox 4"/>
+          <p:cNvSpPr txBox="1"/>
+          <p:nvPr/>
+        </p:nvSpPr>
+        <p:spPr>
+          <a:xfrm>
+            <a:off x="292608" y="475488"/>
+            <a:ext cx="11612880" cy="566928"/>
+          </a:xfrm>
+          <a:prstGeom prst="rect">
+            <a:avLst/>
+          </a:prstGeom>
+          <a:noFill/>
+        </p:spPr>
+        <p:txBody>
+          <a:bodyPr wrap="square">
+            <a:spAutoFit/>
+          </a:bodyPr>
+          <a:lstStyle/>
+          <a:p>
+            <a:pPr algn="l"/>
+            <a:r>
+              <a:rPr sz="2500" b="1">
+                <a:solidFill>
+                  <a:srgbClr val="1A1A1A"/>
+                </a:solidFill>
+                <a:latin typeface="Calibri"/>
+              </a:rPr>
+              <a:t>Warranty — two real lenses</a:t>
+            </a:r>
+          </a:p>
+        </p:txBody>
+      </p:sp>
+      <p:sp>
+        <p:nvSpPr>
+          <p:cNvPr id="6" name="Rectangle 5"/>
+          <p:cNvSpPr/>
+          <p:nvPr/>
+        </p:nvSpPr>
+        <p:spPr>
+          <a:xfrm>
+            <a:off x="292608" y="1005840"/>
+            <a:ext cx="11612880" cy="28000"/>
+          </a:xfrm>
+          <a:prstGeom prst="rect">
+            <a:avLst/>
+          </a:prstGeom>
+          <a:solidFill>
+            <a:srgbClr val="CC0E1E"/>
+          </a:solidFill>
+          <a:ln>
+            <a:noFill/>
+          </a:ln>
+        </p:spPr>
+        <p:style>
+          <a:lnRef idx="1">
+            <a:schemeClr val="accent1"/>
+          </a:lnRef>
+          <a:fillRef idx="3">
+            <a:schemeClr val="accent1"/>
+          </a:fillRef>
+          <a:effectRef idx="2">
+            <a:schemeClr val="accent1"/>
+          </a:effectRef>
+          <a:fontRef idx="minor">
+            <a:schemeClr val="lt1"/>
+          </a:fontRef>
+        </p:style>
+        <p:txBody>
+          <a:bodyPr rtlCol="0" anchor="ctr"/>
+          <a:lstStyle/>
+          <a:p>
+            <a:pPr algn="ctr"/>
+          </a:p>
+        </p:txBody>
+      </p:sp>
+      <p:sp>
+        <p:nvSpPr>
+          <p:cNvPr id="7" name="TextBox 6"/>
+          <p:cNvSpPr txBox="1"/>
+          <p:nvPr/>
+        </p:nvSpPr>
+        <p:spPr>
+          <a:xfrm>
+            <a:off x="11594592" y="6473952"/>
+            <a:ext cx="365760" cy="274320"/>
+          </a:xfrm>
+          <a:prstGeom prst="rect">
+            <a:avLst/>
+          </a:prstGeom>
+          <a:noFill/>
+        </p:spPr>
+        <p:txBody>
+          <a:bodyPr wrap="square">
+            <a:spAutoFit/>
+          </a:bodyPr>
+          <a:lstStyle/>
+          <a:p>
+            <a:pPr algn="r"/>
+            <a:r>
+              <a:rPr sz="1000" b="0">
+                <a:solidFill>
+                  <a:srgbClr val="5A5A5A"/>
+                </a:solidFill>
+                <a:latin typeface="Calibri"/>
+              </a:rPr>
+              <a:t>30</a:t>
+            </a:r>
+          </a:p>
+        </p:txBody>
+      </p:sp>
+      <p:sp>
+        <p:nvSpPr>
+          <p:cNvPr id="8" name="Rounded Rectangle 7"/>
+          <p:cNvSpPr/>
+          <p:nvPr/>
+        </p:nvSpPr>
+        <p:spPr>
+          <a:xfrm>
+            <a:off x="292608" y="1234440"/>
+            <a:ext cx="5486400" cy="2926080"/>
+          </a:xfrm>
+          <a:prstGeom prst="roundRect">
+            <a:avLst>
+              <a:gd name="adj" fmla="val 6000"/>
+            </a:avLst>
+          </a:prstGeom>
+          <a:solidFill>
+            <a:srgbClr val="ECECEC"/>
+          </a:solidFill>
+          <a:ln>
+            <a:noFill/>
+          </a:ln>
+          <a:effectLst/>
+        </p:spPr>
+        <p:style>
+          <a:lnRef idx="1">
+            <a:schemeClr val="accent1"/>
+          </a:lnRef>
+          <a:fillRef idx="3">
+            <a:schemeClr val="accent1"/>
+          </a:fillRef>
+          <a:effectRef idx="2">
+            <a:schemeClr val="accent1"/>
+          </a:effectRef>
+          <a:fontRef idx="minor">
+            <a:schemeClr val="lt1"/>
+          </a:fontRef>
+        </p:style>
+        <p:txBody>
+          <a:bodyPr rtlCol="0" anchor="ctr"/>
+          <a:lstStyle/>
+          <a:p>
+            <a:pPr algn="ctr"/>
+          </a:p>
+        </p:txBody>
+      </p:sp>
+      <p:sp>
+        <p:nvSpPr>
+          <p:cNvPr id="9" name="Oval 8"/>
+          <p:cNvSpPr/>
+          <p:nvPr/>
+        </p:nvSpPr>
+        <p:spPr>
+          <a:xfrm>
+            <a:off x="493776" y="1435608"/>
+            <a:ext cx="457200" cy="457200"/>
+          </a:xfrm>
+          <a:prstGeom prst="ellipse">
+            <a:avLst/>
+          </a:prstGeom>
+          <a:solidFill>
+            <a:srgbClr val="CC0E1E"/>
+          </a:solidFill>
+          <a:ln>
+            <a:noFill/>
+          </a:ln>
+          <a:effectLst/>
+        </p:spPr>
+        <p:style>
+          <a:lnRef idx="1">
+            <a:schemeClr val="accent1"/>
+          </a:lnRef>
+          <a:fillRef idx="3">
+            <a:schemeClr val="accent1"/>
+          </a:fillRef>
+          <a:effectRef idx="2">
+            <a:schemeClr val="accent1"/>
+          </a:effectRef>
+          <a:fontRef idx="minor">
+            <a:schemeClr val="lt1"/>
+          </a:fontRef>
+        </p:style>
+        <p:txBody>
+          <a:bodyPr rtlCol="0" anchor="ctr" lIns="0" rIns="0" tIns="0" bIns="0"/>
+          <a:lstStyle/>
+          <a:p>
+            <a:pPr algn="ctr"/>
+            <a:r>
+              <a:rPr sz="1800" b="1">
+                <a:solidFill>
+                  <a:srgbClr val="FFFFFF"/>
+                </a:solidFill>
+                <a:latin typeface="Calibri"/>
+              </a:rPr>
+              <a:t>1</a:t>
+            </a:r>
+          </a:p>
+        </p:txBody>
+      </p:sp>
+      <p:sp>
+        <p:nvSpPr>
+          <p:cNvPr id="10" name="TextBox 9"/>
+          <p:cNvSpPr txBox="1"/>
+          <p:nvPr/>
+        </p:nvSpPr>
+        <p:spPr>
+          <a:xfrm>
+            <a:off x="1115568" y="1435608"/>
+            <a:ext cx="4480560" cy="411480"/>
+          </a:xfrm>
+          <a:prstGeom prst="rect">
+            <a:avLst/>
+          </a:prstGeom>
+          <a:noFill/>
+        </p:spPr>
+        <p:txBody>
+          <a:bodyPr wrap="square">
+            <a:spAutoFit/>
+          </a:bodyPr>
+          <a:lstStyle/>
+          <a:p>
+            <a:pPr algn="l"/>
+            <a:r>
+              <a:rPr sz="1500" b="1">
+                <a:solidFill>
+                  <a:srgbClr val="1A1A1A"/>
+                </a:solidFill>
+                <a:latin typeface="Calibri"/>
+              </a:rPr>
+              <a:t>CY2025 claim-price parts</a:t>
+            </a:r>
+          </a:p>
+        </p:txBody>
+      </p:sp>
+      <p:sp>
+        <p:nvSpPr>
+          <p:cNvPr id="11" name="TextBox 10"/>
+          <p:cNvSpPr txBox="1"/>
+          <p:nvPr/>
+        </p:nvSpPr>
+        <p:spPr>
+          <a:xfrm>
+            <a:off x="585216" y="2011680"/>
+            <a:ext cx="4937760" cy="2011680"/>
+          </a:xfrm>
+          <a:prstGeom prst="rect">
+            <a:avLst/>
+          </a:prstGeom>
+          <a:noFill/>
+        </p:spPr>
+        <p:txBody>
+          <a:bodyPr wrap="square">
+            <a:spAutoFit/>
+          </a:bodyPr>
+          <a:lstStyle/>
+          <a:p>
+            <a:pPr>
+              <a:lnSpc>
+                <a:spcPct val="115000"/>
+              </a:lnSpc>
+              <a:spcAft>
+                <a:spcPts val="1000"/>
+              </a:spcAft>
+            </a:pPr>
+            <a:r>
+              <a:rPr sz="1250" b="1">
+                <a:solidFill>
+                  <a:srgbClr val="CC0E1E"/>
+                </a:solidFill>
+                <a:latin typeface="Calibri"/>
+              </a:rPr>
+              <a:t>—  </a:t>
+            </a:r>
+            <a:r>
+              <a:rPr sz="1250">
+                <a:solidFill>
+                  <a:srgbClr val="1A1A1A"/>
+                </a:solidFill>
+                <a:latin typeface="Calibri"/>
+              </a:rPr>
+              <a:t>EUR 7,035 (claim-price basis).</a:t>
+            </a:r>
+          </a:p>
+          <a:p>
+            <a:pPr>
+              <a:lnSpc>
+                <a:spcPct val="115000"/>
+              </a:lnSpc>
+              <a:spcAft>
+                <a:spcPts val="1000"/>
+              </a:spcAft>
+            </a:pPr>
+            <a:r>
+              <a:rPr sz="1250" b="1">
+                <a:solidFill>
+                  <a:srgbClr val="CC0E1E"/>
+                </a:solidFill>
+                <a:latin typeface="Calibri"/>
+              </a:rPr>
+              <a:t>—  </a:t>
+            </a:r>
+            <a:r>
+              <a:rPr sz="1250">
+                <a:solidFill>
+                  <a:srgbClr val="1A1A1A"/>
+                </a:solidFill>
+                <a:latin typeface="Calibri"/>
+              </a:rPr>
+              <a:t>Calendar-year claim price basis.</a:t>
+            </a:r>
+          </a:p>
+          <a:p>
+            <a:pPr>
+              <a:lnSpc>
+                <a:spcPct val="115000"/>
+              </a:lnSpc>
+              <a:spcAft>
+                <a:spcPts val="1000"/>
+              </a:spcAft>
+            </a:pPr>
+            <a:r>
+              <a:rPr sz="1250" b="1">
+                <a:solidFill>
+                  <a:srgbClr val="CC0E1E"/>
+                </a:solidFill>
+                <a:latin typeface="Calibri"/>
+              </a:rPr>
+              <a:t>—  </a:t>
+            </a:r>
+            <a:r>
+              <a:rPr sz="1250">
+                <a:solidFill>
+                  <a:srgbClr val="1A1A1A"/>
+                </a:solidFill>
+                <a:latin typeface="Calibri"/>
+              </a:rPr>
+              <a:t>LCV warranty.</a:t>
+            </a:r>
+          </a:p>
+        </p:txBody>
+      </p:sp>
+      <p:sp>
+        <p:nvSpPr>
+          <p:cNvPr id="12" name="Rounded Rectangle 11"/>
+          <p:cNvSpPr/>
+          <p:nvPr/>
+        </p:nvSpPr>
+        <p:spPr>
+          <a:xfrm>
+            <a:off x="6126480" y="1234440"/>
+            <a:ext cx="5486400" cy="2926080"/>
+          </a:xfrm>
+          <a:prstGeom prst="roundRect">
+            <a:avLst>
+              <a:gd name="adj" fmla="val 6000"/>
+            </a:avLst>
+          </a:prstGeom>
+          <a:solidFill>
+            <a:srgbClr val="ECECEC"/>
+          </a:solidFill>
+          <a:ln>
+            <a:noFill/>
+          </a:ln>
+          <a:effectLst/>
+        </p:spPr>
+        <p:style>
+          <a:lnRef idx="1">
+            <a:schemeClr val="accent1"/>
+          </a:lnRef>
+          <a:fillRef idx="3">
+            <a:schemeClr val="accent1"/>
+          </a:fillRef>
+          <a:effectRef idx="2">
+            <a:schemeClr val="accent1"/>
+          </a:effectRef>
+          <a:fontRef idx="minor">
+            <a:schemeClr val="lt1"/>
+          </a:fontRef>
+        </p:style>
+        <p:txBody>
+          <a:bodyPr rtlCol="0" anchor="ctr"/>
+          <a:lstStyle/>
+          <a:p>
+            <a:pPr algn="ctr"/>
+          </a:p>
+        </p:txBody>
+      </p:sp>
+      <p:sp>
+        <p:nvSpPr>
+          <p:cNvPr id="13" name="Oval 12"/>
+          <p:cNvSpPr/>
+          <p:nvPr/>
+        </p:nvSpPr>
+        <p:spPr>
+          <a:xfrm>
+            <a:off x="6327648" y="1435608"/>
+            <a:ext cx="457200" cy="457200"/>
+          </a:xfrm>
+          <a:prstGeom prst="ellipse">
+            <a:avLst/>
+          </a:prstGeom>
+          <a:solidFill>
+            <a:srgbClr val="CC0E1E"/>
+          </a:solidFill>
+          <a:ln>
+            <a:noFill/>
+          </a:ln>
+          <a:effectLst/>
+        </p:spPr>
+        <p:style>
+          <a:lnRef idx="1">
+            <a:schemeClr val="accent1"/>
+          </a:lnRef>
+          <a:fillRef idx="3">
+            <a:schemeClr val="accent1"/>
+          </a:fillRef>
+          <a:effectRef idx="2">
+            <a:schemeClr val="accent1"/>
+          </a:effectRef>
+          <a:fontRef idx="minor">
+            <a:schemeClr val="lt1"/>
+          </a:fontRef>
+        </p:style>
+        <p:txBody>
+          <a:bodyPr rtlCol="0" anchor="ctr" lIns="0" rIns="0" tIns="0" bIns="0"/>
+          <a:lstStyle/>
+          <a:p>
+            <a:pPr algn="ctr"/>
+            <a:r>
+              <a:rPr sz="1800" b="1">
+                <a:solidFill>
+                  <a:srgbClr val="FFFFFF"/>
+                </a:solidFill>
+                <a:latin typeface="Calibri"/>
+              </a:rPr>
+              <a:t>2</a:t>
+            </a:r>
+          </a:p>
+        </p:txBody>
+      </p:sp>
+      <p:sp>
+        <p:nvSpPr>
+          <p:cNvPr id="14" name="TextBox 13"/>
+          <p:cNvSpPr txBox="1"/>
+          <p:nvPr/>
+        </p:nvSpPr>
+        <p:spPr>
+          <a:xfrm>
+            <a:off x="6949440" y="1435608"/>
+            <a:ext cx="4480560" cy="411480"/>
+          </a:xfrm>
+          <a:prstGeom prst="rect">
+            <a:avLst/>
+          </a:prstGeom>
+          <a:noFill/>
+        </p:spPr>
+        <p:txBody>
+          <a:bodyPr wrap="square">
+            <a:spAutoFit/>
+          </a:bodyPr>
+          <a:lstStyle/>
+          <a:p>
+            <a:pPr algn="l"/>
+            <a:r>
+              <a:rPr sz="1500" b="1">
+                <a:solidFill>
+                  <a:srgbClr val="1A1A1A"/>
+                </a:solidFill>
+                <a:latin typeface="Calibri"/>
+              </a:rPr>
+              <a:t>Fiscal GPS expense</a:t>
+            </a:r>
+          </a:p>
+        </p:txBody>
+      </p:sp>
+      <p:sp>
+        <p:nvSpPr>
+          <p:cNvPr id="15" name="TextBox 14"/>
+          <p:cNvSpPr txBox="1"/>
+          <p:nvPr/>
+        </p:nvSpPr>
+        <p:spPr>
+          <a:xfrm>
+            <a:off x="6419088" y="2011680"/>
+            <a:ext cx="4937760" cy="2011680"/>
+          </a:xfrm>
+          <a:prstGeom prst="rect">
+            <a:avLst/>
+          </a:prstGeom>
+          <a:noFill/>
+        </p:spPr>
+        <p:txBody>
+          <a:bodyPr wrap="square">
+            <a:spAutoFit/>
+          </a:bodyPr>
+          <a:lstStyle/>
+          <a:p>
+            <a:pPr>
+              <a:lnSpc>
+                <a:spcPct val="115000"/>
+              </a:lnSpc>
+              <a:spcAft>
+                <a:spcPts val="1000"/>
+              </a:spcAft>
+            </a:pPr>
+            <a:r>
+              <a:rPr sz="1250" b="1">
+                <a:solidFill>
+                  <a:srgbClr val="CC0E1E"/>
+                </a:solidFill>
+                <a:latin typeface="Calibri"/>
+              </a:rPr>
+              <a:t>—  </a:t>
+            </a:r>
+            <a:r>
+              <a:rPr sz="1250">
+                <a:solidFill>
+                  <a:srgbClr val="1A1A1A"/>
+                </a:solidFill>
+                <a:latin typeface="Calibri"/>
+              </a:rPr>
+              <a:t>FY24 EUR 0 · FY25 EUR 2,345 · FY26 EUR 9,865.</a:t>
+            </a:r>
+          </a:p>
+          <a:p>
+            <a:pPr>
+              <a:lnSpc>
+                <a:spcPct val="115000"/>
+              </a:lnSpc>
+              <a:spcAft>
+                <a:spcPts val="1000"/>
+              </a:spcAft>
+            </a:pPr>
+            <a:r>
+              <a:rPr sz="1250" b="1">
+                <a:solidFill>
+                  <a:srgbClr val="CC0E1E"/>
+                </a:solidFill>
+                <a:latin typeface="Calibri"/>
+              </a:rPr>
+              <a:t>—  </a:t>
+            </a:r>
+            <a:r>
+              <a:rPr sz="1250">
+                <a:solidFill>
+                  <a:srgbClr val="1A1A1A"/>
+                </a:solidFill>
+                <a:latin typeface="Calibri"/>
+              </a:rPr>
+              <a:t>Source row: BL Iceland.</a:t>
+            </a:r>
+          </a:p>
+          <a:p>
+            <a:pPr>
+              <a:lnSpc>
+                <a:spcPct val="115000"/>
+              </a:lnSpc>
+              <a:spcAft>
+                <a:spcPts val="1000"/>
+              </a:spcAft>
+            </a:pPr>
+            <a:r>
+              <a:rPr sz="1250" b="1">
+                <a:solidFill>
+                  <a:srgbClr val="CC0E1E"/>
+                </a:solidFill>
+                <a:latin typeface="Calibri"/>
+              </a:rPr>
+              <a:t>—  </a:t>
+            </a:r>
+            <a:r>
+              <a:rPr sz="1250">
+                <a:solidFill>
+                  <a:srgbClr val="1A1A1A"/>
+                </a:solidFill>
+                <a:latin typeface="Calibri"/>
+              </a:rPr>
+              <a:t>Ex-warranty GPS = (net − warranty) ÷ frozen CY25 wallet.</a:t>
+            </a:r>
+          </a:p>
+        </p:txBody>
+      </p:sp>
+      <p:sp>
+        <p:nvSpPr>
+          <p:cNvPr id="16" name="TextBox 15"/>
+          <p:cNvSpPr txBox="1"/>
+          <p:nvPr/>
+        </p:nvSpPr>
+        <p:spPr>
+          <a:xfrm>
+            <a:off x="292608" y="4480560"/>
+            <a:ext cx="11430000" cy="1097280"/>
+          </a:xfrm>
+          <a:prstGeom prst="rect">
+            <a:avLst/>
+          </a:prstGeom>
+          <a:noFill/>
+        </p:spPr>
+        <p:txBody>
+          <a:bodyPr wrap="square">
+            <a:spAutoFit/>
+          </a:bodyPr>
+          <a:lstStyle/>
+          <a:p>
+            <a:pPr>
+              <a:lnSpc>
+                <a:spcPct val="125000"/>
+              </a:lnSpc>
+              <a:spcAft>
+                <a:spcPts val="1000"/>
+              </a:spcAft>
+            </a:pPr>
+            <a:r>
+              <a:rPr sz="1300" b="1">
+                <a:solidFill>
+                  <a:srgbClr val="CC0E1E"/>
+                </a:solidFill>
+                <a:latin typeface="Calibri"/>
+              </a:rPr>
+              <a:t>—  </a:t>
+            </a:r>
+            <a:r>
+              <a:rPr sz="1300">
+                <a:solidFill>
+                  <a:srgbClr val="1A1A1A"/>
+                </a:solidFill>
+                <a:latin typeface="Calibri"/>
+              </a:rPr>
+              <a:t>Both numbers are real — never mix them on one slide without labels.</a:t>
+            </a:r>
+          </a:p>
+        </p:txBody>
+      </p:sp>
+    </p:spTree>
+  </p:cSld>
+  <p:clrMapOvr>
+    <a:masterClrMapping/>
+  </p:clrMapOvr>
+</p:sld>
+</file>
+
+<file path=ppt/slides/slide31.xml><?xml version="1.0" encoding="utf-8"?>
+<p:sld xmlns:a="http://schemas.openxmlformats.org/drawingml/2006/main" xmlns:p="http://schemas.openxmlformats.org/presentationml/2006/main" xmlns:r="http://schemas.openxmlformats.org/officeDocument/2006/relationships">
+  <p:cSld>
+    <p:bg>
+      <p:bgPr>
+        <a:solidFill>
+          <a:srgbClr val="FFFFFF"/>
+        </a:solidFill>
+        <a:effectLst/>
+      </p:bgPr>
+    </p:bg>
+    <p:spTree>
+      <p:nvGrpSpPr>
+        <p:cNvPr id="1" name=""/>
+        <p:cNvGrpSpPr/>
+        <p:nvPr/>
+      </p:nvGrpSpPr>
+      <p:grpSpPr/>
+      <p:pic>
+        <p:nvPicPr>
+          <p:cNvPr id="2" name="Picture 1" descr="image.png"/>
+          <p:cNvPicPr>
+            <a:picLocks noChangeAspect="1"/>
+          </p:cNvPicPr>
+          <p:nvPr/>
+        </p:nvPicPr>
+        <p:blipFill>
+          <a:blip r:embed="rId2"/>
+          <a:stretch>
+            <a:fillRect/>
+          </a:stretch>
+        </p:blipFill>
+        <p:spPr>
+          <a:xfrm>
+            <a:off x="256032" y="6263640"/>
+            <a:ext cx="1679787" cy="292608"/>
+          </a:xfrm>
+          <a:prstGeom prst="rect">
+            <a:avLst/>
+          </a:prstGeom>
+        </p:spPr>
+      </p:pic>
+      <p:sp>
+        <p:nvSpPr>
+          <p:cNvPr id="3" name="Rectangle 2"/>
+          <p:cNvSpPr/>
+          <p:nvPr/>
+        </p:nvSpPr>
+        <p:spPr>
+          <a:xfrm>
+            <a:off x="0" y="6766560"/>
+            <a:ext cx="12188952" cy="91440"/>
+          </a:xfrm>
+          <a:prstGeom prst="rect">
+            <a:avLst/>
+          </a:prstGeom>
+          <a:solidFill>
+            <a:srgbClr val="CC0E1E"/>
+          </a:solidFill>
+          <a:ln>
+            <a:noFill/>
+          </a:ln>
+        </p:spPr>
+        <p:style>
+          <a:lnRef idx="1">
+            <a:schemeClr val="accent1"/>
+          </a:lnRef>
+          <a:fillRef idx="3">
+            <a:schemeClr val="accent1"/>
+          </a:fillRef>
+          <a:effectRef idx="2">
+            <a:schemeClr val="accent1"/>
+          </a:effectRef>
+          <a:fontRef idx="minor">
+            <a:schemeClr val="lt1"/>
+          </a:fontRef>
+        </p:style>
+        <p:txBody>
+          <a:bodyPr rtlCol="0" anchor="ctr"/>
+          <a:lstStyle/>
+          <a:p>
+            <a:pPr algn="ctr"/>
+          </a:p>
+        </p:txBody>
+      </p:sp>
+      <p:sp>
+        <p:nvSpPr>
+          <p:cNvPr id="4" name="TextBox 3"/>
+          <p:cNvSpPr txBox="1"/>
+          <p:nvPr/>
+        </p:nvSpPr>
+        <p:spPr>
+          <a:xfrm>
+            <a:off x="292608" y="201168"/>
+            <a:ext cx="11430000" cy="274320"/>
+          </a:xfrm>
+          <a:prstGeom prst="rect">
+            <a:avLst/>
+          </a:prstGeom>
+          <a:noFill/>
+        </p:spPr>
+        <p:txBody>
+          <a:bodyPr wrap="square">
+            <a:spAutoFit/>
+          </a:bodyPr>
+          <a:lstStyle/>
+          <a:p>
+            <a:pPr algn="l"/>
+            <a:r>
+              <a:rPr sz="1100" b="1">
+                <a:solidFill>
+                  <a:srgbClr val="CC0E1E"/>
+                </a:solidFill>
+                <a:latin typeface="Calibri"/>
+              </a:rPr>
+              <a:t>BRIDGE</a:t>
+            </a:r>
+          </a:p>
+        </p:txBody>
+      </p:sp>
+      <p:sp>
+        <p:nvSpPr>
+          <p:cNvPr id="5" name="TextBox 4"/>
+          <p:cNvSpPr txBox="1"/>
+          <p:nvPr/>
+        </p:nvSpPr>
+        <p:spPr>
+          <a:xfrm>
+            <a:off x="292608" y="475488"/>
+            <a:ext cx="11612880" cy="566928"/>
+          </a:xfrm>
+          <a:prstGeom prst="rect">
+            <a:avLst/>
+          </a:prstGeom>
+          <a:noFill/>
+        </p:spPr>
+        <p:txBody>
+          <a:bodyPr wrap="square">
+            <a:spAutoFit/>
+          </a:bodyPr>
+          <a:lstStyle/>
+          <a:p>
+            <a:pPr algn="l"/>
+            <a:r>
+              <a:rPr sz="2500" b="1">
+                <a:solidFill>
+                  <a:srgbClr val="1A1A1A"/>
+                </a:solidFill>
+                <a:latin typeface="Calibri"/>
+              </a:rPr>
+              <a:t>How to use this in the meeting</a:t>
+            </a:r>
+          </a:p>
+        </p:txBody>
+      </p:sp>
+      <p:sp>
+        <p:nvSpPr>
+          <p:cNvPr id="6" name="Rectangle 5"/>
+          <p:cNvSpPr/>
+          <p:nvPr/>
+        </p:nvSpPr>
+        <p:spPr>
+          <a:xfrm>
+            <a:off x="292608" y="1005840"/>
+            <a:ext cx="11612880" cy="28000"/>
+          </a:xfrm>
+          <a:prstGeom prst="rect">
+            <a:avLst/>
+          </a:prstGeom>
+          <a:solidFill>
+            <a:srgbClr val="CC0E1E"/>
+          </a:solidFill>
+          <a:ln>
+            <a:noFill/>
+          </a:ln>
+        </p:spPr>
+        <p:style>
+          <a:lnRef idx="1">
+            <a:schemeClr val="accent1"/>
+          </a:lnRef>
+          <a:fillRef idx="3">
+            <a:schemeClr val="accent1"/>
+          </a:fillRef>
+          <a:effectRef idx="2">
+            <a:schemeClr val="accent1"/>
+          </a:effectRef>
+          <a:fontRef idx="minor">
+            <a:schemeClr val="lt1"/>
+          </a:fontRef>
+        </p:style>
+        <p:txBody>
+          <a:bodyPr rtlCol="0" anchor="ctr"/>
+          <a:lstStyle/>
+          <a:p>
+            <a:pPr algn="ctr"/>
+          </a:p>
+        </p:txBody>
+      </p:sp>
+      <p:sp>
+        <p:nvSpPr>
+          <p:cNvPr id="7" name="TextBox 6"/>
+          <p:cNvSpPr txBox="1"/>
+          <p:nvPr/>
+        </p:nvSpPr>
+        <p:spPr>
+          <a:xfrm>
+            <a:off x="11594592" y="6473952"/>
+            <a:ext cx="365760" cy="274320"/>
+          </a:xfrm>
+          <a:prstGeom prst="rect">
+            <a:avLst/>
+          </a:prstGeom>
+          <a:noFill/>
+        </p:spPr>
+        <p:txBody>
+          <a:bodyPr wrap="square">
+            <a:spAutoFit/>
+          </a:bodyPr>
+          <a:lstStyle/>
+          <a:p>
+            <a:pPr algn="r"/>
+            <a:r>
+              <a:rPr sz="1000" b="0">
+                <a:solidFill>
+                  <a:srgbClr val="5A5A5A"/>
+                </a:solidFill>
+                <a:latin typeface="Calibri"/>
+              </a:rPr>
+              <a:t>31</a:t>
+            </a:r>
+          </a:p>
+        </p:txBody>
+      </p:sp>
+      <p:graphicFrame>
+        <p:nvGraphicFramePr>
+          <p:cNvPr id="8" name="Table 7"/>
+          <p:cNvGraphicFramePr>
+            <a:graphicFrameLocks noGrp="1"/>
+          </p:cNvGraphicFramePr>
+          <p:nvPr/>
+        </p:nvGraphicFramePr>
+        <p:xfrm>
+          <a:off x="292608" y="1188720"/>
+          <a:ext cx="11430000" cy="3840480"/>
+        </p:xfrm>
+        <a:graphic>
+          <a:graphicData uri="http://schemas.openxmlformats.org/drawingml/2006/table">
+            <a:tbl>
+              <a:tblPr firstRow="1" bandRow="1">
+                <a:tableStyleId>{5C22544A-7EE6-4342-B048-85BDC9FD1C3A}</a:tableStyleId>
+              </a:tblPr>
+              <a:tblGrid>
+                <a:gridCol w="3840480"/>
+                <a:gridCol w="7589520"/>
+              </a:tblGrid>
+              <a:tr h="960120">
+                <a:tc>
+                  <a:txBody>
+                    <a:bodyPr/>
+                    <a:lstStyle/>
+                    <a:p>
+                      <a:pPr algn="l"/>
+                      <a:r>
+                        <a:rPr sz="1200" b="1">
+                          <a:solidFill>
+                            <a:srgbClr val="FFFFFF"/>
+                          </a:solidFill>
+                          <a:latin typeface="Calibri"/>
+                        </a:rPr>
+                        <a:t>If they say…</a:t>
+                      </a:r>
+                    </a:p>
+                  </a:txBody>
+                  <a:tcPr anchor="ctr" marL="73152" marR="73152">
+                    <a:solidFill>
+                      <a:srgbClr val="CC0E1E"/>
+                    </a:solidFill>
+                  </a:tcPr>
+                </a:tc>
+                <a:tc>
+                  <a:txBody>
+                    <a:bodyPr/>
+                    <a:lstStyle/>
+                    <a:p>
+                      <a:pPr algn="l"/>
+                      <a:r>
+                        <a:rPr sz="1200" b="1">
+                          <a:solidFill>
+                            <a:srgbClr val="FFFFFF"/>
+                          </a:solidFill>
+                          <a:latin typeface="Calibri"/>
+                        </a:rPr>
+                        <a:t>You know…</a:t>
+                      </a:r>
+                    </a:p>
+                  </a:txBody>
+                  <a:tcPr anchor="ctr" marL="73152" marR="73152">
+                    <a:solidFill>
+                      <a:srgbClr val="CC0E1E"/>
+                    </a:solidFill>
+                  </a:tcPr>
+                </a:tc>
+              </a:tr>
+              <a:tr h="960120">
+                <a:tc>
+                  <a:txBody>
+                    <a:bodyPr/>
+                    <a:lstStyle/>
+                    <a:p>
+                      <a:pPr algn="l"/>
+                      <a:r>
+                        <a:rPr sz="1200" b="0">
+                          <a:solidFill>
+                            <a:srgbClr val="1A1A1A"/>
+                          </a:solidFill>
+                          <a:latin typeface="Calibri"/>
+                        </a:rPr>
+                        <a:t>BVP is eating genuine</a:t>
+                      </a:r>
+                    </a:p>
+                  </a:txBody>
+                  <a:tcPr anchor="ctr" marL="73152" marR="73152">
+                    <a:solidFill>
+                      <a:srgbClr val="FFFFFF"/>
+                    </a:solidFill>
+                  </a:tcPr>
+                </a:tc>
+                <a:tc>
+                  <a:txBody>
+                    <a:bodyPr/>
+                    <a:lstStyle/>
+                    <a:p>
+                      <a:pPr algn="l"/>
+                      <a:r>
+                        <a:rPr sz="1200" b="0">
+                          <a:solidFill>
+                            <a:srgbClr val="1A1A1A"/>
+                          </a:solidFill>
+                          <a:latin typeface="Calibri"/>
+                        </a:rPr>
+                        <a:t>Wallet BVP ~0.0%. Check pads as a local exception only.</a:t>
+                      </a:r>
+                    </a:p>
+                  </a:txBody>
+                  <a:tcPr anchor="ctr" marL="73152" marR="73152">
+                    <a:solidFill>
+                      <a:srgbClr val="FFFFFF"/>
+                    </a:solidFill>
+                  </a:tcPr>
+                </a:tc>
+              </a:tr>
+              <a:tr h="960120">
+                <a:tc>
+                  <a:txBody>
+                    <a:bodyPr/>
+                    <a:lstStyle/>
+                    <a:p>
+                      <a:pPr algn="l"/>
+                      <a:r>
+                        <a:rPr sz="1200" b="0">
+                          <a:solidFill>
+                            <a:srgbClr val="1A1A1A"/>
+                          </a:solidFill>
+                          <a:latin typeface="Calibri"/>
+                        </a:rPr>
+                        <a:t>GPS looks fine / too high</a:t>
+                      </a:r>
+                    </a:p>
+                  </a:txBody>
+                  <a:tcPr anchor="ctr" marL="73152" marR="73152">
+                    <a:solidFill>
+                      <a:srgbClr val="ECECEC"/>
+                    </a:solidFill>
+                  </a:tcPr>
+                </a:tc>
+                <a:tc>
+                  <a:txBody>
+                    <a:bodyPr/>
+                    <a:lstStyle/>
+                    <a:p>
+                      <a:pPr algn="l"/>
+                      <a:r>
+                        <a:rPr sz="1200" b="0">
+                          <a:solidFill>
+                            <a:srgbClr val="1A1A1A"/>
+                          </a:solidFill>
+                          <a:latin typeface="Calibri"/>
+                        </a:rPr>
+                        <a:t>FY26 headline 82.6%; excl. warranty ≈ 72.8%. </a:t>
+                      </a:r>
+                    </a:p>
+                  </a:txBody>
+                  <a:tcPr anchor="ctr" marL="73152" marR="73152">
+                    <a:solidFill>
+                      <a:srgbClr val="ECECEC"/>
+                    </a:solidFill>
+                  </a:tcPr>
+                </a:tc>
+              </a:tr>
+              <a:tr h="960120">
+                <a:tc>
+                  <a:txBody>
+                    <a:bodyPr/>
+                    <a:lstStyle/>
+                    <a:p>
+                      <a:pPr algn="l"/>
+                      <a:r>
+                        <a:rPr sz="1200" b="0">
+                          <a:solidFill>
+                            <a:srgbClr val="1A1A1A"/>
+                          </a:solidFill>
+                          <a:latin typeface="Calibri"/>
+                        </a:rPr>
+                        <a:t>Service parts are fine</a:t>
+                      </a:r>
+                    </a:p>
+                  </a:txBody>
+                  <a:tcPr anchor="ctr" marL="73152" marR="73152">
+                    <a:solidFill>
+                      <a:srgbClr val="FFFFFF"/>
+                    </a:solidFill>
+                  </a:tcPr>
+                </a:tc>
+                <a:tc>
+                  <a:txBody>
+                    <a:bodyPr/>
+                    <a:lstStyle/>
+                    <a:p>
+                      <a:pPr algn="l"/>
+                      <a:r>
+                        <a:rPr sz="1200" b="0">
+                          <a:solidFill>
+                            <a:srgbClr val="1A1A1A"/>
+                          </a:solidFill>
+                          <a:latin typeface="Calibri"/>
+                        </a:rPr>
+                        <a:t>CY2025 capture vs network (previous slides) + FY billing lens.</a:t>
+                      </a:r>
+                    </a:p>
+                  </a:txBody>
+                  <a:tcPr anchor="ctr" marL="73152" marR="73152">
+                    <a:solidFill>
+                      <a:srgbClr val="FFFFFF"/>
+                    </a:solidFill>
+                  </a:tcPr>
+                </a:tc>
+              </a:tr>
+            </a:tbl>
+          </a:graphicData>
+        </a:graphic>
+      </p:graphicFrame>
+    </p:spTree>
+  </p:cSld>
+  <p:clrMapOvr>
+    <a:masterClrMapping/>
+  </p:clrMapOvr>
+</p:sld>
+</file>
+
+<file path=ppt/slides/slide32.xml><?xml version="1.0" encoding="utf-8"?>
+<p:sld xmlns:a="http://schemas.openxmlformats.org/drawingml/2006/main" xmlns:p="http://schemas.openxmlformats.org/presentationml/2006/main" xmlns:r="http://schemas.openxmlformats.org/officeDocument/2006/relationships">
+  <p:cSld>
+    <p:bg>
+      <p:bgPr>
+        <a:solidFill>
+          <a:srgbClr val="FFFFFF"/>
+        </a:solidFill>
+        <a:effectLst/>
+      </p:bgPr>
+    </p:bg>
+    <p:spTree>
+      <p:nvGrpSpPr>
+        <p:cNvPr id="1" name=""/>
+        <p:cNvGrpSpPr/>
+        <p:nvPr/>
+      </p:nvGrpSpPr>
+      <p:grpSpPr/>
+      <p:sp>
+        <p:nvSpPr>
+          <p:cNvPr id="2" name="Rectangle 1"/>
+          <p:cNvSpPr/>
+          <p:nvPr/>
+        </p:nvSpPr>
+        <p:spPr>
+          <a:xfrm>
+            <a:off x="0" y="0"/>
+            <a:ext cx="201168" cy="6858000"/>
+          </a:xfrm>
+          <a:prstGeom prst="rect">
+            <a:avLst/>
+          </a:prstGeom>
+          <a:solidFill>
+            <a:srgbClr val="CC0E1E"/>
+          </a:solidFill>
+          <a:ln>
+            <a:noFill/>
+          </a:ln>
+        </p:spPr>
+        <p:style>
+          <a:lnRef idx="1">
+            <a:schemeClr val="accent1"/>
+          </a:lnRef>
+          <a:fillRef idx="3">
+            <a:schemeClr val="accent1"/>
+          </a:fillRef>
+          <a:effectRef idx="2">
+            <a:schemeClr val="accent1"/>
+          </a:effectRef>
+          <a:fontRef idx="minor">
+            <a:schemeClr val="lt1"/>
+          </a:fontRef>
+        </p:style>
+        <p:txBody>
+          <a:bodyPr rtlCol="0" anchor="ctr"/>
+          <a:lstStyle/>
+          <a:p>
+            <a:pPr algn="ctr"/>
+          </a:p>
+        </p:txBody>
+      </p:sp>
+      <p:sp>
+        <p:nvSpPr>
+          <p:cNvPr id="3" name="TextBox 2"/>
+          <p:cNvSpPr txBox="1"/>
+          <p:nvPr/>
+        </p:nvSpPr>
+        <p:spPr>
+          <a:xfrm>
+            <a:off x="2286000" y="3063240"/>
+            <a:ext cx="7772400" cy="457200"/>
+          </a:xfrm>
+          <a:prstGeom prst="rect">
+            <a:avLst/>
+          </a:prstGeom>
+          <a:noFill/>
+        </p:spPr>
+        <p:txBody>
+          <a:bodyPr wrap="square">
+            <a:spAutoFit/>
+          </a:bodyPr>
+          <a:lstStyle/>
+          <a:p>
+            <a:pPr algn="ctr"/>
+            <a:r>
+              <a:rPr sz="1600" b="0">
+                <a:solidFill>
+                  <a:srgbClr val="5A5A5A"/>
+                </a:solidFill>
+                <a:latin typeface="Calibri"/>
+              </a:rPr>
+              <a:t>Moving the World – for You</a:t>
+            </a:r>
+          </a:p>
+        </p:txBody>
+      </p:sp>
+      <p:pic>
+        <p:nvPicPr>
+          <p:cNvPr id="4" name="Picture 3" descr="image.png"/>
+          <p:cNvPicPr>
+            <a:picLocks noChangeAspect="1"/>
+          </p:cNvPicPr>
+          <p:nvPr/>
+        </p:nvPicPr>
+        <p:blipFill>
+          <a:blip r:embed="rId2"/>
+          <a:stretch>
+            <a:fillRect/>
+          </a:stretch>
+        </p:blipFill>
+        <p:spPr>
+          <a:xfrm>
+            <a:off x="4631436" y="2468880"/>
+            <a:ext cx="2926080" cy="509704"/>
+          </a:xfrm>
+          <a:prstGeom prst="rect">
+            <a:avLst/>
+          </a:prstGeom>
+        </p:spPr>
+      </p:pic>
     </p:spTree>
   </p:cSld>
   <p:clrMapOvr>
@@ -10223,7 +17719,7 @@
                 </a:solidFill>
                 <a:latin typeface="Calibri"/>
               </a:rPr>
-              <a:t>Transmission parts — CY H1 2026 vs CY H1 2025</a:t>
+              <a:t>Transmission parts — CY H1 2026 vs CY H1 2025 (commercial, ex-warranty)</a:t>
             </a:r>
           </a:p>
         </p:txBody>
@@ -10337,7 +17833,7 @@
               </a:spcAft>
             </a:pPr>
             <a:r>
-              <a:rPr sz="1400" b="1">
+              <a:rPr sz="1300" b="1">
                 <a:solidFill>
                   <a:srgbClr val="CC0E1E"/>
                 </a:solidFill>
@@ -10346,7 +17842,7 @@
               <a:t>—  </a:t>
             </a:r>
             <a:r>
-              <a:rPr sz="1400">
+              <a:rPr sz="1300">
                 <a:solidFill>
                   <a:srgbClr val="1A1A1A"/>
                 </a:solidFill>
@@ -10365,7 +17861,7 @@
               </a:spcAft>
             </a:pPr>
             <a:r>
-              <a:rPr sz="1400" b="1">
+              <a:rPr sz="1300" b="1">
                 <a:solidFill>
                   <a:srgbClr val="CC0E1E"/>
                 </a:solidFill>
@@ -10374,13 +17870,13 @@
               <a:t>—  </a:t>
             </a:r>
             <a:r>
-              <a:rPr sz="1400">
+              <a:rPr sz="1300">
                 <a:solidFill>
                   <a:srgbClr val="1A1A1A"/>
                 </a:solidFill>
                 <a:latin typeface="Calibri"/>
               </a:rPr>
-              <a:t>8983952370 (DRIVE ASM; FINAL,RR): EUR 1,243 to EUR 0, 1 fewer pieces.</a:t>
+              <a:t>Largest part numbers driving the decline (by EUR):</a:t>
             </a:r>
           </a:p>
           <a:p>
@@ -10393,7 +17889,7 @@
               </a:spcAft>
             </a:pPr>
             <a:r>
-              <a:rPr sz="1400" b="1">
+              <a:rPr sz="1300" b="1">
                 <a:solidFill>
                   <a:srgbClr val="CC0E1E"/>
                 </a:solidFill>
@@ -10402,13 +17898,13 @@
               <a:t>—  </a:t>
             </a:r>
             <a:r>
-              <a:rPr sz="1400">
+              <a:rPr sz="1300">
                 <a:solidFill>
                   <a:srgbClr val="1A1A1A"/>
                 </a:solidFill>
                 <a:latin typeface="Calibri"/>
               </a:rPr>
-              <a:t>8973679590 (ACTUATOR; TRANSFER,2-4 SHIFT): EUR 827 to EUR 237, 5 fewer pieces.</a:t>
+              <a:t>8983952370 (DRIVE ASM; FINAL,RR): EUR 1,243 to EUR 0, 1 fewer pieces.</a:t>
             </a:r>
           </a:p>
           <a:p>
@@ -10421,7 +17917,7 @@
               </a:spcAft>
             </a:pPr>
             <a:r>
-              <a:rPr sz="1400" b="1">
+              <a:rPr sz="1300" b="1">
                 <a:solidFill>
                   <a:srgbClr val="CC0E1E"/>
                 </a:solidFill>
@@ -10430,13 +17926,69 @@
               <a:t>—  </a:t>
             </a:r>
             <a:r>
-              <a:rPr sz="1400">
+              <a:rPr sz="1300">
                 <a:solidFill>
                   <a:srgbClr val="1A1A1A"/>
                 </a:solidFill>
                 <a:latin typeface="Calibri"/>
               </a:rPr>
-              <a:t>BVP billing rose over the same window (EUR 5,601 to EUR 5,803) — worth checking how much of this is a move to the value tier rather than lost business.</a:t>
+              <a:t>8973679590 (ACTUATOR; TRANSFER,2-4 SHIFT): EUR 827 to EUR 237, 5 fewer pieces.</a:t>
+            </a:r>
+          </a:p>
+          <a:p>
+            <a:pPr>
+              <a:lnSpc>
+                <a:spcPct val="125000"/>
+              </a:lnSpc>
+              <a:spcAft>
+                <a:spcPts val="1000"/>
+              </a:spcAft>
+            </a:pPr>
+            <a:r>
+              <a:rPr sz="1300" b="1">
+                <a:solidFill>
+                  <a:srgbClr val="CC0E1E"/>
+                </a:solidFill>
+                <a:latin typeface="Calibri"/>
+              </a:rPr>
+              <a:t>—  </a:t>
+            </a:r>
+            <a:r>
+              <a:rPr sz="1300">
+                <a:solidFill>
+                  <a:srgbClr val="1A1A1A"/>
+                </a:solidFill>
+                <a:latin typeface="Calibri"/>
+              </a:rPr>
+              <a:t>8942588190 (BEARING; HUB INNER,FRT AXLE · TF*,UBS,UC*): EUR 191 to EUR 48, 6 fewer pieces.</a:t>
+            </a:r>
+          </a:p>
+          <a:p>
+            <a:pPr>
+              <a:lnSpc>
+                <a:spcPct val="125000"/>
+              </a:lnSpc>
+              <a:spcAft>
+                <a:spcPts val="1000"/>
+              </a:spcAft>
+            </a:pPr>
+            <a:r>
+              <a:rPr sz="1300" b="1">
+                <a:solidFill>
+                  <a:srgbClr val="CC0E1E"/>
+                </a:solidFill>
+                <a:latin typeface="Calibri"/>
+              </a:rPr>
+              <a:t>—  </a:t>
+            </a:r>
+            <a:r>
+              <a:rPr sz="1300">
+                <a:solidFill>
+                  <a:srgbClr val="1A1A1A"/>
+                </a:solidFill>
+                <a:latin typeface="Calibri"/>
+              </a:rPr>
+              <a:t>8942270410 (BEARING; HUB OUTER,FRT AXLE · TF*,UBS,UC*): EUR 174 to EUR 44, 6 fewer pieces.</a:t>
             </a:r>
           </a:p>
         </p:txBody>
@@ -10713,7 +18265,7 @@
                 </a:solidFill>
                 <a:latin typeface="Calibri"/>
               </a:rPr>
-              <a:t>Air conditioning — CY H1 2026 vs CY H1 2025</a:t>
+              <a:t>Air conditioning — CY H1 2026 vs CY H1 2025 (commercial, ex-warranty)</a:t>
             </a:r>
           </a:p>
         </p:txBody>
@@ -10827,7 +18379,7 @@
               </a:spcAft>
             </a:pPr>
             <a:r>
-              <a:rPr sz="1400" b="1">
+              <a:rPr sz="1300" b="1">
                 <a:solidFill>
                   <a:srgbClr val="CC0E1E"/>
                 </a:solidFill>
@@ -10836,7 +18388,7 @@
               <a:t>—  </a:t>
             </a:r>
             <a:r>
-              <a:rPr sz="1400">
+              <a:rPr sz="1300">
                 <a:solidFill>
                   <a:srgbClr val="1A1A1A"/>
                 </a:solidFill>
@@ -10855,7 +18407,7 @@
               </a:spcAft>
             </a:pPr>
             <a:r>
-              <a:rPr sz="1400" b="1">
+              <a:rPr sz="1300" b="1">
                 <a:solidFill>
                   <a:srgbClr val="CC0E1E"/>
                 </a:solidFill>
@@ -10864,13 +18416,125 @@
               <a:t>—  </a:t>
             </a:r>
             <a:r>
-              <a:rPr sz="1400">
+              <a:rPr sz="1300">
                 <a:solidFill>
                   <a:srgbClr val="1A1A1A"/>
                 </a:solidFill>
                 <a:latin typeface="Calibri"/>
               </a:rPr>
+              <a:t>Largest part numbers driving the decline (by EUR):</a:t>
+            </a:r>
+          </a:p>
+          <a:p>
+            <a:pPr>
+              <a:lnSpc>
+                <a:spcPct val="125000"/>
+              </a:lnSpc>
+              <a:spcAft>
+                <a:spcPts val="1000"/>
+              </a:spcAft>
+            </a:pPr>
+            <a:r>
+              <a:rPr sz="1300" b="1">
+                <a:solidFill>
+                  <a:srgbClr val="CC0E1E"/>
+                </a:solidFill>
+                <a:latin typeface="Calibri"/>
+              </a:rPr>
+              <a:t>—  </a:t>
+            </a:r>
+            <a:r>
+              <a:rPr sz="1300">
+                <a:solidFill>
+                  <a:srgbClr val="1A1A1A"/>
+                </a:solidFill>
+                <a:latin typeface="Calibri"/>
+              </a:rPr>
               <a:t>8980088940 (MOTOR ASM; FAN,BLOWER UNIT): EUR 890 to EUR 78, 11 fewer pieces.</a:t>
+            </a:r>
+          </a:p>
+          <a:p>
+            <a:pPr>
+              <a:lnSpc>
+                <a:spcPct val="125000"/>
+              </a:lnSpc>
+              <a:spcAft>
+                <a:spcPts val="1000"/>
+              </a:spcAft>
+            </a:pPr>
+            <a:r>
+              <a:rPr sz="1300" b="1">
+                <a:solidFill>
+                  <a:srgbClr val="CC0E1E"/>
+                </a:solidFill>
+                <a:latin typeface="Calibri"/>
+              </a:rPr>
+              <a:t>—  </a:t>
+            </a:r>
+            <a:r>
+              <a:rPr sz="1300">
+                <a:solidFill>
+                  <a:srgbClr val="1A1A1A"/>
+                </a:solidFill>
+                <a:latin typeface="Calibri"/>
+              </a:rPr>
+              <a:t>8981402660 (FILTER; ACL · TFR,TFS,UCR,UCS): EUR 310 to EUR 0, 14 fewer pieces.</a:t>
+            </a:r>
+          </a:p>
+          <a:p>
+            <a:pPr>
+              <a:lnSpc>
+                <a:spcPct val="125000"/>
+              </a:lnSpc>
+              <a:spcAft>
+                <a:spcPts val="1000"/>
+              </a:spcAft>
+            </a:pPr>
+            <a:r>
+              <a:rPr sz="1300" b="1">
+                <a:solidFill>
+                  <a:srgbClr val="CC0E1E"/>
+                </a:solidFill>
+                <a:latin typeface="Calibri"/>
+              </a:rPr>
+              <a:t>—  </a:t>
+            </a:r>
+            <a:r>
+              <a:rPr sz="1300">
+                <a:solidFill>
+                  <a:srgbClr val="1A1A1A"/>
+                </a:solidFill>
+                <a:latin typeface="Calibri"/>
+              </a:rPr>
+              <a:t>8975488420 (FILTER; BLOWER UNIT · TF*,UC*): EUR 232 to EUR 0, 14 fewer pieces.</a:t>
+            </a:r>
+          </a:p>
+          <a:p>
+            <a:pPr>
+              <a:lnSpc>
+                <a:spcPct val="125000"/>
+              </a:lnSpc>
+              <a:spcAft>
+                <a:spcPts val="1000"/>
+              </a:spcAft>
+            </a:pPr>
+            <a:r>
+              <a:rPr sz="1300" b="1">
+                <a:solidFill>
+                  <a:srgbClr val="CC0E1E"/>
+                </a:solidFill>
+                <a:latin typeface="Calibri"/>
+              </a:rPr>
+              <a:t>—  </a:t>
+            </a:r>
+            <a:r>
+              <a:rPr sz="1300">
+                <a:solidFill>
+                  <a:srgbClr val="1A1A1A"/>
+                </a:solidFill>
+                <a:latin typeface="Calibri"/>
+              </a:rPr>
+              <a:t>8980084420 (FILTER; EVAPORATOR): EUR 182 to EUR 0, 8 fewer pieces.</a:t>
             </a:r>
           </a:p>
         </p:txBody>
@@ -11147,7 +18811,7 @@
                 </a:solidFill>
                 <a:latin typeface="Calibri"/>
               </a:rPr>
-              <a:t>Where volume grew — CY H1 2026 vs CY H1 2025</a:t>
+              <a:t>Where volume grew — CY H1 2026 vs CY H1 2025 (commercial, ex-warranty)</a:t>
             </a:r>
           </a:p>
         </p:txBody>
@@ -11249,10 +18913,12 @@
                 <a:tableStyleId>{5C22544A-7EE6-4342-B048-85BDC9FD1C3A}</a:tableStyleId>
               </a:tblPr>
               <a:tblGrid>
-                <a:gridCol w="2194560"/>
-                <a:gridCol w="4480560"/>
-                <a:gridCol w="2468880"/>
-                <a:gridCol w="2468880"/>
+                <a:gridCol w="1737360"/>
+                <a:gridCol w="2926080"/>
+                <a:gridCol w="1645920"/>
+                <a:gridCol w="1737360"/>
+                <a:gridCol w="1737360"/>
+                <a:gridCol w="1828800"/>
               </a:tblGrid>
               <a:tr h="339634">
                 <a:tc>
@@ -11262,7 +18928,7 @@
                     <a:p>
                       <a:pPr algn="l"/>
                       <a:r>
-                        <a:rPr sz="1200" b="1">
+                        <a:rPr sz="1100" b="1">
                           <a:solidFill>
                             <a:srgbClr val="FFFFFF"/>
                           </a:solidFill>
@@ -11285,7 +18951,7 @@
                     <a:p>
                       <a:pPr algn="l"/>
                       <a:r>
-                        <a:rPr sz="1200" b="1">
+                        <a:rPr sz="1100" b="1">
                           <a:solidFill>
                             <a:srgbClr val="FFFFFF"/>
                           </a:solidFill>
@@ -11306,9 +18972,32 @@
                     <a:bodyPr/>
                     <a:lstStyle/>
                     <a:p>
+                      <a:pPr algn="l"/>
+                      <a:r>
+                        <a:rPr sz="1100" b="1">
+                          <a:solidFill>
+                            <a:srgbClr val="FFFFFF"/>
+                          </a:solidFill>
+                          <a:latin typeface="Calibri"/>
+                        </a:rPr>
+                        <a:t>Model</a:t>
+                      </a:r>
+                    </a:p>
+                  </a:txBody>
+                  <a:tcPr anchor="ctr" marL="73152" marR="73152">
+                    <a:solidFill>
+                      <a:srgbClr val="CC0E1E"/>
+                    </a:solidFill>
+                  </a:tcPr>
+                </a:tc>
+                <a:tc>
+                  <a:txBody>
+                    <a:bodyPr/>
+                    <a:lstStyle/>
+                    <a:p>
                       <a:pPr algn="r"/>
                       <a:r>
-                        <a:rPr sz="1200" b="1">
+                        <a:rPr sz="1100" b="1">
                           <a:solidFill>
                             <a:srgbClr val="FFFFFF"/>
                           </a:solidFill>
@@ -11331,13 +19020,36 @@
                     <a:p>
                       <a:pPr algn="r"/>
                       <a:r>
-                        <a:rPr sz="1200" b="1">
+                        <a:rPr sz="1100" b="1">
                           <a:solidFill>
                             <a:srgbClr val="FFFFFF"/>
                           </a:solidFill>
                           <a:latin typeface="Calibri"/>
                         </a:rPr>
                         <a:t>CY H1 2026</a:t>
+                      </a:r>
+                    </a:p>
+                  </a:txBody>
+                  <a:tcPr anchor="ctr" marL="73152" marR="73152">
+                    <a:solidFill>
+                      <a:srgbClr val="CC0E1E"/>
+                    </a:solidFill>
+                  </a:tcPr>
+                </a:tc>
+                <a:tc>
+                  <a:txBody>
+                    <a:bodyPr/>
+                    <a:lstStyle/>
+                    <a:p>
+                      <a:pPr algn="r"/>
+                      <a:r>
+                        <a:rPr sz="1100" b="1">
+                          <a:solidFill>
+                            <a:srgbClr val="FFFFFF"/>
+                          </a:solidFill>
+                          <a:latin typeface="Calibri"/>
+                        </a:rPr>
+                        <a:t>Δ EUR</a:t>
                       </a:r>
                     </a:p>
                   </a:txBody>
@@ -11356,7 +19068,7 @@
                     <a:p>
                       <a:pPr algn="l"/>
                       <a:r>
-                        <a:rPr sz="1200" b="0">
+                        <a:rPr sz="1100" b="0">
                           <a:solidFill>
                             <a:srgbClr val="1A1A1A"/>
                           </a:solidFill>
@@ -11379,7 +19091,7 @@
                     <a:p>
                       <a:pPr algn="l"/>
                       <a:r>
-                        <a:rPr sz="1200" b="0">
+                        <a:rPr sz="1100" b="0">
                           <a:solidFill>
                             <a:srgbClr val="1A1A1A"/>
                           </a:solidFill>
@@ -11400,9 +19112,32 @@
                     <a:bodyPr/>
                     <a:lstStyle/>
                     <a:p>
+                      <a:pPr algn="l"/>
+                      <a:r>
+                        <a:rPr sz="1100" b="0">
+                          <a:solidFill>
+                            <a:srgbClr val="1A1A1A"/>
+                          </a:solidFill>
+                          <a:latin typeface="Calibri"/>
+                        </a:rPr>
+                        <a:t>—</a:t>
+                      </a:r>
+                    </a:p>
+                  </a:txBody>
+                  <a:tcPr anchor="ctr" marL="73152" marR="73152">
+                    <a:solidFill>
+                      <a:srgbClr val="FFFFFF"/>
+                    </a:solidFill>
+                  </a:tcPr>
+                </a:tc>
+                <a:tc>
+                  <a:txBody>
+                    <a:bodyPr/>
+                    <a:lstStyle/>
+                    <a:p>
                       <a:pPr algn="r"/>
                       <a:r>
-                        <a:rPr sz="1200" b="0">
+                        <a:rPr sz="1100" b="0">
                           <a:solidFill>
                             <a:srgbClr val="1A1A1A"/>
                           </a:solidFill>
@@ -11425,13 +19160,36 @@
                     <a:p>
                       <a:pPr algn="r"/>
                       <a:r>
-                        <a:rPr sz="1200" b="0">
+                        <a:rPr sz="1100" b="0">
                           <a:solidFill>
                             <a:srgbClr val="1A1A1A"/>
                           </a:solidFill>
                           <a:latin typeface="Calibri"/>
                         </a:rPr>
                         <a:t>EUR 1,569</a:t>
+                      </a:r>
+                    </a:p>
+                  </a:txBody>
+                  <a:tcPr anchor="ctr" marL="73152" marR="73152">
+                    <a:solidFill>
+                      <a:srgbClr val="FFFFFF"/>
+                    </a:solidFill>
+                  </a:tcPr>
+                </a:tc>
+                <a:tc>
+                  <a:txBody>
+                    <a:bodyPr/>
+                    <a:lstStyle/>
+                    <a:p>
+                      <a:pPr algn="r"/>
+                      <a:r>
+                        <a:rPr sz="1100" b="0">
+                          <a:solidFill>
+                            <a:srgbClr val="1A1A1A"/>
+                          </a:solidFill>
+                          <a:latin typeface="Calibri"/>
+                        </a:rPr>
+                        <a:t>EUR 1,099</a:t>
                       </a:r>
                     </a:p>
                   </a:txBody>
@@ -11450,7 +19208,7 @@
                     <a:p>
                       <a:pPr algn="l"/>
                       <a:r>
-                        <a:rPr sz="1200" b="0">
+                        <a:rPr sz="1100" b="0">
                           <a:solidFill>
                             <a:srgbClr val="1A1A1A"/>
                           </a:solidFill>
@@ -11473,13 +19231,36 @@
                     <a:p>
                       <a:pPr algn="l"/>
                       <a:r>
-                        <a:rPr sz="1200" b="0">
+                        <a:rPr sz="1100" b="0">
                           <a:solidFill>
                             <a:srgbClr val="1A1A1A"/>
                           </a:solidFill>
                           <a:latin typeface="Calibri"/>
                         </a:rPr>
-                        <a:t>PAD KIT; DISC BRK,W/O SHIM &amp; CLIP</a:t>
+                        <a:t>PAD KIT; DISC BRK,W/O SHIM &amp;</a:t>
+                      </a:r>
+                    </a:p>
+                  </a:txBody>
+                  <a:tcPr anchor="ctr" marL="73152" marR="73152">
+                    <a:solidFill>
+                      <a:srgbClr val="ECECEC"/>
+                    </a:solidFill>
+                  </a:tcPr>
+                </a:tc>
+                <a:tc>
+                  <a:txBody>
+                    <a:bodyPr/>
+                    <a:lstStyle/>
+                    <a:p>
+                      <a:pPr algn="l"/>
+                      <a:r>
+                        <a:rPr sz="1100" b="0">
+                          <a:solidFill>
+                            <a:srgbClr val="1A1A1A"/>
+                          </a:solidFill>
+                          <a:latin typeface="Calibri"/>
+                        </a:rPr>
+                        <a:t>—</a:t>
                       </a:r>
                     </a:p>
                   </a:txBody>
@@ -11496,7 +19277,7 @@
                     <a:p>
                       <a:pPr algn="r"/>
                       <a:r>
-                        <a:rPr sz="1200" b="0">
+                        <a:rPr sz="1100" b="0">
                           <a:solidFill>
                             <a:srgbClr val="1A1A1A"/>
                           </a:solidFill>
@@ -11519,13 +19300,36 @@
                     <a:p>
                       <a:pPr algn="r"/>
                       <a:r>
-                        <a:rPr sz="1200" b="0">
+                        <a:rPr sz="1100" b="0">
                           <a:solidFill>
                             <a:srgbClr val="1A1A1A"/>
                           </a:solidFill>
                           <a:latin typeface="Calibri"/>
                         </a:rPr>
                         <a:t>EUR 817</a:t>
+                      </a:r>
+                    </a:p>
+                  </a:txBody>
+                  <a:tcPr anchor="ctr" marL="73152" marR="73152">
+                    <a:solidFill>
+                      <a:srgbClr val="ECECEC"/>
+                    </a:solidFill>
+                  </a:tcPr>
+                </a:tc>
+                <a:tc>
+                  <a:txBody>
+                    <a:bodyPr/>
+                    <a:lstStyle/>
+                    <a:p>
+                      <a:pPr algn="r"/>
+                      <a:r>
+                        <a:rPr sz="1100" b="0">
+                          <a:solidFill>
+                            <a:srgbClr val="1A1A1A"/>
+                          </a:solidFill>
+                          <a:latin typeface="Calibri"/>
+                        </a:rPr>
+                        <a:t>EUR 611</a:t>
                       </a:r>
                     </a:p>
                   </a:txBody>
@@ -11544,7 +19348,7 @@
                     <a:p>
                       <a:pPr algn="l"/>
                       <a:r>
-                        <a:rPr sz="1200" b="0">
+                        <a:rPr sz="1100" b="0">
                           <a:solidFill>
                             <a:srgbClr val="1A1A1A"/>
                           </a:solidFill>
@@ -11567,7 +19371,7 @@
                     <a:p>
                       <a:pPr algn="l"/>
                       <a:r>
-                        <a:rPr sz="1200" b="0">
+                        <a:rPr sz="1100" b="0">
                           <a:solidFill>
                             <a:srgbClr val="1A1A1A"/>
                           </a:solidFill>
@@ -11588,9 +19392,32 @@
                     <a:bodyPr/>
                     <a:lstStyle/>
                     <a:p>
+                      <a:pPr algn="l"/>
+                      <a:r>
+                        <a:rPr sz="1100" b="0">
+                          <a:solidFill>
+                            <a:srgbClr val="1A1A1A"/>
+                          </a:solidFill>
+                          <a:latin typeface="Calibri"/>
+                        </a:rPr>
+                        <a:t>—</a:t>
+                      </a:r>
+                    </a:p>
+                  </a:txBody>
+                  <a:tcPr anchor="ctr" marL="73152" marR="73152">
+                    <a:solidFill>
+                      <a:srgbClr val="FFFFFF"/>
+                    </a:solidFill>
+                  </a:tcPr>
+                </a:tc>
+                <a:tc>
+                  <a:txBody>
+                    <a:bodyPr/>
+                    <a:lstStyle/>
+                    <a:p>
                       <a:pPr algn="r"/>
                       <a:r>
-                        <a:rPr sz="1200" b="0">
+                        <a:rPr sz="1100" b="0">
                           <a:solidFill>
                             <a:srgbClr val="1A1A1A"/>
                           </a:solidFill>
@@ -11613,13 +19440,36 @@
                     <a:p>
                       <a:pPr algn="r"/>
                       <a:r>
-                        <a:rPr sz="1200" b="0">
+                        <a:rPr sz="1100" b="0">
                           <a:solidFill>
                             <a:srgbClr val="1A1A1A"/>
                           </a:solidFill>
                           <a:latin typeface="Calibri"/>
                         </a:rPr>
                         <a:t>EUR 412</a:t>
+                      </a:r>
+                    </a:p>
+                  </a:txBody>
+                  <a:tcPr anchor="ctr" marL="73152" marR="73152">
+                    <a:solidFill>
+                      <a:srgbClr val="FFFFFF"/>
+                    </a:solidFill>
+                  </a:tcPr>
+                </a:tc>
+                <a:tc>
+                  <a:txBody>
+                    <a:bodyPr/>
+                    <a:lstStyle/>
+                    <a:p>
+                      <a:pPr algn="r"/>
+                      <a:r>
+                        <a:rPr sz="1100" b="0">
+                          <a:solidFill>
+                            <a:srgbClr val="1A1A1A"/>
+                          </a:solidFill>
+                          <a:latin typeface="Calibri"/>
+                        </a:rPr>
+                        <a:t>EUR 309</a:t>
                       </a:r>
                     </a:p>
                   </a:txBody>
@@ -11638,7 +19488,7 @@
                     <a:p>
                       <a:pPr algn="l"/>
                       <a:r>
-                        <a:rPr sz="1200" b="0">
+                        <a:rPr sz="1100" b="0">
                           <a:solidFill>
                             <a:srgbClr val="1A1A1A"/>
                           </a:solidFill>
@@ -11661,7 +19511,7 @@
                     <a:p>
                       <a:pPr algn="l"/>
                       <a:r>
-                        <a:rPr sz="1200" b="0">
+                        <a:rPr sz="1100" b="0">
                           <a:solidFill>
                             <a:srgbClr val="1A1A1A"/>
                           </a:solidFill>
@@ -11682,9 +19532,32 @@
                     <a:bodyPr/>
                     <a:lstStyle/>
                     <a:p>
+                      <a:pPr algn="l"/>
+                      <a:r>
+                        <a:rPr sz="1100" b="0">
+                          <a:solidFill>
+                            <a:srgbClr val="1A1A1A"/>
+                          </a:solidFill>
+                          <a:latin typeface="Calibri"/>
+                        </a:rPr>
+                        <a:t>—</a:t>
+                      </a:r>
+                    </a:p>
+                  </a:txBody>
+                  <a:tcPr anchor="ctr" marL="73152" marR="73152">
+                    <a:solidFill>
+                      <a:srgbClr val="ECECEC"/>
+                    </a:solidFill>
+                  </a:tcPr>
+                </a:tc>
+                <a:tc>
+                  <a:txBody>
+                    <a:bodyPr/>
+                    <a:lstStyle/>
+                    <a:p>
                       <a:pPr algn="r"/>
                       <a:r>
-                        <a:rPr sz="1200" b="0">
+                        <a:rPr sz="1100" b="0">
                           <a:solidFill>
                             <a:srgbClr val="1A1A1A"/>
                           </a:solidFill>
@@ -11707,13 +19580,36 @@
                     <a:p>
                       <a:pPr algn="r"/>
                       <a:r>
-                        <a:rPr sz="1200" b="0">
+                        <a:rPr sz="1100" b="0">
                           <a:solidFill>
                             <a:srgbClr val="1A1A1A"/>
                           </a:solidFill>
                           <a:latin typeface="Calibri"/>
                         </a:rPr>
                         <a:t>EUR 610</a:t>
+                      </a:r>
+                    </a:p>
+                  </a:txBody>
+                  <a:tcPr anchor="ctr" marL="73152" marR="73152">
+                    <a:solidFill>
+                      <a:srgbClr val="ECECEC"/>
+                    </a:solidFill>
+                  </a:tcPr>
+                </a:tc>
+                <a:tc>
+                  <a:txBody>
+                    <a:bodyPr/>
+                    <a:lstStyle/>
+                    <a:p>
+                      <a:pPr algn="r"/>
+                      <a:r>
+                        <a:rPr sz="1100" b="0">
+                          <a:solidFill>
+                            <a:srgbClr val="1A1A1A"/>
+                          </a:solidFill>
+                          <a:latin typeface="Calibri"/>
+                        </a:rPr>
+                        <a:t>EUR 304</a:t>
                       </a:r>
                     </a:p>
                   </a:txBody>
@@ -11732,7 +19628,7 @@
                     <a:p>
                       <a:pPr algn="l"/>
                       <a:r>
-                        <a:rPr sz="1200" b="0">
+                        <a:rPr sz="1100" b="0">
                           <a:solidFill>
                             <a:srgbClr val="1A1A1A"/>
                           </a:solidFill>
@@ -11755,13 +19651,36 @@
                     <a:p>
                       <a:pPr algn="l"/>
                       <a:r>
-                        <a:rPr sz="1200" b="0">
+                        <a:rPr sz="1100" b="0">
                           <a:solidFill>
                             <a:srgbClr val="1A1A1A"/>
                           </a:solidFill>
                           <a:latin typeface="Calibri"/>
                         </a:rPr>
-                        <a:t>PAD KIT; CALIPER,DISC BRK,FRT</a:t>
+                        <a:t>PAD KIT; CALIPER,DISC BRK,FR</a:t>
+                      </a:r>
+                    </a:p>
+                  </a:txBody>
+                  <a:tcPr anchor="ctr" marL="73152" marR="73152">
+                    <a:solidFill>
+                      <a:srgbClr val="FFFFFF"/>
+                    </a:solidFill>
+                  </a:tcPr>
+                </a:tc>
+                <a:tc>
+                  <a:txBody>
+                    <a:bodyPr/>
+                    <a:lstStyle/>
+                    <a:p>
+                      <a:pPr algn="l"/>
+                      <a:r>
+                        <a:rPr sz="1100" b="0">
+                          <a:solidFill>
+                            <a:srgbClr val="1A1A1A"/>
+                          </a:solidFill>
+                          <a:latin typeface="Calibri"/>
+                        </a:rPr>
+                        <a:t>TF*</a:t>
                       </a:r>
                     </a:p>
                   </a:txBody>
@@ -11778,7 +19697,7 @@
                     <a:p>
                       <a:pPr algn="r"/>
                       <a:r>
-                        <a:rPr sz="1200" b="0">
+                        <a:rPr sz="1100" b="0">
                           <a:solidFill>
                             <a:srgbClr val="1A1A1A"/>
                           </a:solidFill>
@@ -11801,13 +19720,36 @@
                     <a:p>
                       <a:pPr algn="r"/>
                       <a:r>
-                        <a:rPr sz="1200" b="0">
+                        <a:rPr sz="1100" b="0">
                           <a:solidFill>
                             <a:srgbClr val="1A1A1A"/>
                           </a:solidFill>
                           <a:latin typeface="Calibri"/>
                         </a:rPr>
                         <a:t>EUR 489</a:t>
+                      </a:r>
+                    </a:p>
+                  </a:txBody>
+                  <a:tcPr anchor="ctr" marL="73152" marR="73152">
+                    <a:solidFill>
+                      <a:srgbClr val="FFFFFF"/>
+                    </a:solidFill>
+                  </a:tcPr>
+                </a:tc>
+                <a:tc>
+                  <a:txBody>
+                    <a:bodyPr/>
+                    <a:lstStyle/>
+                    <a:p>
+                      <a:pPr algn="r"/>
+                      <a:r>
+                        <a:rPr sz="1100" b="0">
+                          <a:solidFill>
+                            <a:srgbClr val="1A1A1A"/>
+                          </a:solidFill>
+                          <a:latin typeface="Calibri"/>
+                        </a:rPr>
+                        <a:t>EUR 241</a:t>
                       </a:r>
                     </a:p>
                   </a:txBody>
@@ -11826,7 +19768,7 @@
                     <a:p>
                       <a:pPr algn="l"/>
                       <a:r>
-                        <a:rPr sz="1200" b="0">
+                        <a:rPr sz="1100" b="0">
                           <a:solidFill>
                             <a:srgbClr val="1A1A1A"/>
                           </a:solidFill>
@@ -11849,7 +19791,7 @@
                     <a:p>
                       <a:pPr algn="l"/>
                       <a:r>
-                        <a:rPr sz="1200" b="0">
+                        <a:rPr sz="1100" b="0">
                           <a:solidFill>
                             <a:srgbClr val="1A1A1A"/>
                           </a:solidFill>
@@ -11870,9 +19812,32 @@
                     <a:bodyPr/>
                     <a:lstStyle/>
                     <a:p>
+                      <a:pPr algn="l"/>
+                      <a:r>
+                        <a:rPr sz="1100" b="0">
+                          <a:solidFill>
+                            <a:srgbClr val="1A1A1A"/>
+                          </a:solidFill>
+                          <a:latin typeface="Calibri"/>
+                        </a:rPr>
+                        <a:t>—</a:t>
+                      </a:r>
+                    </a:p>
+                  </a:txBody>
+                  <a:tcPr anchor="ctr" marL="73152" marR="73152">
+                    <a:solidFill>
+                      <a:srgbClr val="ECECEC"/>
+                    </a:solidFill>
+                  </a:tcPr>
+                </a:tc>
+                <a:tc>
+                  <a:txBody>
+                    <a:bodyPr/>
+                    <a:lstStyle/>
+                    <a:p>
                       <a:pPr algn="r"/>
                       <a:r>
-                        <a:rPr sz="1200" b="0">
+                        <a:rPr sz="1100" b="0">
                           <a:solidFill>
                             <a:srgbClr val="1A1A1A"/>
                           </a:solidFill>
@@ -11895,7 +19860,7 @@
                     <a:p>
                       <a:pPr algn="r"/>
                       <a:r>
-                        <a:rPr sz="1200" b="0">
+                        <a:rPr sz="1100" b="0">
                           <a:solidFill>
                             <a:srgbClr val="1A1A1A"/>
                           </a:solidFill>
@@ -11911,6 +19876,29 @@
                     </a:solidFill>
                   </a:tcPr>
                 </a:tc>
+                <a:tc>
+                  <a:txBody>
+                    <a:bodyPr/>
+                    <a:lstStyle/>
+                    <a:p>
+                      <a:pPr algn="r"/>
+                      <a:r>
+                        <a:rPr sz="1100" b="0">
+                          <a:solidFill>
+                            <a:srgbClr val="1A1A1A"/>
+                          </a:solidFill>
+                          <a:latin typeface="Calibri"/>
+                        </a:rPr>
+                        <a:t>EUR 196</a:t>
+                      </a:r>
+                    </a:p>
+                  </a:txBody>
+                  <a:tcPr anchor="ctr" marL="73152" marR="73152">
+                    <a:solidFill>
+                      <a:srgbClr val="ECECEC"/>
+                    </a:solidFill>
+                  </a:tcPr>
+                </a:tc>
               </a:tr>
             </a:tbl>
           </a:graphicData>
@@ -11962,7 +19950,7 @@
                 </a:solidFill>
                 <a:latin typeface="Calibri"/>
               </a:rPr>
-              <a:t>Engine parts +2093%, Exhaust +125% — where the volume went.</a:t>
+              <a:t>Electrical sensors +56%, Exhaust +125% — where the commercial volume went.</a:t>
             </a:r>
           </a:p>
           <a:p>
@@ -11990,7 +19978,7 @@
                 </a:solidFill>
                 <a:latin typeface="Calibri"/>
               </a:rPr>
-              <a:t>Several of these are the kind of item that also moves on a campaign or claim. Iceland warranty parts ran to EUR 7K across CY2025, so we would not read this list as purely commercial growth without checking it against claims together.</a:t>
+              <a:t>Claim-matched PNs (28 distinct) and campaign/recall text matches are already excluded from this growth list. Residual warranty on unmapped PNs can remain.</a:t>
             </a:r>
           </a:p>
           <a:p>
@@ -12018,7 +20006,7 @@
                 </a:solidFill>
                 <a:latin typeface="Calibri"/>
               </a:rPr>
-              <a:t>Worth agreeing which of these are repeatable and which were one-off.</a:t>
+              <a:t>PNs ranked by largest EUR increase (prior-period sales &gt; 0). Worth agreeing which of these are repeatable and which were one-off.</a:t>
             </a:r>
           </a:p>
         </p:txBody>
@@ -12559,7 +20547,7 @@
                           </a:solidFill>
                           <a:latin typeface="Calibri"/>
                         </a:rPr>
-                        <a:t>Validate</a:t>
+                        <a:t>Warranty / campaign</a:t>
                       </a:r>
                     </a:p>
                   </a:txBody>
